--- a/Materials/1640-1700_Goto/08Apr2026_R_with_Pharma_Lab.pptx
+++ b/Materials/1640-1700_Goto/08Apr2026_R_with_Pharma_Lab.pptx
@@ -21,29 +21,29 @@
     <p:sldId id="282" r:id="rId15"/>
     <p:sldId id="283" r:id="rId16"/>
     <p:sldId id="292" r:id="rId17"/>
-    <p:sldId id="285" r:id="rId18"/>
-    <p:sldId id="269" r:id="rId19"/>
-    <p:sldId id="263" r:id="rId20"/>
-    <p:sldId id="296" r:id="rId21"/>
-    <p:sldId id="297" r:id="rId22"/>
-    <p:sldId id="298" r:id="rId23"/>
-    <p:sldId id="299" r:id="rId24"/>
-    <p:sldId id="300" r:id="rId25"/>
-    <p:sldId id="301" r:id="rId26"/>
-    <p:sldId id="302" r:id="rId27"/>
-    <p:sldId id="303" r:id="rId28"/>
-    <p:sldId id="312" r:id="rId29"/>
-    <p:sldId id="270" r:id="rId30"/>
-    <p:sldId id="308" r:id="rId31"/>
-    <p:sldId id="304" r:id="rId32"/>
-    <p:sldId id="305" r:id="rId33"/>
-    <p:sldId id="306" r:id="rId34"/>
-    <p:sldId id="307" r:id="rId35"/>
-    <p:sldId id="310" r:id="rId36"/>
-    <p:sldId id="309" r:id="rId37"/>
-    <p:sldId id="272" r:id="rId38"/>
-    <p:sldId id="311" r:id="rId39"/>
-    <p:sldId id="260" r:id="rId40"/>
+    <p:sldId id="260" r:id="rId18"/>
+    <p:sldId id="285" r:id="rId19"/>
+    <p:sldId id="269" r:id="rId20"/>
+    <p:sldId id="263" r:id="rId21"/>
+    <p:sldId id="296" r:id="rId22"/>
+    <p:sldId id="297" r:id="rId23"/>
+    <p:sldId id="298" r:id="rId24"/>
+    <p:sldId id="299" r:id="rId25"/>
+    <p:sldId id="300" r:id="rId26"/>
+    <p:sldId id="301" r:id="rId27"/>
+    <p:sldId id="302" r:id="rId28"/>
+    <p:sldId id="303" r:id="rId29"/>
+    <p:sldId id="312" r:id="rId30"/>
+    <p:sldId id="270" r:id="rId31"/>
+    <p:sldId id="308" r:id="rId32"/>
+    <p:sldId id="304" r:id="rId33"/>
+    <p:sldId id="305" r:id="rId34"/>
+    <p:sldId id="306" r:id="rId35"/>
+    <p:sldId id="307" r:id="rId36"/>
+    <p:sldId id="310" r:id="rId37"/>
+    <p:sldId id="309" r:id="rId38"/>
+    <p:sldId id="272" r:id="rId39"/>
+    <p:sldId id="311" r:id="rId40"/>
     <p:sldId id="264" r:id="rId41"/>
     <p:sldId id="274" r:id="rId42"/>
   </p:sldIdLst>
@@ -153,957 +153,6 @@
     </p:ext>
   </p:extLst>
 </p:presentation>
-</file>
-
-<file path=ppt/revisionInfo.xml><?xml version="1.0" encoding="utf-8"?>
-<p1510:revInfo xmlns:a="http://schemas.openxmlformats.org/drawingml/2006/main" xmlns:r="http://schemas.openxmlformats.org/officeDocument/2006/relationships" xmlns:p1510="http://schemas.microsoft.com/office/powerpoint/2015/10/main">
-  <p1510:revLst>
-    <p1510:client id="{0FC40E44-04BE-416C-A009-4F41DAD4B121}" v="8" dt="2026-04-03T02:35:55.498"/>
-  </p1510:revLst>
-</p1510:revInfo>
-</file>
-
-<file path=ppt/changesInfos/changesInfo1.xml><?xml version="1.0" encoding="utf-8"?>
-<pc:chgInfo xmlns:a="http://schemas.openxmlformats.org/drawingml/2006/main" xmlns:r="http://schemas.openxmlformats.org/officeDocument/2006/relationships" xmlns:ac="http://schemas.microsoft.com/office/drawing/2013/main/command" xmlns:pc="http://schemas.microsoft.com/office/powerpoint/2013/main/command">
-  <pc:docChgLst>
-    <pc:chgData name="Goto Shunsuke" userId="129927c5-953e-4c56-bf1c-bf65a9796978" providerId="ADAL" clId="{8FD34E34-B40C-45C9-ABBF-C1B5D0E6E312}"/>
-    <pc:docChg chg="undo redo custSel addSld delSld modSld sldOrd">
-      <pc:chgData name="Goto Shunsuke" userId="129927c5-953e-4c56-bf1c-bf65a9796978" providerId="ADAL" clId="{8FD34E34-B40C-45C9-ABBF-C1B5D0E6E312}" dt="2026-04-03T02:37:09.614" v="15964" actId="1076"/>
-      <pc:docMkLst>
-        <pc:docMk/>
-      </pc:docMkLst>
-      <pc:sldChg chg="modSp mod modNotesTx">
-        <pc:chgData name="Goto Shunsuke" userId="129927c5-953e-4c56-bf1c-bf65a9796978" providerId="ADAL" clId="{8FD34E34-B40C-45C9-ABBF-C1B5D0E6E312}" dt="2026-03-30T09:57:59.923" v="15688" actId="20577"/>
-        <pc:sldMkLst>
-          <pc:docMk/>
-          <pc:sldMk cId="2089644750" sldId="258"/>
-        </pc:sldMkLst>
-        <pc:spChg chg="mod">
-          <ac:chgData name="Goto Shunsuke" userId="129927c5-953e-4c56-bf1c-bf65a9796978" providerId="ADAL" clId="{8FD34E34-B40C-45C9-ABBF-C1B5D0E6E312}" dt="2026-03-30T09:57:59.923" v="15688" actId="20577"/>
-          <ac:spMkLst>
-            <pc:docMk/>
-            <pc:sldMk cId="2089644750" sldId="258"/>
-            <ac:spMk id="2" creationId="{E028CB83-353F-E94E-D13E-892D0FFEF954}"/>
-          </ac:spMkLst>
-        </pc:spChg>
-        <pc:spChg chg="mod">
-          <ac:chgData name="Goto Shunsuke" userId="129927c5-953e-4c56-bf1c-bf65a9796978" providerId="ADAL" clId="{8FD34E34-B40C-45C9-ABBF-C1B5D0E6E312}" dt="2026-03-24T04:44:42.068" v="13030" actId="20577"/>
-          <ac:spMkLst>
-            <pc:docMk/>
-            <pc:sldMk cId="2089644750" sldId="258"/>
-            <ac:spMk id="5" creationId="{DA6E8144-ACB0-EBA6-795D-EAFD5F024291}"/>
-          </ac:spMkLst>
-        </pc:spChg>
-        <pc:spChg chg="mod">
-          <ac:chgData name="Goto Shunsuke" userId="129927c5-953e-4c56-bf1c-bf65a9796978" providerId="ADAL" clId="{8FD34E34-B40C-45C9-ABBF-C1B5D0E6E312}" dt="2026-03-24T04:53:06.530" v="13136" actId="20577"/>
-          <ac:spMkLst>
-            <pc:docMk/>
-            <pc:sldMk cId="2089644750" sldId="258"/>
-            <ac:spMk id="6" creationId="{FC496492-2631-60AB-E822-0EB100F7A122}"/>
-          </ac:spMkLst>
-        </pc:spChg>
-      </pc:sldChg>
-      <pc:sldChg chg="add">
-        <pc:chgData name="Goto Shunsuke" userId="129927c5-953e-4c56-bf1c-bf65a9796978" providerId="ADAL" clId="{8FD34E34-B40C-45C9-ABBF-C1B5D0E6E312}" dt="2026-03-30T09:56:36.831" v="15600"/>
-        <pc:sldMkLst>
-          <pc:docMk/>
-          <pc:sldMk cId="3062608193" sldId="260"/>
-        </pc:sldMkLst>
-      </pc:sldChg>
-      <pc:sldChg chg="modSp add del mod">
-        <pc:chgData name="Goto Shunsuke" userId="129927c5-953e-4c56-bf1c-bf65a9796978" providerId="ADAL" clId="{8FD34E34-B40C-45C9-ABBF-C1B5D0E6E312}" dt="2026-03-24T04:43:24.355" v="12987" actId="20577"/>
-        <pc:sldMkLst>
-          <pc:docMk/>
-          <pc:sldMk cId="2286145451" sldId="261"/>
-        </pc:sldMkLst>
-        <pc:spChg chg="mod">
-          <ac:chgData name="Goto Shunsuke" userId="129927c5-953e-4c56-bf1c-bf65a9796978" providerId="ADAL" clId="{8FD34E34-B40C-45C9-ABBF-C1B5D0E6E312}" dt="2026-03-24T04:43:24.355" v="12987" actId="20577"/>
-          <ac:spMkLst>
-            <pc:docMk/>
-            <pc:sldMk cId="2286145451" sldId="261"/>
-            <ac:spMk id="2" creationId="{5D404109-E5CC-58FD-E3D5-7D6FD79BF188}"/>
-          </ac:spMkLst>
-        </pc:spChg>
-      </pc:sldChg>
-      <pc:sldChg chg="addSp delSp modSp mod">
-        <pc:chgData name="Goto Shunsuke" userId="129927c5-953e-4c56-bf1c-bf65a9796978" providerId="ADAL" clId="{8FD34E34-B40C-45C9-ABBF-C1B5D0E6E312}" dt="2026-03-30T09:22:05.406" v="15008" actId="1076"/>
-        <pc:sldMkLst>
-          <pc:docMk/>
-          <pc:sldMk cId="1424682384" sldId="262"/>
-        </pc:sldMkLst>
-        <pc:picChg chg="add mod">
-          <ac:chgData name="Goto Shunsuke" userId="129927c5-953e-4c56-bf1c-bf65a9796978" providerId="ADAL" clId="{8FD34E34-B40C-45C9-ABBF-C1B5D0E6E312}" dt="2026-03-30T09:22:05.406" v="15008" actId="1076"/>
-          <ac:picMkLst>
-            <pc:docMk/>
-            <pc:sldMk cId="1424682384" sldId="262"/>
-            <ac:picMk id="5" creationId="{3C6B5DD5-0C85-B735-4C60-BBAE1EA05F6B}"/>
-          </ac:picMkLst>
-        </pc:picChg>
-      </pc:sldChg>
-      <pc:sldChg chg="addSp delSp modSp mod modNotesTx">
-        <pc:chgData name="Goto Shunsuke" userId="129927c5-953e-4c56-bf1c-bf65a9796978" providerId="ADAL" clId="{8FD34E34-B40C-45C9-ABBF-C1B5D0E6E312}" dt="2026-03-24T05:10:49.060" v="13216" actId="1076"/>
-        <pc:sldMkLst>
-          <pc:docMk/>
-          <pc:sldMk cId="3249225230" sldId="263"/>
-        </pc:sldMkLst>
-        <pc:spChg chg="mod">
-          <ac:chgData name="Goto Shunsuke" userId="129927c5-953e-4c56-bf1c-bf65a9796978" providerId="ADAL" clId="{8FD34E34-B40C-45C9-ABBF-C1B5D0E6E312}" dt="2026-03-24T05:10:41.910" v="13214" actId="6549"/>
-          <ac:spMkLst>
-            <pc:docMk/>
-            <pc:sldMk cId="3249225230" sldId="263"/>
-            <ac:spMk id="2" creationId="{FAB931DC-688C-5C48-209A-844A427062B7}"/>
-          </ac:spMkLst>
-        </pc:spChg>
-        <pc:spChg chg="mod">
-          <ac:chgData name="Goto Shunsuke" userId="129927c5-953e-4c56-bf1c-bf65a9796978" providerId="ADAL" clId="{8FD34E34-B40C-45C9-ABBF-C1B5D0E6E312}" dt="2026-03-24T05:09:21.679" v="13173" actId="20577"/>
-          <ac:spMkLst>
-            <pc:docMk/>
-            <pc:sldMk cId="3249225230" sldId="263"/>
-            <ac:spMk id="3" creationId="{012863EA-E95E-96EC-CE47-DD11F2948405}"/>
-          </ac:spMkLst>
-        </pc:spChg>
-        <pc:picChg chg="add mod">
-          <ac:chgData name="Goto Shunsuke" userId="129927c5-953e-4c56-bf1c-bf65a9796978" providerId="ADAL" clId="{8FD34E34-B40C-45C9-ABBF-C1B5D0E6E312}" dt="2026-03-24T05:10:49.060" v="13216" actId="1076"/>
-          <ac:picMkLst>
-            <pc:docMk/>
-            <pc:sldMk cId="3249225230" sldId="263"/>
-            <ac:picMk id="6" creationId="{948CAB46-8D4C-445E-0E77-7B140AD2D415}"/>
-          </ac:picMkLst>
-        </pc:picChg>
-      </pc:sldChg>
-      <pc:sldChg chg="add">
-        <pc:chgData name="Goto Shunsuke" userId="129927c5-953e-4c56-bf1c-bf65a9796978" providerId="ADAL" clId="{8FD34E34-B40C-45C9-ABBF-C1B5D0E6E312}" dt="2026-03-30T09:55:58.270" v="15594"/>
-        <pc:sldMkLst>
-          <pc:docMk/>
-          <pc:sldMk cId="11461295" sldId="264"/>
-        </pc:sldMkLst>
-      </pc:sldChg>
-      <pc:sldChg chg="modSp mod">
-        <pc:chgData name="Goto Shunsuke" userId="129927c5-953e-4c56-bf1c-bf65a9796978" providerId="ADAL" clId="{8FD34E34-B40C-45C9-ABBF-C1B5D0E6E312}" dt="2026-03-30T09:57:12.270" v="15619" actId="20577"/>
-        <pc:sldMkLst>
-          <pc:docMk/>
-          <pc:sldMk cId="1868981238" sldId="267"/>
-        </pc:sldMkLst>
-        <pc:spChg chg="mod">
-          <ac:chgData name="Goto Shunsuke" userId="129927c5-953e-4c56-bf1c-bf65a9796978" providerId="ADAL" clId="{8FD34E34-B40C-45C9-ABBF-C1B5D0E6E312}" dt="2026-03-30T09:57:12.270" v="15619" actId="20577"/>
-          <ac:spMkLst>
-            <pc:docMk/>
-            <pc:sldMk cId="1868981238" sldId="267"/>
-            <ac:spMk id="2" creationId="{9259A228-343C-E370-F0F0-883395C4A557}"/>
-          </ac:spMkLst>
-        </pc:spChg>
-      </pc:sldChg>
-      <pc:sldChg chg="modSp mod">
-        <pc:chgData name="Goto Shunsuke" userId="129927c5-953e-4c56-bf1c-bf65a9796978" providerId="ADAL" clId="{8FD34E34-B40C-45C9-ABBF-C1B5D0E6E312}" dt="2026-03-24T05:10:22.054" v="13178" actId="20577"/>
-        <pc:sldMkLst>
-          <pc:docMk/>
-          <pc:sldMk cId="861954694" sldId="269"/>
-        </pc:sldMkLst>
-        <pc:spChg chg="mod">
-          <ac:chgData name="Goto Shunsuke" userId="129927c5-953e-4c56-bf1c-bf65a9796978" providerId="ADAL" clId="{8FD34E34-B40C-45C9-ABBF-C1B5D0E6E312}" dt="2026-03-24T05:10:22.054" v="13178" actId="20577"/>
-          <ac:spMkLst>
-            <pc:docMk/>
-            <pc:sldMk cId="861954694" sldId="269"/>
-            <ac:spMk id="2" creationId="{0888B3A3-FFE3-220C-EA9A-DE9A171E7C73}"/>
-          </ac:spMkLst>
-        </pc:spChg>
-      </pc:sldChg>
-      <pc:sldChg chg="addSp modSp mod modNotesTx">
-        <pc:chgData name="Goto Shunsuke" userId="129927c5-953e-4c56-bf1c-bf65a9796978" providerId="ADAL" clId="{8FD34E34-B40C-45C9-ABBF-C1B5D0E6E312}" dt="2026-04-03T01:52:56.727" v="15872" actId="208"/>
-        <pc:sldMkLst>
-          <pc:docMk/>
-          <pc:sldMk cId="184638871" sldId="270"/>
-        </pc:sldMkLst>
-        <pc:spChg chg="mod">
-          <ac:chgData name="Goto Shunsuke" userId="129927c5-953e-4c56-bf1c-bf65a9796978" providerId="ADAL" clId="{8FD34E34-B40C-45C9-ABBF-C1B5D0E6E312}" dt="2026-03-24T08:53:53.630" v="13835" actId="20577"/>
-          <ac:spMkLst>
-            <pc:docMk/>
-            <pc:sldMk cId="184638871" sldId="270"/>
-            <ac:spMk id="2" creationId="{EEF8DEE6-486A-150A-4473-A84A59F5C545}"/>
-          </ac:spMkLst>
-        </pc:spChg>
-        <pc:spChg chg="mod">
-          <ac:chgData name="Goto Shunsuke" userId="129927c5-953e-4c56-bf1c-bf65a9796978" providerId="ADAL" clId="{8FD34E34-B40C-45C9-ABBF-C1B5D0E6E312}" dt="2026-03-30T09:16:50.300" v="14936" actId="20577"/>
-          <ac:spMkLst>
-            <pc:docMk/>
-            <pc:sldMk cId="184638871" sldId="270"/>
-            <ac:spMk id="3" creationId="{DBD1BABD-8EDD-600A-F2F5-AD69D8E5D9CA}"/>
-          </ac:spMkLst>
-        </pc:spChg>
-        <pc:spChg chg="add mod">
-          <ac:chgData name="Goto Shunsuke" userId="129927c5-953e-4c56-bf1c-bf65a9796978" providerId="ADAL" clId="{8FD34E34-B40C-45C9-ABBF-C1B5D0E6E312}" dt="2026-03-24T08:55:00.583" v="14044"/>
-          <ac:spMkLst>
-            <pc:docMk/>
-            <pc:sldMk cId="184638871" sldId="270"/>
-            <ac:spMk id="5" creationId="{69FC0D57-C3AB-0E37-BDE9-9A2BF942927F}"/>
-          </ac:spMkLst>
-        </pc:spChg>
-        <pc:picChg chg="add mod">
-          <ac:chgData name="Goto Shunsuke" userId="129927c5-953e-4c56-bf1c-bf65a9796978" providerId="ADAL" clId="{8FD34E34-B40C-45C9-ABBF-C1B5D0E6E312}" dt="2026-04-03T01:52:56.727" v="15872" actId="208"/>
-          <ac:picMkLst>
-            <pc:docMk/>
-            <pc:sldMk cId="184638871" sldId="270"/>
-            <ac:picMk id="7" creationId="{A77D9584-6BF3-1930-6AD3-B6C627CB99BB}"/>
-          </ac:picMkLst>
-        </pc:picChg>
-      </pc:sldChg>
-      <pc:sldChg chg="add">
-        <pc:chgData name="Goto Shunsuke" userId="129927c5-953e-4c56-bf1c-bf65a9796978" providerId="ADAL" clId="{8FD34E34-B40C-45C9-ABBF-C1B5D0E6E312}" dt="2026-03-30T09:55:58.270" v="15594"/>
-        <pc:sldMkLst>
-          <pc:docMk/>
-          <pc:sldMk cId="3952668094" sldId="274"/>
-        </pc:sldMkLst>
-      </pc:sldChg>
-      <pc:sldChg chg="modSp mod">
-        <pc:chgData name="Goto Shunsuke" userId="129927c5-953e-4c56-bf1c-bf65a9796978" providerId="ADAL" clId="{8FD34E34-B40C-45C9-ABBF-C1B5D0E6E312}" dt="2026-03-30T09:20:58.843" v="14998" actId="20577"/>
-        <pc:sldMkLst>
-          <pc:docMk/>
-          <pc:sldMk cId="3773404927" sldId="277"/>
-        </pc:sldMkLst>
-        <pc:spChg chg="mod">
-          <ac:chgData name="Goto Shunsuke" userId="129927c5-953e-4c56-bf1c-bf65a9796978" providerId="ADAL" clId="{8FD34E34-B40C-45C9-ABBF-C1B5D0E6E312}" dt="2026-03-30T09:20:58.843" v="14998" actId="20577"/>
-          <ac:spMkLst>
-            <pc:docMk/>
-            <pc:sldMk cId="3773404927" sldId="277"/>
-            <ac:spMk id="2" creationId="{69477D76-5183-1C26-25B6-7621468A0A54}"/>
-          </ac:spMkLst>
-        </pc:spChg>
-      </pc:sldChg>
-      <pc:sldChg chg="modNotesTx">
-        <pc:chgData name="Goto Shunsuke" userId="129927c5-953e-4c56-bf1c-bf65a9796978" providerId="ADAL" clId="{8FD34E34-B40C-45C9-ABBF-C1B5D0E6E312}" dt="2026-04-03T00:40:38.845" v="15703" actId="20577"/>
-        <pc:sldMkLst>
-          <pc:docMk/>
-          <pc:sldMk cId="1967937054" sldId="285"/>
-        </pc:sldMkLst>
-      </pc:sldChg>
-      <pc:sldChg chg="addSp delSp modSp mod">
-        <pc:chgData name="Goto Shunsuke" userId="129927c5-953e-4c56-bf1c-bf65a9796978" providerId="ADAL" clId="{8FD34E34-B40C-45C9-ABBF-C1B5D0E6E312}" dt="2026-03-30T09:23:28.082" v="15058" actId="20577"/>
-        <pc:sldMkLst>
-          <pc:docMk/>
-          <pc:sldMk cId="1533173695" sldId="292"/>
-        </pc:sldMkLst>
-        <pc:spChg chg="mod">
-          <ac:chgData name="Goto Shunsuke" userId="129927c5-953e-4c56-bf1c-bf65a9796978" providerId="ADAL" clId="{8FD34E34-B40C-45C9-ABBF-C1B5D0E6E312}" dt="2026-03-30T09:23:28.082" v="15058" actId="20577"/>
-          <ac:spMkLst>
-            <pc:docMk/>
-            <pc:sldMk cId="1533173695" sldId="292"/>
-            <ac:spMk id="6" creationId="{A50FF419-6651-5F85-8DD8-A7C4C761BAFD}"/>
-          </ac:spMkLst>
-        </pc:spChg>
-      </pc:sldChg>
-      <pc:sldChg chg="addSp delSp modSp add mod">
-        <pc:chgData name="Goto Shunsuke" userId="129927c5-953e-4c56-bf1c-bf65a9796978" providerId="ADAL" clId="{8FD34E34-B40C-45C9-ABBF-C1B5D0E6E312}" dt="2026-03-24T04:43:13.927" v="12971" actId="1076"/>
-        <pc:sldMkLst>
-          <pc:docMk/>
-          <pc:sldMk cId="2750921692" sldId="294"/>
-        </pc:sldMkLst>
-        <pc:picChg chg="mod">
-          <ac:chgData name="Goto Shunsuke" userId="129927c5-953e-4c56-bf1c-bf65a9796978" providerId="ADAL" clId="{8FD34E34-B40C-45C9-ABBF-C1B5D0E6E312}" dt="2026-03-24T04:43:13.927" v="12971" actId="1076"/>
-          <ac:picMkLst>
-            <pc:docMk/>
-            <pc:sldMk cId="2750921692" sldId="294"/>
-            <ac:picMk id="7" creationId="{EFBEE1C2-AEFC-C926-CA94-79AC12CA62E6}"/>
-          </ac:picMkLst>
-        </pc:picChg>
-      </pc:sldChg>
-      <pc:sldChg chg="addSp delSp modSp add mod">
-        <pc:chgData name="Goto Shunsuke" userId="129927c5-953e-4c56-bf1c-bf65a9796978" providerId="ADAL" clId="{8FD34E34-B40C-45C9-ABBF-C1B5D0E6E312}" dt="2026-03-24T07:06:00.049" v="13548" actId="20577"/>
-        <pc:sldMkLst>
-          <pc:docMk/>
-          <pc:sldMk cId="3430267544" sldId="296"/>
-        </pc:sldMkLst>
-        <pc:spChg chg="mod">
-          <ac:chgData name="Goto Shunsuke" userId="129927c5-953e-4c56-bf1c-bf65a9796978" providerId="ADAL" clId="{8FD34E34-B40C-45C9-ABBF-C1B5D0E6E312}" dt="2026-03-24T07:04:07.965" v="13479" actId="164"/>
-          <ac:spMkLst>
-            <pc:docMk/>
-            <pc:sldMk cId="3430267544" sldId="296"/>
-            <ac:spMk id="5" creationId="{E289DAE6-67DB-3F07-A553-2E823CFDB2C4}"/>
-          </ac:spMkLst>
-        </pc:spChg>
-        <pc:spChg chg="mod">
-          <ac:chgData name="Goto Shunsuke" userId="129927c5-953e-4c56-bf1c-bf65a9796978" providerId="ADAL" clId="{8FD34E34-B40C-45C9-ABBF-C1B5D0E6E312}" dt="2026-03-24T07:03:48.903" v="13474" actId="164"/>
-          <ac:spMkLst>
-            <pc:docMk/>
-            <pc:sldMk cId="3430267544" sldId="296"/>
-            <ac:spMk id="7" creationId="{FB42CD3B-AA8B-6DF6-BC41-8E22AC9F4D16}"/>
-          </ac:spMkLst>
-        </pc:spChg>
-        <pc:spChg chg="mod">
-          <ac:chgData name="Goto Shunsuke" userId="129927c5-953e-4c56-bf1c-bf65a9796978" providerId="ADAL" clId="{8FD34E34-B40C-45C9-ABBF-C1B5D0E6E312}" dt="2026-03-24T07:03:53.184" v="13475" actId="164"/>
-          <ac:spMkLst>
-            <pc:docMk/>
-            <pc:sldMk cId="3430267544" sldId="296"/>
-            <ac:spMk id="8" creationId="{1B7F1C93-3210-09D3-A47C-D96FBC2874F0}"/>
-          </ac:spMkLst>
-        </pc:spChg>
-        <pc:spChg chg="mod">
-          <ac:chgData name="Goto Shunsuke" userId="129927c5-953e-4c56-bf1c-bf65a9796978" providerId="ADAL" clId="{8FD34E34-B40C-45C9-ABBF-C1B5D0E6E312}" dt="2026-03-24T07:03:57.573" v="13476" actId="164"/>
-          <ac:spMkLst>
-            <pc:docMk/>
-            <pc:sldMk cId="3430267544" sldId="296"/>
-            <ac:spMk id="9" creationId="{6B79AA67-E670-8D88-067D-701AF9C525B0}"/>
-          </ac:spMkLst>
-        </pc:spChg>
-        <pc:spChg chg="mod">
-          <ac:chgData name="Goto Shunsuke" userId="129927c5-953e-4c56-bf1c-bf65a9796978" providerId="ADAL" clId="{8FD34E34-B40C-45C9-ABBF-C1B5D0E6E312}" dt="2026-03-24T07:04:07.965" v="13479" actId="164"/>
-          <ac:spMkLst>
-            <pc:docMk/>
-            <pc:sldMk cId="3430267544" sldId="296"/>
-            <ac:spMk id="10" creationId="{125F0623-37B2-4A40-484B-149EF97A66AF}"/>
-          </ac:spMkLst>
-        </pc:spChg>
-        <pc:spChg chg="mod">
-          <ac:chgData name="Goto Shunsuke" userId="129927c5-953e-4c56-bf1c-bf65a9796978" providerId="ADAL" clId="{8FD34E34-B40C-45C9-ABBF-C1B5D0E6E312}" dt="2026-03-24T07:06:00.049" v="13548" actId="20577"/>
-          <ac:spMkLst>
-            <pc:docMk/>
-            <pc:sldMk cId="3430267544" sldId="296"/>
-            <ac:spMk id="11" creationId="{09DA3730-4BC1-5083-0F25-324871CE46CC}"/>
-          </ac:spMkLst>
-        </pc:spChg>
-        <pc:spChg chg="mod">
-          <ac:chgData name="Goto Shunsuke" userId="129927c5-953e-4c56-bf1c-bf65a9796978" providerId="ADAL" clId="{8FD34E34-B40C-45C9-ABBF-C1B5D0E6E312}" dt="2026-03-24T07:03:53.184" v="13475" actId="164"/>
-          <ac:spMkLst>
-            <pc:docMk/>
-            <pc:sldMk cId="3430267544" sldId="296"/>
-            <ac:spMk id="12" creationId="{ADFCBD5F-589C-CE6F-E8AC-6EF74CE5B87B}"/>
-          </ac:spMkLst>
-        </pc:spChg>
-        <pc:spChg chg="mod">
-          <ac:chgData name="Goto Shunsuke" userId="129927c5-953e-4c56-bf1c-bf65a9796978" providerId="ADAL" clId="{8FD34E34-B40C-45C9-ABBF-C1B5D0E6E312}" dt="2026-03-24T07:03:57.573" v="13476" actId="164"/>
-          <ac:spMkLst>
-            <pc:docMk/>
-            <pc:sldMk cId="3430267544" sldId="296"/>
-            <ac:spMk id="13" creationId="{7B044352-10B2-A0C7-657B-A6DE74A37973}"/>
-          </ac:spMkLst>
-        </pc:spChg>
-        <pc:grpChg chg="add mod">
-          <ac:chgData name="Goto Shunsuke" userId="129927c5-953e-4c56-bf1c-bf65a9796978" providerId="ADAL" clId="{8FD34E34-B40C-45C9-ABBF-C1B5D0E6E312}" dt="2026-03-24T07:03:48.903" v="13474" actId="164"/>
-          <ac:grpSpMkLst>
-            <pc:docMk/>
-            <pc:sldMk cId="3430267544" sldId="296"/>
-            <ac:grpSpMk id="14" creationId="{62773AE2-AE7C-CCE4-FD23-3320D16316EF}"/>
-          </ac:grpSpMkLst>
-        </pc:grpChg>
-        <pc:grpChg chg="add mod">
-          <ac:chgData name="Goto Shunsuke" userId="129927c5-953e-4c56-bf1c-bf65a9796978" providerId="ADAL" clId="{8FD34E34-B40C-45C9-ABBF-C1B5D0E6E312}" dt="2026-03-24T07:03:53.184" v="13475" actId="164"/>
-          <ac:grpSpMkLst>
-            <pc:docMk/>
-            <pc:sldMk cId="3430267544" sldId="296"/>
-            <ac:grpSpMk id="16" creationId="{B2AEDE14-622C-0713-FDCB-98AF8CF70093}"/>
-          </ac:grpSpMkLst>
-        </pc:grpChg>
-        <pc:grpChg chg="add del mod">
-          <ac:chgData name="Goto Shunsuke" userId="129927c5-953e-4c56-bf1c-bf65a9796978" providerId="ADAL" clId="{8FD34E34-B40C-45C9-ABBF-C1B5D0E6E312}" dt="2026-03-24T07:04:02.455" v="13478" actId="478"/>
-          <ac:grpSpMkLst>
-            <pc:docMk/>
-            <pc:sldMk cId="3430267544" sldId="296"/>
-            <ac:grpSpMk id="17" creationId="{B115ACD1-B3CD-2FF9-4FD6-EBB64D5A15AF}"/>
-          </ac:grpSpMkLst>
-        </pc:grpChg>
-        <pc:grpChg chg="add mod">
-          <ac:chgData name="Goto Shunsuke" userId="129927c5-953e-4c56-bf1c-bf65a9796978" providerId="ADAL" clId="{8FD34E34-B40C-45C9-ABBF-C1B5D0E6E312}" dt="2026-03-24T07:04:07.965" v="13479" actId="164"/>
-          <ac:grpSpMkLst>
-            <pc:docMk/>
-            <pc:sldMk cId="3430267544" sldId="296"/>
-            <ac:grpSpMk id="19" creationId="{F7203DAF-A9A2-4973-1508-38E60C0EEB3E}"/>
-          </ac:grpSpMkLst>
-        </pc:grpChg>
-        <pc:cxnChg chg="mod">
-          <ac:chgData name="Goto Shunsuke" userId="129927c5-953e-4c56-bf1c-bf65a9796978" providerId="ADAL" clId="{8FD34E34-B40C-45C9-ABBF-C1B5D0E6E312}" dt="2026-03-24T07:04:07.965" v="13479" actId="164"/>
-          <ac:cxnSpMkLst>
-            <pc:docMk/>
-            <pc:sldMk cId="3430267544" sldId="296"/>
-            <ac:cxnSpMk id="15" creationId="{C20E55FF-58A8-0E3A-2BC2-5E135E2014D1}"/>
-          </ac:cxnSpMkLst>
-        </pc:cxnChg>
-        <pc:cxnChg chg="mod">
-          <ac:chgData name="Goto Shunsuke" userId="129927c5-953e-4c56-bf1c-bf65a9796978" providerId="ADAL" clId="{8FD34E34-B40C-45C9-ABBF-C1B5D0E6E312}" dt="2026-03-24T07:03:48.903" v="13474" actId="164"/>
-          <ac:cxnSpMkLst>
-            <pc:docMk/>
-            <pc:sldMk cId="3430267544" sldId="296"/>
-            <ac:cxnSpMk id="18" creationId="{67A0C462-ADAF-3AFF-47B0-BE05A4348ED4}"/>
-          </ac:cxnSpMkLst>
-        </pc:cxnChg>
-        <pc:cxnChg chg="mod">
-          <ac:chgData name="Goto Shunsuke" userId="129927c5-953e-4c56-bf1c-bf65a9796978" providerId="ADAL" clId="{8FD34E34-B40C-45C9-ABBF-C1B5D0E6E312}" dt="2026-03-24T07:03:53.184" v="13475" actId="164"/>
-          <ac:cxnSpMkLst>
-            <pc:docMk/>
-            <pc:sldMk cId="3430267544" sldId="296"/>
-            <ac:cxnSpMk id="21" creationId="{C9BFE828-6277-1A33-907F-5E8583131E16}"/>
-          </ac:cxnSpMkLst>
-        </pc:cxnChg>
-        <pc:cxnChg chg="mod">
-          <ac:chgData name="Goto Shunsuke" userId="129927c5-953e-4c56-bf1c-bf65a9796978" providerId="ADAL" clId="{8FD34E34-B40C-45C9-ABBF-C1B5D0E6E312}" dt="2026-03-24T07:04:02.455" v="13478" actId="478"/>
-          <ac:cxnSpMkLst>
-            <pc:docMk/>
-            <pc:sldMk cId="3430267544" sldId="296"/>
-            <ac:cxnSpMk id="24" creationId="{DD44C6CC-3BC8-D356-3F3A-26B166395500}"/>
-          </ac:cxnSpMkLst>
-        </pc:cxnChg>
-      </pc:sldChg>
-      <pc:sldChg chg="delSp modSp add mod">
-        <pc:chgData name="Goto Shunsuke" userId="129927c5-953e-4c56-bf1c-bf65a9796978" providerId="ADAL" clId="{8FD34E34-B40C-45C9-ABBF-C1B5D0E6E312}" dt="2026-03-24T07:04:19.154" v="13482" actId="478"/>
-        <pc:sldMkLst>
-          <pc:docMk/>
-          <pc:sldMk cId="1895732460" sldId="297"/>
-        </pc:sldMkLst>
-      </pc:sldChg>
-      <pc:sldChg chg="addSp delSp modSp new mod">
-        <pc:chgData name="Goto Shunsuke" userId="129927c5-953e-4c56-bf1c-bf65a9796978" providerId="ADAL" clId="{8FD34E34-B40C-45C9-ABBF-C1B5D0E6E312}" dt="2026-04-02T23:31:09.024" v="15692" actId="20577"/>
-        <pc:sldMkLst>
-          <pc:docMk/>
-          <pc:sldMk cId="3101787348" sldId="298"/>
-        </pc:sldMkLst>
-        <pc:spChg chg="mod">
-          <ac:chgData name="Goto Shunsuke" userId="129927c5-953e-4c56-bf1c-bf65a9796978" providerId="ADAL" clId="{8FD34E34-B40C-45C9-ABBF-C1B5D0E6E312}" dt="2026-03-24T07:04:58.381" v="13499" actId="20577"/>
-          <ac:spMkLst>
-            <pc:docMk/>
-            <pc:sldMk cId="3101787348" sldId="298"/>
-            <ac:spMk id="2" creationId="{9385368F-0742-54BD-63C9-5693B565717A}"/>
-          </ac:spMkLst>
-        </pc:spChg>
-        <pc:spChg chg="add mod">
-          <ac:chgData name="Goto Shunsuke" userId="129927c5-953e-4c56-bf1c-bf65a9796978" providerId="ADAL" clId="{8FD34E34-B40C-45C9-ABBF-C1B5D0E6E312}" dt="2026-03-24T07:04:52.612" v="13492" actId="20577"/>
-          <ac:spMkLst>
-            <pc:docMk/>
-            <pc:sldMk cId="3101787348" sldId="298"/>
-            <ac:spMk id="5" creationId="{3CF68B37-F3E1-BED7-535A-08A9E43CA0F5}"/>
-          </ac:spMkLst>
-        </pc:spChg>
-        <pc:spChg chg="add mod">
-          <ac:chgData name="Goto Shunsuke" userId="129927c5-953e-4c56-bf1c-bf65a9796978" providerId="ADAL" clId="{8FD34E34-B40C-45C9-ABBF-C1B5D0E6E312}" dt="2026-04-02T23:31:09.024" v="15692" actId="20577"/>
-          <ac:spMkLst>
-            <pc:docMk/>
-            <pc:sldMk cId="3101787348" sldId="298"/>
-            <ac:spMk id="7" creationId="{D75E976D-4BA9-AB2C-1369-2FBA0C8ED9DC}"/>
-          </ac:spMkLst>
-        </pc:spChg>
-        <pc:spChg chg="add mod">
-          <ac:chgData name="Goto Shunsuke" userId="129927c5-953e-4c56-bf1c-bf65a9796978" providerId="ADAL" clId="{8FD34E34-B40C-45C9-ABBF-C1B5D0E6E312}" dt="2026-03-24T07:31:01.166" v="13594" actId="1076"/>
-          <ac:spMkLst>
-            <pc:docMk/>
-            <pc:sldMk cId="3101787348" sldId="298"/>
-            <ac:spMk id="9" creationId="{80C412B8-39A8-A6DF-6AF8-00ED0EF61961}"/>
-          </ac:spMkLst>
-        </pc:spChg>
-      </pc:sldChg>
-      <pc:sldChg chg="addSp delSp modSp add mod">
-        <pc:chgData name="Goto Shunsuke" userId="129927c5-953e-4c56-bf1c-bf65a9796978" providerId="ADAL" clId="{8FD34E34-B40C-45C9-ABBF-C1B5D0E6E312}" dt="2026-04-03T00:38:39.563" v="15701" actId="207"/>
-        <pc:sldMkLst>
-          <pc:docMk/>
-          <pc:sldMk cId="1544165309" sldId="299"/>
-        </pc:sldMkLst>
-        <pc:spChg chg="mod">
-          <ac:chgData name="Goto Shunsuke" userId="129927c5-953e-4c56-bf1c-bf65a9796978" providerId="ADAL" clId="{8FD34E34-B40C-45C9-ABBF-C1B5D0E6E312}" dt="2026-03-24T07:05:10.490" v="13507" actId="20577"/>
-          <ac:spMkLst>
-            <pc:docMk/>
-            <pc:sldMk cId="1544165309" sldId="299"/>
-            <ac:spMk id="2" creationId="{C3159F6B-1412-A67C-067D-A6091F2DDEE9}"/>
-          </ac:spMkLst>
-        </pc:spChg>
-        <pc:spChg chg="add del mod">
-          <ac:chgData name="Goto Shunsuke" userId="129927c5-953e-4c56-bf1c-bf65a9796978" providerId="ADAL" clId="{8FD34E34-B40C-45C9-ABBF-C1B5D0E6E312}" dt="2026-03-24T07:37:07.508" v="13724" actId="20577"/>
-          <ac:spMkLst>
-            <pc:docMk/>
-            <pc:sldMk cId="1544165309" sldId="299"/>
-            <ac:spMk id="3" creationId="{4910BD2B-8B76-6CAD-7E2D-FB00790E84DE}"/>
-          </ac:spMkLst>
-        </pc:spChg>
-        <pc:spChg chg="add mod">
-          <ac:chgData name="Goto Shunsuke" userId="129927c5-953e-4c56-bf1c-bf65a9796978" providerId="ADAL" clId="{8FD34E34-B40C-45C9-ABBF-C1B5D0E6E312}" dt="2026-04-03T00:38:39.563" v="15701" actId="207"/>
-          <ac:spMkLst>
-            <pc:docMk/>
-            <pc:sldMk cId="1544165309" sldId="299"/>
-            <ac:spMk id="7" creationId="{6EE8E5F3-A9C3-7CD2-E6AA-13A5CAB897F0}"/>
-          </ac:spMkLst>
-        </pc:spChg>
-      </pc:sldChg>
-      <pc:sldChg chg="delSp modSp add mod">
-        <pc:chgData name="Goto Shunsuke" userId="129927c5-953e-4c56-bf1c-bf65a9796978" providerId="ADAL" clId="{8FD34E34-B40C-45C9-ABBF-C1B5D0E6E312}" dt="2026-03-24T07:05:52.549" v="13532" actId="20577"/>
-        <pc:sldMkLst>
-          <pc:docMk/>
-          <pc:sldMk cId="1009075618" sldId="300"/>
-        </pc:sldMkLst>
-        <pc:spChg chg="mod">
-          <ac:chgData name="Goto Shunsuke" userId="129927c5-953e-4c56-bf1c-bf65a9796978" providerId="ADAL" clId="{8FD34E34-B40C-45C9-ABBF-C1B5D0E6E312}" dt="2026-03-24T07:05:52.549" v="13532" actId="20577"/>
-          <ac:spMkLst>
-            <pc:docMk/>
-            <pc:sldMk cId="1009075618" sldId="300"/>
-            <ac:spMk id="11" creationId="{F8CCC686-F73B-DFC5-C805-DB6DA04CFDE2}"/>
-          </ac:spMkLst>
-        </pc:spChg>
-      </pc:sldChg>
-      <pc:sldChg chg="addSp delSp modSp add mod ord">
-        <pc:chgData name="Goto Shunsuke" userId="129927c5-953e-4c56-bf1c-bf65a9796978" providerId="ADAL" clId="{8FD34E34-B40C-45C9-ABBF-C1B5D0E6E312}" dt="2026-03-30T09:15:51.337" v="14830" actId="20577"/>
-        <pc:sldMkLst>
-          <pc:docMk/>
-          <pc:sldMk cId="706452812" sldId="301"/>
-        </pc:sldMkLst>
-        <pc:spChg chg="mod">
-          <ac:chgData name="Goto Shunsuke" userId="129927c5-953e-4c56-bf1c-bf65a9796978" providerId="ADAL" clId="{8FD34E34-B40C-45C9-ABBF-C1B5D0E6E312}" dt="2026-03-24T07:37:49.102" v="13742" actId="20577"/>
-          <ac:spMkLst>
-            <pc:docMk/>
-            <pc:sldMk cId="706452812" sldId="301"/>
-            <ac:spMk id="2" creationId="{43080E2A-CD75-3304-A6B0-BCBAE009A0A2}"/>
-          </ac:spMkLst>
-        </pc:spChg>
-        <pc:spChg chg="add mod">
-          <ac:chgData name="Goto Shunsuke" userId="129927c5-953e-4c56-bf1c-bf65a9796978" providerId="ADAL" clId="{8FD34E34-B40C-45C9-ABBF-C1B5D0E6E312}" dt="2026-03-30T09:15:51.337" v="14830" actId="20577"/>
-          <ac:spMkLst>
-            <pc:docMk/>
-            <pc:sldMk cId="706452812" sldId="301"/>
-            <ac:spMk id="3" creationId="{75CC3579-7E7A-DB0B-F8E0-79A9BAC72632}"/>
-          </ac:spMkLst>
-        </pc:spChg>
-        <pc:spChg chg="mod">
-          <ac:chgData name="Goto Shunsuke" userId="129927c5-953e-4c56-bf1c-bf65a9796978" providerId="ADAL" clId="{8FD34E34-B40C-45C9-ABBF-C1B5D0E6E312}" dt="2026-03-24T07:06:49.324" v="13569" actId="208"/>
-          <ac:spMkLst>
-            <pc:docMk/>
-            <pc:sldMk cId="706452812" sldId="301"/>
-            <ac:spMk id="5" creationId="{10425AEF-6BD8-4179-DB51-855B2F39BE83}"/>
-          </ac:spMkLst>
-        </pc:spChg>
-        <pc:picChg chg="add mod ord">
-          <ac:chgData name="Goto Shunsuke" userId="129927c5-953e-4c56-bf1c-bf65a9796978" providerId="ADAL" clId="{8FD34E34-B40C-45C9-ABBF-C1B5D0E6E312}" dt="2026-03-30T09:15:48.385" v="14826" actId="1036"/>
-          <ac:picMkLst>
-            <pc:docMk/>
-            <pc:sldMk cId="706452812" sldId="301"/>
-            <ac:picMk id="9" creationId="{8CA557DD-A592-449E-397C-813C24E75707}"/>
-          </ac:picMkLst>
-        </pc:picChg>
-      </pc:sldChg>
-      <pc:sldChg chg="delSp modSp add mod">
-        <pc:chgData name="Goto Shunsuke" userId="129927c5-953e-4c56-bf1c-bf65a9796978" providerId="ADAL" clId="{8FD34E34-B40C-45C9-ABBF-C1B5D0E6E312}" dt="2026-03-24T08:51:35.335" v="13745" actId="478"/>
-        <pc:sldMkLst>
-          <pc:docMk/>
-          <pc:sldMk cId="4209089594" sldId="302"/>
-        </pc:sldMkLst>
-      </pc:sldChg>
-      <pc:sldChg chg="addSp delSp modSp add mod">
-        <pc:chgData name="Goto Shunsuke" userId="129927c5-953e-4c56-bf1c-bf65a9796978" providerId="ADAL" clId="{8FD34E34-B40C-45C9-ABBF-C1B5D0E6E312}" dt="2026-04-03T00:40:57.307" v="15708" actId="1076"/>
-        <pc:sldMkLst>
-          <pc:docMk/>
-          <pc:sldMk cId="2878677520" sldId="303"/>
-        </pc:sldMkLst>
-        <pc:spChg chg="mod">
-          <ac:chgData name="Goto Shunsuke" userId="129927c5-953e-4c56-bf1c-bf65a9796978" providerId="ADAL" clId="{8FD34E34-B40C-45C9-ABBF-C1B5D0E6E312}" dt="2026-03-24T08:52:01.839" v="13763" actId="20577"/>
-          <ac:spMkLst>
-            <pc:docMk/>
-            <pc:sldMk cId="2878677520" sldId="303"/>
-            <ac:spMk id="2" creationId="{6779DEC5-E199-32B1-8021-6BA163090A5F}"/>
-          </ac:spMkLst>
-        </pc:spChg>
-        <pc:spChg chg="mod">
-          <ac:chgData name="Goto Shunsuke" userId="129927c5-953e-4c56-bf1c-bf65a9796978" providerId="ADAL" clId="{8FD34E34-B40C-45C9-ABBF-C1B5D0E6E312}" dt="2026-03-24T08:51:56.102" v="13757" actId="20577"/>
-          <ac:spMkLst>
-            <pc:docMk/>
-            <pc:sldMk cId="2878677520" sldId="303"/>
-            <ac:spMk id="5" creationId="{30A82150-5BAD-4752-31E6-2D0A35BDE6D8}"/>
-          </ac:spMkLst>
-        </pc:spChg>
-        <pc:spChg chg="add mod">
-          <ac:chgData name="Goto Shunsuke" userId="129927c5-953e-4c56-bf1c-bf65a9796978" providerId="ADAL" clId="{8FD34E34-B40C-45C9-ABBF-C1B5D0E6E312}" dt="2026-04-03T00:38:04.906" v="15697" actId="20577"/>
-          <ac:spMkLst>
-            <pc:docMk/>
-            <pc:sldMk cId="2878677520" sldId="303"/>
-            <ac:spMk id="7" creationId="{FE925C7E-1CE3-680B-CA7F-F47F3823CD0C}"/>
-          </ac:spMkLst>
-        </pc:spChg>
-        <pc:picChg chg="add mod">
-          <ac:chgData name="Goto Shunsuke" userId="129927c5-953e-4c56-bf1c-bf65a9796978" providerId="ADAL" clId="{8FD34E34-B40C-45C9-ABBF-C1B5D0E6E312}" dt="2026-04-03T00:40:57.307" v="15708" actId="1076"/>
-          <ac:picMkLst>
-            <pc:docMk/>
-            <pc:sldMk cId="2878677520" sldId="303"/>
-            <ac:picMk id="6" creationId="{842AD22A-4635-1410-B519-D61C877C03F9}"/>
-          </ac:picMkLst>
-        </pc:picChg>
-      </pc:sldChg>
-      <pc:sldChg chg="addSp delSp modSp add mod">
-        <pc:chgData name="Goto Shunsuke" userId="129927c5-953e-4c56-bf1c-bf65a9796978" providerId="ADAL" clId="{8FD34E34-B40C-45C9-ABBF-C1B5D0E6E312}" dt="2026-03-30T09:45:51.603" v="15116" actId="208"/>
-        <pc:sldMkLst>
-          <pc:docMk/>
-          <pc:sldMk cId="3290416622" sldId="304"/>
-        </pc:sldMkLst>
-        <pc:spChg chg="mod">
-          <ac:chgData name="Goto Shunsuke" userId="129927c5-953e-4c56-bf1c-bf65a9796978" providerId="ADAL" clId="{8FD34E34-B40C-45C9-ABBF-C1B5D0E6E312}" dt="2026-03-24T08:56:56.075" v="14143" actId="20577"/>
-          <ac:spMkLst>
-            <pc:docMk/>
-            <pc:sldMk cId="3290416622" sldId="304"/>
-            <ac:spMk id="2" creationId="{4203B22D-A018-C0D8-F2E9-E772CD863800}"/>
-          </ac:spMkLst>
-        </pc:spChg>
-        <pc:spChg chg="mod">
-          <ac:chgData name="Goto Shunsuke" userId="129927c5-953e-4c56-bf1c-bf65a9796978" providerId="ADAL" clId="{8FD34E34-B40C-45C9-ABBF-C1B5D0E6E312}" dt="2026-03-24T08:57:45.432" v="14282" actId="20577"/>
-          <ac:spMkLst>
-            <pc:docMk/>
-            <pc:sldMk cId="3290416622" sldId="304"/>
-            <ac:spMk id="3" creationId="{4B38E9CA-5A8C-69A8-37CE-D41B794148DD}"/>
-          </ac:spMkLst>
-        </pc:spChg>
-        <pc:picChg chg="add mod">
-          <ac:chgData name="Goto Shunsuke" userId="129927c5-953e-4c56-bf1c-bf65a9796978" providerId="ADAL" clId="{8FD34E34-B40C-45C9-ABBF-C1B5D0E6E312}" dt="2026-03-30T09:45:51.603" v="15116" actId="208"/>
-          <ac:picMkLst>
-            <pc:docMk/>
-            <pc:sldMk cId="3290416622" sldId="304"/>
-            <ac:picMk id="10" creationId="{9E3DE745-D224-5B9E-E96A-8F5F7E5E5339}"/>
-          </ac:picMkLst>
-        </pc:picChg>
-      </pc:sldChg>
-      <pc:sldChg chg="addSp delSp modSp add mod modNotesTx">
-        <pc:chgData name="Goto Shunsuke" userId="129927c5-953e-4c56-bf1c-bf65a9796978" providerId="ADAL" clId="{8FD34E34-B40C-45C9-ABBF-C1B5D0E6E312}" dt="2026-04-03T02:37:09.614" v="15964" actId="1076"/>
-        <pc:sldMkLst>
-          <pc:docMk/>
-          <pc:sldMk cId="1589432496" sldId="305"/>
-        </pc:sldMkLst>
-        <pc:spChg chg="mod">
-          <ac:chgData name="Goto Shunsuke" userId="129927c5-953e-4c56-bf1c-bf65a9796978" providerId="ADAL" clId="{8FD34E34-B40C-45C9-ABBF-C1B5D0E6E312}" dt="2026-03-24T08:58:15.613" v="14284"/>
-          <ac:spMkLst>
-            <pc:docMk/>
-            <pc:sldMk cId="1589432496" sldId="305"/>
-            <ac:spMk id="2" creationId="{01D7045E-4A0F-B869-F20B-79A93762C6A2}"/>
-          </ac:spMkLst>
-        </pc:spChg>
-        <pc:spChg chg="mod">
-          <ac:chgData name="Goto Shunsuke" userId="129927c5-953e-4c56-bf1c-bf65a9796978" providerId="ADAL" clId="{8FD34E34-B40C-45C9-ABBF-C1B5D0E6E312}" dt="2026-03-30T09:47:25.747" v="15228" actId="20577"/>
-          <ac:spMkLst>
-            <pc:docMk/>
-            <pc:sldMk cId="1589432496" sldId="305"/>
-            <ac:spMk id="3" creationId="{92A763E5-28D6-1B6F-C137-359CEA5ABA16}"/>
-          </ac:spMkLst>
-        </pc:spChg>
-        <pc:spChg chg="add del mod">
-          <ac:chgData name="Goto Shunsuke" userId="129927c5-953e-4c56-bf1c-bf65a9796978" providerId="ADAL" clId="{8FD34E34-B40C-45C9-ABBF-C1B5D0E6E312}" dt="2026-04-03T02:27:11.947" v="15875" actId="478"/>
-          <ac:spMkLst>
-            <pc:docMk/>
-            <pc:sldMk cId="1589432496" sldId="305"/>
-            <ac:spMk id="6" creationId="{64E8DFC1-F440-1FB5-6830-BC6071921AFB}"/>
-          </ac:spMkLst>
-        </pc:spChg>
-        <pc:spChg chg="add mod">
-          <ac:chgData name="Goto Shunsuke" userId="129927c5-953e-4c56-bf1c-bf65a9796978" providerId="ADAL" clId="{8FD34E34-B40C-45C9-ABBF-C1B5D0E6E312}" dt="2026-04-03T02:34:50.363" v="15880" actId="207"/>
-          <ac:spMkLst>
-            <pc:docMk/>
-            <pc:sldMk cId="1589432496" sldId="305"/>
-            <ac:spMk id="8" creationId="{E82897A5-E433-B3F6-8A40-4684FC4B7F1F}"/>
-          </ac:spMkLst>
-        </pc:spChg>
-        <pc:spChg chg="add mod">
-          <ac:chgData name="Goto Shunsuke" userId="129927c5-953e-4c56-bf1c-bf65a9796978" providerId="ADAL" clId="{8FD34E34-B40C-45C9-ABBF-C1B5D0E6E312}" dt="2026-04-03T02:37:09.614" v="15964" actId="1076"/>
-          <ac:spMkLst>
-            <pc:docMk/>
-            <pc:sldMk cId="1589432496" sldId="305"/>
-            <ac:spMk id="13" creationId="{61F102E1-0766-FF14-F79C-12C9949717C5}"/>
-          </ac:spMkLst>
-        </pc:spChg>
-        <pc:picChg chg="add del">
-          <ac:chgData name="Goto Shunsuke" userId="129927c5-953e-4c56-bf1c-bf65a9796978" providerId="ADAL" clId="{8FD34E34-B40C-45C9-ABBF-C1B5D0E6E312}" dt="2026-04-03T02:35:29.580" v="15882" actId="478"/>
-          <ac:picMkLst>
-            <pc:docMk/>
-            <pc:sldMk cId="1589432496" sldId="305"/>
-            <ac:picMk id="10" creationId="{E87834D5-8CB9-E784-CC27-158BD6D9E4C1}"/>
-          </ac:picMkLst>
-        </pc:picChg>
-        <pc:picChg chg="add mod">
-          <ac:chgData name="Goto Shunsuke" userId="129927c5-953e-4c56-bf1c-bf65a9796978" providerId="ADAL" clId="{8FD34E34-B40C-45C9-ABBF-C1B5D0E6E312}" dt="2026-04-03T02:35:35.242" v="15886" actId="208"/>
-          <ac:picMkLst>
-            <pc:docMk/>
-            <pc:sldMk cId="1589432496" sldId="305"/>
-            <ac:picMk id="12" creationId="{55708F0B-B661-C72F-7EE6-8D656379D1B5}"/>
-          </ac:picMkLst>
-        </pc:picChg>
-        <pc:cxnChg chg="add mod">
-          <ac:chgData name="Goto Shunsuke" userId="129927c5-953e-4c56-bf1c-bf65a9796978" providerId="ADAL" clId="{8FD34E34-B40C-45C9-ABBF-C1B5D0E6E312}" dt="2026-04-03T02:37:09.614" v="15964" actId="1076"/>
-          <ac:cxnSpMkLst>
-            <pc:docMk/>
-            <pc:sldMk cId="1589432496" sldId="305"/>
-            <ac:cxnSpMk id="14" creationId="{FE2C73B9-023B-FD4B-BEDE-F39656AA6726}"/>
-          </ac:cxnSpMkLst>
-        </pc:cxnChg>
-      </pc:sldChg>
-      <pc:sldChg chg="delSp modSp add mod">
-        <pc:chgData name="Goto Shunsuke" userId="129927c5-953e-4c56-bf1c-bf65a9796978" providerId="ADAL" clId="{8FD34E34-B40C-45C9-ABBF-C1B5D0E6E312}" dt="2026-03-30T09:45:08.093" v="15112" actId="478"/>
-        <pc:sldMkLst>
-          <pc:docMk/>
-          <pc:sldMk cId="1225719656" sldId="306"/>
-        </pc:sldMkLst>
-      </pc:sldChg>
-      <pc:sldChg chg="addSp delSp modSp add mod modNotesTx">
-        <pc:chgData name="Goto Shunsuke" userId="129927c5-953e-4c56-bf1c-bf65a9796978" providerId="ADAL" clId="{8FD34E34-B40C-45C9-ABBF-C1B5D0E6E312}" dt="2026-04-03T01:55:06.108" v="15873" actId="207"/>
-        <pc:sldMkLst>
-          <pc:docMk/>
-          <pc:sldMk cId="3832848649" sldId="307"/>
-        </pc:sldMkLst>
-        <pc:spChg chg="mod">
-          <ac:chgData name="Goto Shunsuke" userId="129927c5-953e-4c56-bf1c-bf65a9796978" providerId="ADAL" clId="{8FD34E34-B40C-45C9-ABBF-C1B5D0E6E312}" dt="2026-03-24T08:59:26.074" v="14398" actId="20577"/>
-          <ac:spMkLst>
-            <pc:docMk/>
-            <pc:sldMk cId="3832848649" sldId="307"/>
-            <ac:spMk id="2" creationId="{48071072-5718-3BB8-9022-E2E877C0281B}"/>
-          </ac:spMkLst>
-        </pc:spChg>
-        <pc:spChg chg="mod">
-          <ac:chgData name="Goto Shunsuke" userId="129927c5-953e-4c56-bf1c-bf65a9796978" providerId="ADAL" clId="{8FD34E34-B40C-45C9-ABBF-C1B5D0E6E312}" dt="2026-03-30T09:50:02.698" v="15332" actId="20577"/>
-          <ac:spMkLst>
-            <pc:docMk/>
-            <pc:sldMk cId="3832848649" sldId="307"/>
-            <ac:spMk id="3" creationId="{95E574F9-EC2D-5C5D-E647-1FF50D3F306A}"/>
-          </ac:spMkLst>
-        </pc:spChg>
-        <pc:spChg chg="mod">
-          <ac:chgData name="Goto Shunsuke" userId="129927c5-953e-4c56-bf1c-bf65a9796978" providerId="ADAL" clId="{8FD34E34-B40C-45C9-ABBF-C1B5D0E6E312}" dt="2026-03-24T08:59:19.427" v="14389" actId="13822"/>
-          <ac:spMkLst>
-            <pc:docMk/>
-            <pc:sldMk cId="3832848649" sldId="307"/>
-            <ac:spMk id="5" creationId="{DEC2953A-10A0-8691-4C51-50DEA55AF2F3}"/>
-          </ac:spMkLst>
-        </pc:spChg>
-        <pc:spChg chg="add mod">
-          <ac:chgData name="Goto Shunsuke" userId="129927c5-953e-4c56-bf1c-bf65a9796978" providerId="ADAL" clId="{8FD34E34-B40C-45C9-ABBF-C1B5D0E6E312}" dt="2026-04-03T01:55:06.108" v="15873" actId="207"/>
-          <ac:spMkLst>
-            <pc:docMk/>
-            <pc:sldMk cId="3832848649" sldId="307"/>
-            <ac:spMk id="10" creationId="{33E12DA9-BCD9-AA99-F4B4-40C66F46F99B}"/>
-          </ac:spMkLst>
-        </pc:spChg>
-        <pc:picChg chg="add mod">
-          <ac:chgData name="Goto Shunsuke" userId="129927c5-953e-4c56-bf1c-bf65a9796978" providerId="ADAL" clId="{8FD34E34-B40C-45C9-ABBF-C1B5D0E6E312}" dt="2026-03-30T09:51:47.947" v="15342" actId="1076"/>
-          <ac:picMkLst>
-            <pc:docMk/>
-            <pc:sldMk cId="3832848649" sldId="307"/>
-            <ac:picMk id="8" creationId="{A2D8076F-79ED-C124-FCA3-AF65FD72D27C}"/>
-          </ac:picMkLst>
-        </pc:picChg>
-      </pc:sldChg>
-      <pc:sldChg chg="addSp delSp modSp add mod">
-        <pc:chgData name="Goto Shunsuke" userId="129927c5-953e-4c56-bf1c-bf65a9796978" providerId="ADAL" clId="{8FD34E34-B40C-45C9-ABBF-C1B5D0E6E312}" dt="2026-04-03T01:55:18.363" v="15874" actId="207"/>
-        <pc:sldMkLst>
-          <pc:docMk/>
-          <pc:sldMk cId="4157140783" sldId="308"/>
-        </pc:sldMkLst>
-        <pc:spChg chg="mod">
-          <ac:chgData name="Goto Shunsuke" userId="129927c5-953e-4c56-bf1c-bf65a9796978" providerId="ADAL" clId="{8FD34E34-B40C-45C9-ABBF-C1B5D0E6E312}" dt="2026-03-30T09:17:03.218" v="14946" actId="20577"/>
-          <ac:spMkLst>
-            <pc:docMk/>
-            <pc:sldMk cId="4157140783" sldId="308"/>
-            <ac:spMk id="2" creationId="{51CF7D6F-B8F0-56D0-1F8E-9428CA899CA5}"/>
-          </ac:spMkLst>
-        </pc:spChg>
-        <pc:spChg chg="mod">
-          <ac:chgData name="Goto Shunsuke" userId="129927c5-953e-4c56-bf1c-bf65a9796978" providerId="ADAL" clId="{8FD34E34-B40C-45C9-ABBF-C1B5D0E6E312}" dt="2026-03-30T09:17:56.314" v="14975" actId="14100"/>
-          <ac:spMkLst>
-            <pc:docMk/>
-            <pc:sldMk cId="4157140783" sldId="308"/>
-            <ac:spMk id="3" creationId="{33FFC30C-2E88-A668-8379-B8371AA4E8BD}"/>
-          </ac:spMkLst>
-        </pc:spChg>
-        <pc:spChg chg="add mod">
-          <ac:chgData name="Goto Shunsuke" userId="129927c5-953e-4c56-bf1c-bf65a9796978" providerId="ADAL" clId="{8FD34E34-B40C-45C9-ABBF-C1B5D0E6E312}" dt="2026-04-03T01:55:18.363" v="15874" actId="207"/>
-          <ac:spMkLst>
-            <pc:docMk/>
-            <pc:sldMk cId="4157140783" sldId="308"/>
-            <ac:spMk id="11" creationId="{31C514CF-8622-EC36-2DF0-E64C2C8C4A0F}"/>
-          </ac:spMkLst>
-        </pc:spChg>
-        <pc:spChg chg="add mod">
-          <ac:chgData name="Goto Shunsuke" userId="129927c5-953e-4c56-bf1c-bf65a9796978" providerId="ADAL" clId="{8FD34E34-B40C-45C9-ABBF-C1B5D0E6E312}" dt="2026-03-30T09:38:40.287" v="15098" actId="1076"/>
-          <ac:spMkLst>
-            <pc:docMk/>
-            <pc:sldMk cId="4157140783" sldId="308"/>
-            <ac:spMk id="12" creationId="{B35A2254-8F1B-B514-3C50-322A862094D9}"/>
-          </ac:spMkLst>
-        </pc:spChg>
-        <pc:picChg chg="add mod">
-          <ac:chgData name="Goto Shunsuke" userId="129927c5-953e-4c56-bf1c-bf65a9796978" providerId="ADAL" clId="{8FD34E34-B40C-45C9-ABBF-C1B5D0E6E312}" dt="2026-03-30T09:41:06.983" v="15106" actId="208"/>
-          <ac:picMkLst>
-            <pc:docMk/>
-            <pc:sldMk cId="4157140783" sldId="308"/>
-            <ac:picMk id="16" creationId="{05E14C7D-3182-B420-ED7F-C7DAAB61856E}"/>
-          </ac:picMkLst>
-        </pc:picChg>
-      </pc:sldChg>
-      <pc:sldChg chg="modSp add mod">
-        <pc:chgData name="Goto Shunsuke" userId="129927c5-953e-4c56-bf1c-bf65a9796978" providerId="ADAL" clId="{8FD34E34-B40C-45C9-ABBF-C1B5D0E6E312}" dt="2026-03-30T09:57:53.512" v="15683" actId="20577"/>
-        <pc:sldMkLst>
-          <pc:docMk/>
-          <pc:sldMk cId="4214974097" sldId="309"/>
-        </pc:sldMkLst>
-        <pc:spChg chg="mod">
-          <ac:chgData name="Goto Shunsuke" userId="129927c5-953e-4c56-bf1c-bf65a9796978" providerId="ADAL" clId="{8FD34E34-B40C-45C9-ABBF-C1B5D0E6E312}" dt="2026-03-30T09:57:53.512" v="15683" actId="20577"/>
-          <ac:spMkLst>
-            <pc:docMk/>
-            <pc:sldMk cId="4214974097" sldId="309"/>
-            <ac:spMk id="2" creationId="{0A8BB201-2F85-DDDA-8F9F-EC04D6EFA944}"/>
-          </ac:spMkLst>
-        </pc:spChg>
-      </pc:sldChg>
-      <pc:sldChg chg="addSp delSp modSp add mod">
-        <pc:chgData name="Goto Shunsuke" userId="129927c5-953e-4c56-bf1c-bf65a9796978" providerId="ADAL" clId="{8FD34E34-B40C-45C9-ABBF-C1B5D0E6E312}" dt="2026-04-03T00:38:54.705" v="15702" actId="207"/>
-        <pc:sldMkLst>
-          <pc:docMk/>
-          <pc:sldMk cId="3267012351" sldId="310"/>
-        </pc:sldMkLst>
-        <pc:spChg chg="mod">
-          <ac:chgData name="Goto Shunsuke" userId="129927c5-953e-4c56-bf1c-bf65a9796978" providerId="ADAL" clId="{8FD34E34-B40C-45C9-ABBF-C1B5D0E6E312}" dt="2026-03-30T09:52:21.060" v="15438" actId="20577"/>
-          <ac:spMkLst>
-            <pc:docMk/>
-            <pc:sldMk cId="3267012351" sldId="310"/>
-            <ac:spMk id="2" creationId="{1602319A-7F9D-2EAB-2FD4-137D27611FB6}"/>
-          </ac:spMkLst>
-        </pc:spChg>
-        <pc:spChg chg="add mod">
-          <ac:chgData name="Goto Shunsuke" userId="129927c5-953e-4c56-bf1c-bf65a9796978" providerId="ADAL" clId="{8FD34E34-B40C-45C9-ABBF-C1B5D0E6E312}" dt="2026-04-03T00:38:54.705" v="15702" actId="207"/>
-          <ac:spMkLst>
-            <pc:docMk/>
-            <pc:sldMk cId="3267012351" sldId="310"/>
-            <ac:spMk id="11" creationId="{6069B4FB-E88F-1949-6179-C5186C36E4DA}"/>
-          </ac:spMkLst>
-        </pc:spChg>
-        <pc:spChg chg="mod">
-          <ac:chgData name="Goto Shunsuke" userId="129927c5-953e-4c56-bf1c-bf65a9796978" providerId="ADAL" clId="{8FD34E34-B40C-45C9-ABBF-C1B5D0E6E312}" dt="2026-03-30T09:54:26.161" v="15507" actId="6549"/>
-          <ac:spMkLst>
-            <pc:docMk/>
-            <pc:sldMk cId="3267012351" sldId="310"/>
-            <ac:spMk id="14" creationId="{2567294A-AE1D-AAC7-6181-6B6F17D2F412}"/>
-          </ac:spMkLst>
-        </pc:spChg>
-        <pc:spChg chg="mod">
-          <ac:chgData name="Goto Shunsuke" userId="129927c5-953e-4c56-bf1c-bf65a9796978" providerId="ADAL" clId="{8FD34E34-B40C-45C9-ABBF-C1B5D0E6E312}" dt="2026-03-30T09:54:45.541" v="15550" actId="20577"/>
-          <ac:spMkLst>
-            <pc:docMk/>
-            <pc:sldMk cId="3267012351" sldId="310"/>
-            <ac:spMk id="20" creationId="{E0EBCE61-2CE7-6A72-5A65-2018A79819B4}"/>
-          </ac:spMkLst>
-        </pc:spChg>
-        <pc:spChg chg="mod">
-          <ac:chgData name="Goto Shunsuke" userId="129927c5-953e-4c56-bf1c-bf65a9796978" providerId="ADAL" clId="{8FD34E34-B40C-45C9-ABBF-C1B5D0E6E312}" dt="2026-03-30T09:55:09.781" v="15590" actId="20577"/>
-          <ac:spMkLst>
-            <pc:docMk/>
-            <pc:sldMk cId="3267012351" sldId="310"/>
-            <ac:spMk id="23" creationId="{96E7D7A5-C01D-A904-499F-CFE3C081D451}"/>
-          </ac:spMkLst>
-        </pc:spChg>
-        <pc:grpChg chg="add mod">
-          <ac:chgData name="Goto Shunsuke" userId="129927c5-953e-4c56-bf1c-bf65a9796978" providerId="ADAL" clId="{8FD34E34-B40C-45C9-ABBF-C1B5D0E6E312}" dt="2026-03-30T09:54:23.084" v="15505" actId="14100"/>
-          <ac:grpSpMkLst>
-            <pc:docMk/>
-            <pc:sldMk cId="3267012351" sldId="310"/>
-            <ac:grpSpMk id="12" creationId="{C1EFC5DE-934C-74DB-1D65-F739DAA66AE0}"/>
-          </ac:grpSpMkLst>
-        </pc:grpChg>
-        <pc:grpChg chg="add mod">
-          <ac:chgData name="Goto Shunsuke" userId="129927c5-953e-4c56-bf1c-bf65a9796978" providerId="ADAL" clId="{8FD34E34-B40C-45C9-ABBF-C1B5D0E6E312}" dt="2026-03-30T09:54:34.866" v="15509" actId="1076"/>
-          <ac:grpSpMkLst>
-            <pc:docMk/>
-            <pc:sldMk cId="3267012351" sldId="310"/>
-            <ac:grpSpMk id="19" creationId="{1FEE15D4-F30A-AC0D-98E9-C6556F0DE6C7}"/>
-          </ac:grpSpMkLst>
-        </pc:grpChg>
-        <pc:grpChg chg="add mod">
-          <ac:chgData name="Goto Shunsuke" userId="129927c5-953e-4c56-bf1c-bf65a9796978" providerId="ADAL" clId="{8FD34E34-B40C-45C9-ABBF-C1B5D0E6E312}" dt="2026-03-30T09:54:52.856" v="15552" actId="1076"/>
-          <ac:grpSpMkLst>
-            <pc:docMk/>
-            <pc:sldMk cId="3267012351" sldId="310"/>
-            <ac:grpSpMk id="22" creationId="{1FD4280B-9B28-28D2-2476-9B8E596D2CAA}"/>
-          </ac:grpSpMkLst>
-        </pc:grpChg>
-        <pc:cxnChg chg="mod">
-          <ac:chgData name="Goto Shunsuke" userId="129927c5-953e-4c56-bf1c-bf65a9796978" providerId="ADAL" clId="{8FD34E34-B40C-45C9-ABBF-C1B5D0E6E312}" dt="2026-03-30T09:54:17.412" v="15504" actId="14100"/>
-          <ac:cxnSpMkLst>
-            <pc:docMk/>
-            <pc:sldMk cId="3267012351" sldId="310"/>
-            <ac:cxnSpMk id="15" creationId="{AEDF1379-27FF-9F06-60F0-8409C822EDEB}"/>
-          </ac:cxnSpMkLst>
-        </pc:cxnChg>
-        <pc:cxnChg chg="mod">
-          <ac:chgData name="Goto Shunsuke" userId="129927c5-953e-4c56-bf1c-bf65a9796978" providerId="ADAL" clId="{8FD34E34-B40C-45C9-ABBF-C1B5D0E6E312}" dt="2026-03-30T09:54:36.850" v="15511" actId="1038"/>
-          <ac:cxnSpMkLst>
-            <pc:docMk/>
-            <pc:sldMk cId="3267012351" sldId="310"/>
-            <ac:cxnSpMk id="21" creationId="{666FB714-5ECA-3234-2263-07F12C5B60FB}"/>
-          </ac:cxnSpMkLst>
-        </pc:cxnChg>
-        <pc:cxnChg chg="mod">
-          <ac:chgData name="Goto Shunsuke" userId="129927c5-953e-4c56-bf1c-bf65a9796978" providerId="ADAL" clId="{8FD34E34-B40C-45C9-ABBF-C1B5D0E6E312}" dt="2026-03-30T09:54:49.094" v="15551"/>
-          <ac:cxnSpMkLst>
-            <pc:docMk/>
-            <pc:sldMk cId="3267012351" sldId="310"/>
-            <ac:cxnSpMk id="24" creationId="{F469D3C4-5C5A-4282-A5BB-FBEC71C0A465}"/>
-          </ac:cxnSpMkLst>
-        </pc:cxnChg>
-      </pc:sldChg>
-      <pc:sldChg chg="modSp add mod">
-        <pc:chgData name="Goto Shunsuke" userId="129927c5-953e-4c56-bf1c-bf65a9796978" providerId="ADAL" clId="{8FD34E34-B40C-45C9-ABBF-C1B5D0E6E312}" dt="2026-03-30T09:56:03.794" v="15598" actId="20577"/>
-        <pc:sldMkLst>
-          <pc:docMk/>
-          <pc:sldMk cId="881183180" sldId="311"/>
-        </pc:sldMkLst>
-        <pc:spChg chg="mod">
-          <ac:chgData name="Goto Shunsuke" userId="129927c5-953e-4c56-bf1c-bf65a9796978" providerId="ADAL" clId="{8FD34E34-B40C-45C9-ABBF-C1B5D0E6E312}" dt="2026-03-30T09:56:03.794" v="15598" actId="20577"/>
-          <ac:spMkLst>
-            <pc:docMk/>
-            <pc:sldMk cId="881183180" sldId="311"/>
-            <ac:spMk id="2" creationId="{2584F6DE-46F6-4C12-1FBF-34A8E840BA1E}"/>
-          </ac:spMkLst>
-        </pc:spChg>
-      </pc:sldChg>
-      <pc:sldChg chg="addSp delSp modSp add mod">
-        <pc:chgData name="Goto Shunsuke" userId="129927c5-953e-4c56-bf1c-bf65a9796978" providerId="ADAL" clId="{8FD34E34-B40C-45C9-ABBF-C1B5D0E6E312}" dt="2026-04-03T00:44:57.052" v="15871" actId="20577"/>
-        <pc:sldMkLst>
-          <pc:docMk/>
-          <pc:sldMk cId="801221873" sldId="312"/>
-        </pc:sldMkLst>
-        <pc:spChg chg="mod">
-          <ac:chgData name="Goto Shunsuke" userId="129927c5-953e-4c56-bf1c-bf65a9796978" providerId="ADAL" clId="{8FD34E34-B40C-45C9-ABBF-C1B5D0E6E312}" dt="2026-04-03T00:41:49.371" v="15731" actId="20577"/>
-          <ac:spMkLst>
-            <pc:docMk/>
-            <pc:sldMk cId="801221873" sldId="312"/>
-            <ac:spMk id="2" creationId="{9686882E-1BB3-E878-3337-9E978955D26E}"/>
-          </ac:spMkLst>
-        </pc:spChg>
-        <pc:spChg chg="mod">
-          <ac:chgData name="Goto Shunsuke" userId="129927c5-953e-4c56-bf1c-bf65a9796978" providerId="ADAL" clId="{8FD34E34-B40C-45C9-ABBF-C1B5D0E6E312}" dt="2026-04-03T00:44:57.052" v="15871" actId="20577"/>
-          <ac:spMkLst>
-            <pc:docMk/>
-            <pc:sldMk cId="801221873" sldId="312"/>
-            <ac:spMk id="3" creationId="{452546C3-1822-D1D6-53BE-113F442D97A1}"/>
-          </ac:spMkLst>
-        </pc:spChg>
-        <pc:spChg chg="del">
-          <ac:chgData name="Goto Shunsuke" userId="129927c5-953e-4c56-bf1c-bf65a9796978" providerId="ADAL" clId="{8FD34E34-B40C-45C9-ABBF-C1B5D0E6E312}" dt="2026-04-03T00:41:34.105" v="15710" actId="478"/>
-          <ac:spMkLst>
-            <pc:docMk/>
-            <pc:sldMk cId="801221873" sldId="312"/>
-            <ac:spMk id="11" creationId="{32B62941-6AAE-539B-0C9C-6EEA2CB87E9B}"/>
-          </ac:spMkLst>
-        </pc:spChg>
-        <pc:spChg chg="del">
-          <ac:chgData name="Goto Shunsuke" userId="129927c5-953e-4c56-bf1c-bf65a9796978" providerId="ADAL" clId="{8FD34E34-B40C-45C9-ABBF-C1B5D0E6E312}" dt="2026-04-03T00:41:35.675" v="15711" actId="478"/>
-          <ac:spMkLst>
-            <pc:docMk/>
-            <pc:sldMk cId="801221873" sldId="312"/>
-            <ac:spMk id="12" creationId="{72BAE518-1DD7-1D0E-29C6-EB75A70B4273}"/>
-          </ac:spMkLst>
-        </pc:spChg>
-        <pc:picChg chg="add mod">
-          <ac:chgData name="Goto Shunsuke" userId="129927c5-953e-4c56-bf1c-bf65a9796978" providerId="ADAL" clId="{8FD34E34-B40C-45C9-ABBF-C1B5D0E6E312}" dt="2026-04-03T00:44:28.195" v="15767" actId="1076"/>
-          <ac:picMkLst>
-            <pc:docMk/>
-            <pc:sldMk cId="801221873" sldId="312"/>
-            <ac:picMk id="6" creationId="{2B547D55-5F62-79CA-F54B-5F9ABFE8728D}"/>
-          </ac:picMkLst>
-        </pc:picChg>
-        <pc:picChg chg="del">
-          <ac:chgData name="Goto Shunsuke" userId="129927c5-953e-4c56-bf1c-bf65a9796978" providerId="ADAL" clId="{8FD34E34-B40C-45C9-ABBF-C1B5D0E6E312}" dt="2026-04-03T00:41:36.897" v="15712" actId="478"/>
-          <ac:picMkLst>
-            <pc:docMk/>
-            <pc:sldMk cId="801221873" sldId="312"/>
-            <ac:picMk id="16" creationId="{9FA49290-0A90-11F2-CFE7-3CEC2A6CCE7D}"/>
-          </ac:picMkLst>
-        </pc:picChg>
-      </pc:sldChg>
-    </pc:docChg>
-  </pc:docChgLst>
-</pc:chgInfo>
 </file>
 
 <file path=ppt/diagrams/colors1.xml><?xml version="1.0" encoding="utf-8"?>
@@ -2035,10 +1084,10 @@
         <a:lstStyle/>
         <a:p>
           <a:r>
-            <a:rPr kumimoji="1" lang="en-US" altLang="ja-JP" sz="2000" b="1"/>
-            <a:t>Reproductivity /Automation</a:t>
+            <a:rPr kumimoji="1" lang="en-US" altLang="ja-JP" sz="2000" b="1" dirty="0"/>
+            <a:t>Reproductivity</a:t>
           </a:r>
-          <a:endParaRPr kumimoji="1" lang="ja-JP" altLang="en-US" sz="2000" b="1"/>
+          <a:endParaRPr kumimoji="1" lang="ja-JP" altLang="en-US" sz="2000" b="1" dirty="0"/>
         </a:p>
       </dgm:t>
     </dgm:pt>
@@ -2797,10 +1846,10 @@
             <a:buNone/>
           </a:pPr>
           <a:r>
-            <a:rPr kumimoji="1" lang="en-US" altLang="ja-JP" sz="2000" b="1" kern="1200"/>
-            <a:t>Reproductivity /Automation</a:t>
+            <a:rPr kumimoji="1" lang="en-US" altLang="ja-JP" sz="2000" b="1" kern="1200" dirty="0"/>
+            <a:t>Reproductivity</a:t>
           </a:r>
-          <a:endParaRPr kumimoji="1" lang="ja-JP" altLang="en-US" sz="2000" b="1" kern="1200"/>
+          <a:endParaRPr kumimoji="1" lang="ja-JP" altLang="en-US" sz="2000" b="1" kern="1200" dirty="0"/>
         </a:p>
       </dsp:txBody>
       <dsp:txXfrm>
@@ -4161,7 +3210,7 @@
           <a:p>
             <a:fld id="{A6153894-78FC-4A57-A956-1A7796C34E24}" type="datetimeFigureOut">
               <a:rPr kumimoji="1" lang="ja-JP" altLang="en-US" smtClean="0"/>
-              <a:t>2026/4/3</a:t>
+              <a:t>2026/4/10</a:t>
             </a:fld>
             <a:endParaRPr kumimoji="1" lang="ja-JP" altLang="en-US"/>
           </a:p>
@@ -4473,61 +3522,7 @@
           <a:bodyPr/>
           <a:lstStyle/>
           <a:p>
-            <a:r>
-              <a:rPr kumimoji="1" lang="en-US" altLang="ja-JP" dirty="0"/>
-              <a:t>PHUSE</a:t>
-            </a:r>
-            <a:r>
-              <a:rPr kumimoji="1" lang="ja-JP" altLang="en-US" dirty="0"/>
-              <a:t> </a:t>
-            </a:r>
-            <a:r>
-              <a:rPr kumimoji="1" lang="en-US" altLang="ja-JP" dirty="0"/>
-              <a:t>OST</a:t>
-            </a:r>
-            <a:r>
-              <a:rPr kumimoji="1" lang="ja-JP" altLang="en-US" dirty="0"/>
-              <a:t> </a:t>
-            </a:r>
-            <a:r>
-              <a:rPr kumimoji="1" lang="en-US" altLang="ja-JP" dirty="0"/>
-              <a:t>package development sub team</a:t>
-            </a:r>
-            <a:r>
-              <a:rPr kumimoji="1" lang="ja-JP" altLang="en-US" dirty="0"/>
-              <a:t>の後藤です。</a:t>
-            </a:r>
-            <a:endParaRPr kumimoji="1" lang="en-US" altLang="ja-JP" dirty="0"/>
-          </a:p>
-          <a:p>
-            <a:r>
-              <a:rPr kumimoji="1" lang="ja-JP" altLang="en-US" dirty="0"/>
-              <a:t>私からは</a:t>
-            </a:r>
-            <a:r>
-              <a:rPr kumimoji="1" lang="en-US" altLang="ja-JP" dirty="0"/>
-              <a:t>PMDA</a:t>
-            </a:r>
-            <a:r>
-              <a:rPr kumimoji="1" lang="ja-JP" altLang="en-US" dirty="0"/>
-              <a:t>の</a:t>
-            </a:r>
-            <a:r>
-              <a:rPr kumimoji="1" lang="en-US" altLang="ja-JP" dirty="0"/>
-              <a:t>Oncology</a:t>
-            </a:r>
-            <a:r>
-              <a:rPr kumimoji="1" lang="ja-JP" altLang="en-US" dirty="0"/>
-              <a:t>領域における照会事項回答用</a:t>
-            </a:r>
-            <a:r>
-              <a:rPr kumimoji="1" lang="en-US" altLang="ja-JP" dirty="0"/>
-              <a:t>R Package</a:t>
-            </a:r>
-            <a:r>
-              <a:rPr kumimoji="1" lang="ja-JP" altLang="en-US" dirty="0"/>
-              <a:t>について説明させていただきます。</a:t>
-            </a:r>
+            <a:endParaRPr kumimoji="1" lang="ja-JP" altLang="en-US" dirty="0"/>
           </a:p>
         </p:txBody>
       </p:sp>
@@ -4611,51 +3606,7 @@
           <a:bodyPr/>
           <a:lstStyle/>
           <a:p>
-            <a:r>
-              <a:rPr kumimoji="1" lang="en-US" altLang="ja-JP" dirty="0"/>
-              <a:t>Step</a:t>
-            </a:r>
-            <a:r>
-              <a:rPr kumimoji="1" lang="ja-JP" altLang="en-US" dirty="0"/>
-              <a:t>としては</a:t>
-            </a:r>
-            <a:r>
-              <a:rPr kumimoji="1" lang="en-US" altLang="ja-JP" dirty="0"/>
-              <a:t>3</a:t>
-            </a:r>
-            <a:r>
-              <a:rPr kumimoji="1" lang="ja-JP" altLang="en-US" dirty="0"/>
-              <a:t>段階に分かれております。</a:t>
-            </a:r>
-            <a:br>
-              <a:rPr kumimoji="1" lang="en-US" altLang="ja-JP" dirty="0"/>
-            </a:br>
-            <a:r>
-              <a:rPr kumimoji="1" lang="en-US" altLang="ja-JP" dirty="0"/>
-              <a:t>1</a:t>
-            </a:r>
-            <a:r>
-              <a:rPr kumimoji="1" lang="ja-JP" altLang="en-US" dirty="0"/>
-              <a:t>つ目はどのような</a:t>
-            </a:r>
-            <a:r>
-              <a:rPr kumimoji="1" lang="en-US" altLang="ja-JP" dirty="0"/>
-              <a:t>Type</a:t>
-            </a:r>
-            <a:r>
-              <a:rPr kumimoji="1" lang="ja-JP" altLang="en-US" dirty="0"/>
-              <a:t>で集計するかを定義する</a:t>
-            </a:r>
-            <a:endParaRPr kumimoji="1" lang="en-US" altLang="ja-JP" dirty="0"/>
-          </a:p>
-          <a:p>
-            <a:endParaRPr kumimoji="1" lang="en-US" altLang="ja-JP" dirty="0"/>
-          </a:p>
-          <a:p>
-            <a:r>
-              <a:rPr kumimoji="1" lang="ja-JP" altLang="en-US" dirty="0"/>
-              <a:t>以降のスライドで各関数の詳細を説明します。</a:t>
-            </a:r>
+            <a:endParaRPr kumimoji="1" lang="ja-JP" altLang="en-US" dirty="0"/>
           </a:p>
         </p:txBody>
       </p:sp>
@@ -4739,110 +3690,7 @@
           <a:bodyPr/>
           <a:lstStyle/>
           <a:p>
-            <a:br>
-              <a:rPr kumimoji="1" lang="en-US" altLang="ja-JP" dirty="0"/>
-            </a:br>
-            <a:r>
-              <a:rPr kumimoji="1" lang="ja-JP" altLang="en-US" dirty="0"/>
-              <a:t>・</a:t>
-            </a:r>
-            <a:r>
-              <a:rPr kumimoji="1" lang="en-US" altLang="ja-JP" dirty="0"/>
-              <a:t>AE</a:t>
-            </a:r>
-            <a:r>
-              <a:rPr kumimoji="1" lang="ja-JP" altLang="en-US" dirty="0"/>
-              <a:t>集計の条件を定義する関数です。</a:t>
-            </a:r>
-            <a:endParaRPr kumimoji="1" lang="en-US" altLang="ja-JP" dirty="0"/>
-          </a:p>
-          <a:p>
-            <a:r>
-              <a:rPr kumimoji="1" lang="ja-JP" altLang="en-US" dirty="0"/>
-              <a:t>・というのも、照会事項ごとに微妙に条件が違う</a:t>
-            </a:r>
-            <a:endParaRPr kumimoji="1" lang="en-US" altLang="ja-JP" dirty="0"/>
-          </a:p>
-          <a:p>
-            <a:r>
-              <a:rPr kumimoji="1" lang="ja-JP" altLang="en-US" dirty="0"/>
-              <a:t>・変数の名前も違う。</a:t>
-            </a:r>
-            <a:endParaRPr kumimoji="1" lang="en-US" altLang="ja-JP" dirty="0"/>
-          </a:p>
-          <a:p>
-            <a:r>
-              <a:rPr kumimoji="1" lang="ja-JP" altLang="en-US" dirty="0"/>
-              <a:t>・そこで、柔軟に集計を行えるようにするために作成された関数が</a:t>
-            </a:r>
-            <a:r>
-              <a:rPr kumimoji="1" lang="en-US" altLang="ja-JP" dirty="0" err="1"/>
-              <a:t>make_ae_type</a:t>
-            </a:r>
-            <a:r>
-              <a:rPr kumimoji="1" lang="en-US" altLang="ja-JP" dirty="0"/>
-              <a:t>()</a:t>
-            </a:r>
-          </a:p>
-          <a:p>
-            <a:r>
-              <a:rPr kumimoji="1" lang="ja-JP" altLang="en-US" dirty="0"/>
-              <a:t>・スライドの例では、</a:t>
-            </a:r>
-            <a:r>
-              <a:rPr kumimoji="1" lang="en-US" altLang="ja-JP" dirty="0"/>
-              <a:t>”AE &gt;= Grade 3”</a:t>
-            </a:r>
-            <a:r>
-              <a:rPr kumimoji="1" lang="ja-JP" altLang="en-US" dirty="0"/>
-              <a:t>という集計の条件を定義しています。</a:t>
-            </a:r>
-            <a:endParaRPr kumimoji="1" lang="en-US" altLang="ja-JP" dirty="0"/>
-          </a:p>
-          <a:p>
-            <a:r>
-              <a:rPr kumimoji="1" lang="ja-JP" altLang="en-US" dirty="0"/>
-              <a:t>・返り値としては、</a:t>
-            </a:r>
-            <a:r>
-              <a:rPr kumimoji="1" lang="en-US" altLang="ja-JP" dirty="0" err="1"/>
-              <a:t>ae_type</a:t>
-            </a:r>
-            <a:r>
-              <a:rPr kumimoji="1" lang="ja-JP" altLang="en-US" dirty="0"/>
-              <a:t>という</a:t>
-            </a:r>
-            <a:r>
-              <a:rPr kumimoji="1" lang="en-US" altLang="ja-JP" dirty="0"/>
-              <a:t>class</a:t>
-            </a:r>
-            <a:r>
-              <a:rPr kumimoji="1" lang="ja-JP" altLang="en-US" dirty="0"/>
-              <a:t>の</a:t>
-            </a:r>
-            <a:r>
-              <a:rPr kumimoji="1" lang="en-US" altLang="ja-JP" dirty="0"/>
-              <a:t>Object</a:t>
-            </a:r>
-            <a:r>
-              <a:rPr kumimoji="1" lang="ja-JP" altLang="en-US" dirty="0"/>
-              <a:t>を生成します。こｎ</a:t>
-            </a:r>
-            <a:r>
-              <a:rPr kumimoji="1" lang="en-US" altLang="ja-JP" dirty="0"/>
-              <a:t>Object</a:t>
-            </a:r>
-            <a:r>
-              <a:rPr kumimoji="1" lang="ja-JP" altLang="en-US" dirty="0"/>
-              <a:t>を後述する関数に引数として渡すことで、</a:t>
-            </a:r>
-            <a:br>
-              <a:rPr kumimoji="1" lang="en-US" altLang="ja-JP" dirty="0"/>
-            </a:br>
-            <a:r>
-              <a:rPr kumimoji="1" lang="ja-JP" altLang="en-US" dirty="0"/>
-              <a:t>柔軟に定義した条件で集計を行うことが出来ます。</a:t>
-            </a:r>
+            <a:endParaRPr kumimoji="1" lang="ja-JP" altLang="en-US" dirty="0"/>
           </a:p>
         </p:txBody>
       </p:sp>
@@ -4926,81 +3774,6 @@
           <a:bodyPr/>
           <a:lstStyle/>
           <a:p>
-            <a:r>
-              <a:rPr kumimoji="1" lang="ja-JP" altLang="en-US" dirty="0"/>
-              <a:t>次に、データセットを</a:t>
-            </a:r>
-            <a:r>
-              <a:rPr kumimoji="1" lang="en-US" altLang="ja-JP" dirty="0"/>
-              <a:t>ARD</a:t>
-            </a:r>
-            <a:r>
-              <a:rPr kumimoji="1" lang="ja-JP" altLang="en-US" dirty="0"/>
-              <a:t>に変換するための関数として、</a:t>
-            </a:r>
-            <a:r>
-              <a:rPr lang="en-US" altLang="ja-JP" dirty="0" err="1"/>
-              <a:t>jpn_query_overview</a:t>
-            </a:r>
-            <a:r>
-              <a:rPr lang="en-US" altLang="ja-JP" dirty="0"/>
-              <a:t>/</a:t>
-            </a:r>
-            <a:r>
-              <a:rPr lang="ja-JP" altLang="en-US" dirty="0"/>
-              <a:t>ｊ</a:t>
-            </a:r>
-            <a:r>
-              <a:rPr lang="en-US" altLang="ja-JP" dirty="0" err="1"/>
-              <a:t>pn_query_summary_pt</a:t>
-            </a:r>
-            <a:r>
-              <a:rPr lang="ja-JP" altLang="en-US" dirty="0"/>
-              <a:t>という関数を整備しています。</a:t>
-            </a:r>
-            <a:br>
-              <a:rPr lang="en-US" altLang="ja-JP" dirty="0"/>
-            </a:br>
-            <a:endParaRPr kumimoji="1" lang="en-US" altLang="ja-JP" dirty="0"/>
-          </a:p>
-          <a:p>
-            <a:r>
-              <a:rPr kumimoji="1" lang="ja-JP" altLang="en-US" dirty="0"/>
-              <a:t>これらの関数は両方とも穴埋め問題の</a:t>
-            </a:r>
-            <a:r>
-              <a:rPr kumimoji="1" lang="en-US" altLang="ja-JP" dirty="0"/>
-              <a:t>ARD</a:t>
-            </a:r>
-            <a:r>
-              <a:rPr kumimoji="1" lang="ja-JP" altLang="en-US" dirty="0"/>
-              <a:t>を作成する関数なのですが、照会事項の内容に応じて使い分けることを想定しています。</a:t>
-            </a:r>
-            <a:endParaRPr kumimoji="1" lang="en-US" altLang="ja-JP" dirty="0"/>
-          </a:p>
-          <a:p>
-            <a:r>
-              <a:rPr kumimoji="1" lang="ja-JP" altLang="en-US" dirty="0"/>
-              <a:t>例えば穴埋め問題では、↑の画像のように、カテゴリーごとの集計だけが要求される場合と、↓のように</a:t>
-            </a:r>
-            <a:r>
-              <a:rPr kumimoji="1" lang="en-US" altLang="ja-JP" dirty="0"/>
-              <a:t>PT</a:t>
-            </a:r>
-            <a:r>
-              <a:rPr kumimoji="1" lang="ja-JP" altLang="en-US" dirty="0"/>
-              <a:t>ごとの集計が要求される場合があります。</a:t>
-            </a:r>
-            <a:endParaRPr kumimoji="1" lang="en-US" altLang="ja-JP" dirty="0"/>
-          </a:p>
-          <a:p>
-            <a:endParaRPr kumimoji="1" lang="en-US" altLang="ja-JP" dirty="0"/>
-          </a:p>
-          <a:p>
-            <a:r>
-              <a:rPr kumimoji="1" lang="ja-JP" altLang="en-US" dirty="0"/>
-              <a:t>これらのケースに合わせて、関数を使い分けることを想定しています。</a:t>
-            </a:r>
             <a:endParaRPr kumimoji="1" lang="en-US" altLang="ja-JP" dirty="0"/>
           </a:p>
         </p:txBody>
@@ -5085,80 +3858,7 @@
           <a:bodyPr/>
           <a:lstStyle/>
           <a:p>
-            <a:r>
-              <a:rPr kumimoji="1" lang="ja-JP" altLang="en-US" dirty="0"/>
-              <a:t>例として、</a:t>
-            </a:r>
-            <a:r>
-              <a:rPr kumimoji="1" lang="en-US" altLang="ja-JP" dirty="0" err="1"/>
-              <a:t>jpn_query_overview</a:t>
-            </a:r>
-            <a:r>
-              <a:rPr kumimoji="1" lang="en-US" altLang="ja-JP" dirty="0"/>
-              <a:t>()</a:t>
-            </a:r>
-            <a:r>
-              <a:rPr kumimoji="1" lang="ja-JP" altLang="en-US" dirty="0"/>
-              <a:t>をこちらのスライドでは掲示いたします。</a:t>
-            </a:r>
-            <a:endParaRPr kumimoji="1" lang="en-US" altLang="ja-JP" dirty="0"/>
-          </a:p>
-          <a:p>
-            <a:r>
-              <a:rPr kumimoji="1" lang="ja-JP" altLang="en-US" dirty="0"/>
-              <a:t>引数としては集計対象となる</a:t>
-            </a:r>
-            <a:r>
-              <a:rPr kumimoji="1" lang="en-US" altLang="ja-JP" dirty="0" err="1"/>
-              <a:t>ADaM</a:t>
-            </a:r>
-            <a:r>
-              <a:rPr kumimoji="1" lang="en-US" altLang="ja-JP" dirty="0"/>
-              <a:t>, </a:t>
-            </a:r>
-            <a:r>
-              <a:rPr kumimoji="1" lang="ja-JP" altLang="en-US" dirty="0"/>
-              <a:t>通常であれば</a:t>
-            </a:r>
-            <a:r>
-              <a:rPr kumimoji="1" lang="en-US" altLang="ja-JP" dirty="0" err="1"/>
-              <a:t>adae</a:t>
-            </a:r>
-            <a:r>
-              <a:rPr kumimoji="1" lang="ja-JP" altLang="en-US" dirty="0"/>
-              <a:t>と、</a:t>
-            </a:r>
-            <a:r>
-              <a:rPr kumimoji="1" lang="en-US" altLang="ja-JP" dirty="0" err="1"/>
-              <a:t>adsl</a:t>
-            </a:r>
-            <a:r>
-              <a:rPr kumimoji="1" lang="en-US" altLang="ja-JP" dirty="0"/>
-              <a:t>, </a:t>
-            </a:r>
-            <a:r>
-              <a:rPr kumimoji="1" lang="ja-JP" altLang="en-US" dirty="0"/>
-              <a:t>そして先ほどの関数で定義した</a:t>
-            </a:r>
-            <a:r>
-              <a:rPr kumimoji="1" lang="en-US" altLang="ja-JP" dirty="0" err="1"/>
-              <a:t>ae_type</a:t>
-            </a:r>
-            <a:r>
-              <a:rPr kumimoji="1" lang="en-US" altLang="ja-JP" dirty="0"/>
-              <a:t> object</a:t>
-            </a:r>
-            <a:r>
-              <a:rPr kumimoji="1" lang="ja-JP" altLang="en-US" dirty="0"/>
-              <a:t>が必要になります。</a:t>
-            </a:r>
-            <a:endParaRPr kumimoji="1" lang="en-US" altLang="ja-JP" dirty="0"/>
-          </a:p>
-          <a:p>
-            <a:r>
-              <a:rPr kumimoji="1" lang="ja-JP" altLang="en-US" dirty="0"/>
-              <a:t>また送別化因子を指定することも可能となっています。</a:t>
-            </a:r>
+            <a:endParaRPr kumimoji="1" lang="ja-JP" altLang="en-US" dirty="0"/>
           </a:p>
         </p:txBody>
       </p:sp>
@@ -5272,7 +3972,7 @@
     </p:spTree>
     <p:extLst>
       <p:ext uri="{BB962C8B-B14F-4D97-AF65-F5344CB8AC3E}">
-        <p14:creationId xmlns:p14="http://schemas.microsoft.com/office/powerpoint/2010/main" val="2976080407"/>
+        <p14:creationId xmlns:p14="http://schemas.microsoft.com/office/powerpoint/2010/main" val="2533617491"/>
       </p:ext>
     </p:extLst>
   </p:cSld>
@@ -5326,6 +4026,10 @@
           <a:bodyPr/>
           <a:lstStyle/>
           <a:p>
+            <a:pPr marL="171450" indent="-171450">
+              <a:buFont typeface="Arial" panose="020B0604020202020204" pitchFamily="34" charset="0"/>
+              <a:buChar char="•"/>
+            </a:pPr>
             <a:endParaRPr kumimoji="1" lang="ja-JP" altLang="en-US" dirty="0"/>
           </a:p>
         </p:txBody>
@@ -5347,7 +4051,7 @@
           <a:p>
             <a:fld id="{78CED39A-58DD-4C03-9276-40FE00EB9230}" type="slidenum">
               <a:rPr kumimoji="1" lang="ja-JP" altLang="en-US" smtClean="0"/>
-              <a:t>16</a:t>
+              <a:t>15</a:t>
             </a:fld>
             <a:endParaRPr kumimoji="1" lang="ja-JP" altLang="en-US"/>
           </a:p>
@@ -5356,7 +4060,7 @@
     </p:spTree>
     <p:extLst>
       <p:ext uri="{BB962C8B-B14F-4D97-AF65-F5344CB8AC3E}">
-        <p14:creationId xmlns:p14="http://schemas.microsoft.com/office/powerpoint/2010/main" val="3183957399"/>
+        <p14:creationId xmlns:p14="http://schemas.microsoft.com/office/powerpoint/2010/main" val="2976080407"/>
       </p:ext>
     </p:extLst>
   </p:cSld>
@@ -5367,222 +4071,6 @@
 </file>
 
 <file path=ppt/notesSlides/notesSlide16.xml><?xml version="1.0" encoding="utf-8"?>
-<p:notes xmlns:a="http://schemas.openxmlformats.org/drawingml/2006/main" xmlns:r="http://schemas.openxmlformats.org/officeDocument/2006/relationships" xmlns:p="http://schemas.openxmlformats.org/presentationml/2006/main">
-  <p:cSld>
-    <p:spTree>
-      <p:nvGrpSpPr>
-        <p:cNvPr id="1" name="">
-          <a:extLst>
-            <a:ext uri="{FF2B5EF4-FFF2-40B4-BE49-F238E27FC236}">
-              <a16:creationId xmlns:a16="http://schemas.microsoft.com/office/drawing/2014/main" id="{7CE22655-4D2C-DBC4-8F1C-5D133FE151A8}"/>
-            </a:ext>
-          </a:extLst>
-        </p:cNvPr>
-        <p:cNvGrpSpPr/>
-        <p:nvPr/>
-      </p:nvGrpSpPr>
-      <p:grpSpPr>
-        <a:xfrm>
-          <a:off x="0" y="0"/>
-          <a:ext cx="0" cy="0"/>
-          <a:chOff x="0" y="0"/>
-          <a:chExt cx="0" cy="0"/>
-        </a:xfrm>
-      </p:grpSpPr>
-      <p:sp>
-        <p:nvSpPr>
-          <p:cNvPr id="2" name="Slide Image Placeholder 1">
-            <a:extLst>
-              <a:ext uri="{FF2B5EF4-FFF2-40B4-BE49-F238E27FC236}">
-                <a16:creationId xmlns:a16="http://schemas.microsoft.com/office/drawing/2014/main" id="{74946B5D-9286-5DDE-EF57-1F2A43C2C48B}"/>
-              </a:ext>
-            </a:extLst>
-          </p:cNvPr>
-          <p:cNvSpPr>
-            <a:spLocks noGrp="1" noRot="1" noChangeAspect="1"/>
-          </p:cNvSpPr>
-          <p:nvPr>
-            <p:ph type="sldImg"/>
-          </p:nvPr>
-        </p:nvSpPr>
-        <p:spPr/>
-      </p:sp>
-      <p:sp>
-        <p:nvSpPr>
-          <p:cNvPr id="3" name="Notes Placeholder 2">
-            <a:extLst>
-              <a:ext uri="{FF2B5EF4-FFF2-40B4-BE49-F238E27FC236}">
-                <a16:creationId xmlns:a16="http://schemas.microsoft.com/office/drawing/2014/main" id="{075B23DD-B998-5021-9970-0A31C0B08E53}"/>
-              </a:ext>
-            </a:extLst>
-          </p:cNvPr>
-          <p:cNvSpPr>
-            <a:spLocks noGrp="1"/>
-          </p:cNvSpPr>
-          <p:nvPr>
-            <p:ph type="body" idx="1"/>
-          </p:nvPr>
-        </p:nvSpPr>
-        <p:spPr/>
-        <p:txBody>
-          <a:bodyPr/>
-          <a:lstStyle/>
-          <a:p>
-            <a:endParaRPr kumimoji="1" lang="ja-JP" altLang="en-US" dirty="0"/>
-          </a:p>
-        </p:txBody>
-      </p:sp>
-      <p:sp>
-        <p:nvSpPr>
-          <p:cNvPr id="4" name="Slide Number Placeholder 3">
-            <a:extLst>
-              <a:ext uri="{FF2B5EF4-FFF2-40B4-BE49-F238E27FC236}">
-                <a16:creationId xmlns:a16="http://schemas.microsoft.com/office/drawing/2014/main" id="{1D097B61-9BFB-0024-7544-C672CFA353CA}"/>
-              </a:ext>
-            </a:extLst>
-          </p:cNvPr>
-          <p:cNvSpPr>
-            <a:spLocks noGrp="1"/>
-          </p:cNvSpPr>
-          <p:nvPr>
-            <p:ph type="sldNum" sz="quarter" idx="5"/>
-          </p:nvPr>
-        </p:nvSpPr>
-        <p:spPr/>
-        <p:txBody>
-          <a:bodyPr/>
-          <a:lstStyle/>
-          <a:p>
-            <a:fld id="{78CED39A-58DD-4C03-9276-40FE00EB9230}" type="slidenum">
-              <a:rPr kumimoji="1" lang="ja-JP" altLang="en-US" smtClean="0"/>
-              <a:t>17</a:t>
-            </a:fld>
-            <a:endParaRPr kumimoji="1" lang="ja-JP" altLang="en-US"/>
-          </a:p>
-        </p:txBody>
-      </p:sp>
-    </p:spTree>
-    <p:extLst>
-      <p:ext uri="{BB962C8B-B14F-4D97-AF65-F5344CB8AC3E}">
-        <p14:creationId xmlns:p14="http://schemas.microsoft.com/office/powerpoint/2010/main" val="3020153818"/>
-      </p:ext>
-    </p:extLst>
-  </p:cSld>
-  <p:clrMapOvr>
-    <a:masterClrMapping/>
-  </p:clrMapOvr>
-</p:notes>
-</file>
-
-<file path=ppt/notesSlides/notesSlide17.xml><?xml version="1.0" encoding="utf-8"?>
-<p:notes xmlns:a="http://schemas.openxmlformats.org/drawingml/2006/main" xmlns:r="http://schemas.openxmlformats.org/officeDocument/2006/relationships" xmlns:p="http://schemas.openxmlformats.org/presentationml/2006/main">
-  <p:cSld>
-    <p:spTree>
-      <p:nvGrpSpPr>
-        <p:cNvPr id="1" name="">
-          <a:extLst>
-            <a:ext uri="{FF2B5EF4-FFF2-40B4-BE49-F238E27FC236}">
-              <a16:creationId xmlns:a16="http://schemas.microsoft.com/office/drawing/2014/main" id="{EC2D1BB6-EBD3-506D-1E9A-D3579C2D9EC2}"/>
-            </a:ext>
-          </a:extLst>
-        </p:cNvPr>
-        <p:cNvGrpSpPr/>
-        <p:nvPr/>
-      </p:nvGrpSpPr>
-      <p:grpSpPr>
-        <a:xfrm>
-          <a:off x="0" y="0"/>
-          <a:ext cx="0" cy="0"/>
-          <a:chOff x="0" y="0"/>
-          <a:chExt cx="0" cy="0"/>
-        </a:xfrm>
-      </p:grpSpPr>
-      <p:sp>
-        <p:nvSpPr>
-          <p:cNvPr id="2" name="Slide Image Placeholder 1">
-            <a:extLst>
-              <a:ext uri="{FF2B5EF4-FFF2-40B4-BE49-F238E27FC236}">
-                <a16:creationId xmlns:a16="http://schemas.microsoft.com/office/drawing/2014/main" id="{43E4C772-6418-50DB-5449-BD31FCD1B014}"/>
-              </a:ext>
-            </a:extLst>
-          </p:cNvPr>
-          <p:cNvSpPr>
-            <a:spLocks noGrp="1" noRot="1" noChangeAspect="1"/>
-          </p:cNvSpPr>
-          <p:nvPr>
-            <p:ph type="sldImg"/>
-          </p:nvPr>
-        </p:nvSpPr>
-        <p:spPr/>
-      </p:sp>
-      <p:sp>
-        <p:nvSpPr>
-          <p:cNvPr id="3" name="Notes Placeholder 2">
-            <a:extLst>
-              <a:ext uri="{FF2B5EF4-FFF2-40B4-BE49-F238E27FC236}">
-                <a16:creationId xmlns:a16="http://schemas.microsoft.com/office/drawing/2014/main" id="{0BA6C006-CE39-49AD-4FC3-55A30F96F622}"/>
-              </a:ext>
-            </a:extLst>
-          </p:cNvPr>
-          <p:cNvSpPr>
-            <a:spLocks noGrp="1"/>
-          </p:cNvSpPr>
-          <p:nvPr>
-            <p:ph type="body" idx="1"/>
-          </p:nvPr>
-        </p:nvSpPr>
-        <p:spPr/>
-        <p:txBody>
-          <a:bodyPr/>
-          <a:lstStyle/>
-          <a:p>
-            <a:endParaRPr kumimoji="1" lang="ja-JP" altLang="en-US" dirty="0"/>
-          </a:p>
-        </p:txBody>
-      </p:sp>
-      <p:sp>
-        <p:nvSpPr>
-          <p:cNvPr id="4" name="Slide Number Placeholder 3">
-            <a:extLst>
-              <a:ext uri="{FF2B5EF4-FFF2-40B4-BE49-F238E27FC236}">
-                <a16:creationId xmlns:a16="http://schemas.microsoft.com/office/drawing/2014/main" id="{594C423C-DC28-BF66-B5A7-42C8E2602B6E}"/>
-              </a:ext>
-            </a:extLst>
-          </p:cNvPr>
-          <p:cNvSpPr>
-            <a:spLocks noGrp="1"/>
-          </p:cNvSpPr>
-          <p:nvPr>
-            <p:ph type="sldNum" sz="quarter" idx="5"/>
-          </p:nvPr>
-        </p:nvSpPr>
-        <p:spPr/>
-        <p:txBody>
-          <a:bodyPr/>
-          <a:lstStyle/>
-          <a:p>
-            <a:fld id="{78CED39A-58DD-4C03-9276-40FE00EB9230}" type="slidenum">
-              <a:rPr kumimoji="1" lang="ja-JP" altLang="en-US" smtClean="0"/>
-              <a:t>18</a:t>
-            </a:fld>
-            <a:endParaRPr kumimoji="1" lang="ja-JP" altLang="en-US"/>
-          </a:p>
-        </p:txBody>
-      </p:sp>
-    </p:spTree>
-    <p:extLst>
-      <p:ext uri="{BB962C8B-B14F-4D97-AF65-F5344CB8AC3E}">
-        <p14:creationId xmlns:p14="http://schemas.microsoft.com/office/powerpoint/2010/main" val="254860756"/>
-      </p:ext>
-    </p:extLst>
-  </p:cSld>
-  <p:clrMapOvr>
-    <a:masterClrMapping/>
-  </p:clrMapOvr>
-</p:notes>
-</file>
-
-<file path=ppt/notesSlides/notesSlide18.xml><?xml version="1.0" encoding="utf-8"?>
 <p:notes xmlns:a="http://schemas.openxmlformats.org/drawingml/2006/main" xmlns:r="http://schemas.openxmlformats.org/officeDocument/2006/relationships" xmlns:p="http://schemas.openxmlformats.org/presentationml/2006/main">
   <p:cSld>
     <p:spTree>
@@ -5647,7 +4135,7 @@
           <a:p>
             <a:fld id="{78CED39A-58DD-4C03-9276-40FE00EB9230}" type="slidenum">
               <a:rPr kumimoji="1" lang="ja-JP" altLang="en-US" smtClean="0"/>
-              <a:t>20</a:t>
+              <a:t>16</a:t>
             </a:fld>
             <a:endParaRPr kumimoji="1" lang="ja-JP" altLang="en-US"/>
           </a:p>
@@ -5656,7 +4144,207 @@
     </p:spTree>
     <p:extLst>
       <p:ext uri="{BB962C8B-B14F-4D97-AF65-F5344CB8AC3E}">
-        <p14:creationId xmlns:p14="http://schemas.microsoft.com/office/powerpoint/2010/main" val="2664884948"/>
+        <p14:creationId xmlns:p14="http://schemas.microsoft.com/office/powerpoint/2010/main" val="1762053885"/>
+      </p:ext>
+    </p:extLst>
+  </p:cSld>
+  <p:clrMapOvr>
+    <a:masterClrMapping/>
+  </p:clrMapOvr>
+</p:notes>
+</file>
+
+<file path=ppt/notesSlides/notesSlide17.xml><?xml version="1.0" encoding="utf-8"?>
+<p:notes xmlns:a="http://schemas.openxmlformats.org/drawingml/2006/main" xmlns:r="http://schemas.openxmlformats.org/officeDocument/2006/relationships" xmlns:p="http://schemas.openxmlformats.org/presentationml/2006/main">
+  <p:cSld>
+    <p:spTree>
+      <p:nvGrpSpPr>
+        <p:cNvPr id="1" name=""/>
+        <p:cNvGrpSpPr/>
+        <p:nvPr/>
+      </p:nvGrpSpPr>
+      <p:grpSpPr>
+        <a:xfrm>
+          <a:off x="0" y="0"/>
+          <a:ext cx="0" cy="0"/>
+          <a:chOff x="0" y="0"/>
+          <a:chExt cx="0" cy="0"/>
+        </a:xfrm>
+      </p:grpSpPr>
+      <p:sp>
+        <p:nvSpPr>
+          <p:cNvPr id="2" name="Slide Image Placeholder 1"/>
+          <p:cNvSpPr>
+            <a:spLocks noGrp="1" noRot="1" noChangeAspect="1"/>
+          </p:cNvSpPr>
+          <p:nvPr>
+            <p:ph type="sldImg"/>
+          </p:nvPr>
+        </p:nvSpPr>
+        <p:spPr/>
+      </p:sp>
+      <p:sp>
+        <p:nvSpPr>
+          <p:cNvPr id="3" name="Notes Placeholder 2"/>
+          <p:cNvSpPr>
+            <a:spLocks noGrp="1"/>
+          </p:cNvSpPr>
+          <p:nvPr>
+            <p:ph type="body" idx="1"/>
+          </p:nvPr>
+        </p:nvSpPr>
+        <p:spPr/>
+        <p:txBody>
+          <a:bodyPr/>
+          <a:lstStyle/>
+          <a:p>
+            <a:pPr marL="171450" indent="-171450">
+              <a:buFont typeface="Arial" panose="020B0604020202020204" pitchFamily="34" charset="0"/>
+              <a:buChar char="•"/>
+            </a:pPr>
+            <a:endParaRPr kumimoji="1" lang="ja-JP" altLang="en-US" dirty="0"/>
+          </a:p>
+        </p:txBody>
+      </p:sp>
+      <p:sp>
+        <p:nvSpPr>
+          <p:cNvPr id="4" name="Slide Number Placeholder 3"/>
+          <p:cNvSpPr>
+            <a:spLocks noGrp="1"/>
+          </p:cNvSpPr>
+          <p:nvPr>
+            <p:ph type="sldNum" sz="quarter" idx="5"/>
+          </p:nvPr>
+        </p:nvSpPr>
+        <p:spPr/>
+        <p:txBody>
+          <a:bodyPr/>
+          <a:lstStyle/>
+          <a:p>
+            <a:fld id="{78CED39A-58DD-4C03-9276-40FE00EB9230}" type="slidenum">
+              <a:rPr kumimoji="1" lang="ja-JP" altLang="en-US" smtClean="0"/>
+              <a:t>17</a:t>
+            </a:fld>
+            <a:endParaRPr kumimoji="1" lang="ja-JP" altLang="en-US"/>
+          </a:p>
+        </p:txBody>
+      </p:sp>
+    </p:spTree>
+    <p:extLst>
+      <p:ext uri="{BB962C8B-B14F-4D97-AF65-F5344CB8AC3E}">
+        <p14:creationId xmlns:p14="http://schemas.microsoft.com/office/powerpoint/2010/main" val="3183957399"/>
+      </p:ext>
+    </p:extLst>
+  </p:cSld>
+  <p:clrMapOvr>
+    <a:masterClrMapping/>
+  </p:clrMapOvr>
+</p:notes>
+</file>
+
+<file path=ppt/notesSlides/notesSlide18.xml><?xml version="1.0" encoding="utf-8"?>
+<p:notes xmlns:a="http://schemas.openxmlformats.org/drawingml/2006/main" xmlns:r="http://schemas.openxmlformats.org/officeDocument/2006/relationships" xmlns:p="http://schemas.openxmlformats.org/presentationml/2006/main">
+  <p:cSld>
+    <p:spTree>
+      <p:nvGrpSpPr>
+        <p:cNvPr id="1" name="">
+          <a:extLst>
+            <a:ext uri="{FF2B5EF4-FFF2-40B4-BE49-F238E27FC236}">
+              <a16:creationId xmlns:a16="http://schemas.microsoft.com/office/drawing/2014/main" id="{7CE22655-4D2C-DBC4-8F1C-5D133FE151A8}"/>
+            </a:ext>
+          </a:extLst>
+        </p:cNvPr>
+        <p:cNvGrpSpPr/>
+        <p:nvPr/>
+      </p:nvGrpSpPr>
+      <p:grpSpPr>
+        <a:xfrm>
+          <a:off x="0" y="0"/>
+          <a:ext cx="0" cy="0"/>
+          <a:chOff x="0" y="0"/>
+          <a:chExt cx="0" cy="0"/>
+        </a:xfrm>
+      </p:grpSpPr>
+      <p:sp>
+        <p:nvSpPr>
+          <p:cNvPr id="2" name="Slide Image Placeholder 1">
+            <a:extLst>
+              <a:ext uri="{FF2B5EF4-FFF2-40B4-BE49-F238E27FC236}">
+                <a16:creationId xmlns:a16="http://schemas.microsoft.com/office/drawing/2014/main" id="{74946B5D-9286-5DDE-EF57-1F2A43C2C48B}"/>
+              </a:ext>
+            </a:extLst>
+          </p:cNvPr>
+          <p:cNvSpPr>
+            <a:spLocks noGrp="1" noRot="1" noChangeAspect="1"/>
+          </p:cNvSpPr>
+          <p:nvPr>
+            <p:ph type="sldImg"/>
+          </p:nvPr>
+        </p:nvSpPr>
+        <p:spPr/>
+      </p:sp>
+      <p:sp>
+        <p:nvSpPr>
+          <p:cNvPr id="3" name="Notes Placeholder 2">
+            <a:extLst>
+              <a:ext uri="{FF2B5EF4-FFF2-40B4-BE49-F238E27FC236}">
+                <a16:creationId xmlns:a16="http://schemas.microsoft.com/office/drawing/2014/main" id="{075B23DD-B998-5021-9970-0A31C0B08E53}"/>
+              </a:ext>
+            </a:extLst>
+          </p:cNvPr>
+          <p:cNvSpPr>
+            <a:spLocks noGrp="1"/>
+          </p:cNvSpPr>
+          <p:nvPr>
+            <p:ph type="body" idx="1"/>
+          </p:nvPr>
+        </p:nvSpPr>
+        <p:spPr/>
+        <p:txBody>
+          <a:bodyPr/>
+          <a:lstStyle/>
+          <a:p>
+            <a:pPr marL="171450" indent="-171450">
+              <a:buFont typeface="Arial" panose="020B0604020202020204" pitchFamily="34" charset="0"/>
+              <a:buChar char="•"/>
+            </a:pPr>
+            <a:endParaRPr kumimoji="1" lang="ja-JP" altLang="en-US" dirty="0"/>
+          </a:p>
+        </p:txBody>
+      </p:sp>
+      <p:sp>
+        <p:nvSpPr>
+          <p:cNvPr id="4" name="Slide Number Placeholder 3">
+            <a:extLst>
+              <a:ext uri="{FF2B5EF4-FFF2-40B4-BE49-F238E27FC236}">
+                <a16:creationId xmlns:a16="http://schemas.microsoft.com/office/drawing/2014/main" id="{1D097B61-9BFB-0024-7544-C672CFA353CA}"/>
+              </a:ext>
+            </a:extLst>
+          </p:cNvPr>
+          <p:cNvSpPr>
+            <a:spLocks noGrp="1"/>
+          </p:cNvSpPr>
+          <p:nvPr>
+            <p:ph type="sldNum" sz="quarter" idx="5"/>
+          </p:nvPr>
+        </p:nvSpPr>
+        <p:spPr/>
+        <p:txBody>
+          <a:bodyPr/>
+          <a:lstStyle/>
+          <a:p>
+            <a:fld id="{78CED39A-58DD-4C03-9276-40FE00EB9230}" type="slidenum">
+              <a:rPr kumimoji="1" lang="ja-JP" altLang="en-US" smtClean="0"/>
+              <a:t>18</a:t>
+            </a:fld>
+            <a:endParaRPr kumimoji="1" lang="ja-JP" altLang="en-US"/>
+          </a:p>
+        </p:txBody>
+      </p:sp>
+    </p:spTree>
+    <p:extLst>
+      <p:ext uri="{BB962C8B-B14F-4D97-AF65-F5344CB8AC3E}">
+        <p14:creationId xmlns:p14="http://schemas.microsoft.com/office/powerpoint/2010/main" val="3020153818"/>
       </p:ext>
     </p:extLst>
   </p:cSld>
@@ -5674,7 +4362,7 @@
         <p:cNvPr id="1" name="">
           <a:extLst>
             <a:ext uri="{FF2B5EF4-FFF2-40B4-BE49-F238E27FC236}">
-              <a16:creationId xmlns:a16="http://schemas.microsoft.com/office/drawing/2014/main" id="{B5D5A7EB-D4DC-93CF-1EED-ED5F87909696}"/>
+              <a16:creationId xmlns:a16="http://schemas.microsoft.com/office/drawing/2014/main" id="{EC2D1BB6-EBD3-506D-1E9A-D3579C2D9EC2}"/>
             </a:ext>
           </a:extLst>
         </p:cNvPr>
@@ -5694,7 +4382,7 @@
           <p:cNvPr id="2" name="Slide Image Placeholder 1">
             <a:extLst>
               <a:ext uri="{FF2B5EF4-FFF2-40B4-BE49-F238E27FC236}">
-                <a16:creationId xmlns:a16="http://schemas.microsoft.com/office/drawing/2014/main" id="{E1F4EE60-6DE2-5F89-FAD8-E905A044CF59}"/>
+                <a16:creationId xmlns:a16="http://schemas.microsoft.com/office/drawing/2014/main" id="{43E4C772-6418-50DB-5449-BD31FCD1B014}"/>
               </a:ext>
             </a:extLst>
           </p:cNvPr>
@@ -5712,7 +4400,7 @@
           <p:cNvPr id="3" name="Notes Placeholder 2">
             <a:extLst>
               <a:ext uri="{FF2B5EF4-FFF2-40B4-BE49-F238E27FC236}">
-                <a16:creationId xmlns:a16="http://schemas.microsoft.com/office/drawing/2014/main" id="{26376534-0504-9F71-C45C-AB2606C9E36C}"/>
+                <a16:creationId xmlns:a16="http://schemas.microsoft.com/office/drawing/2014/main" id="{0BA6C006-CE39-49AD-4FC3-55A30F96F622}"/>
               </a:ext>
             </a:extLst>
           </p:cNvPr>
@@ -5728,6 +4416,10 @@
           <a:bodyPr/>
           <a:lstStyle/>
           <a:p>
+            <a:pPr marL="171450" indent="-171450">
+              <a:buFont typeface="Arial" panose="020B0604020202020204" pitchFamily="34" charset="0"/>
+              <a:buChar char="•"/>
+            </a:pPr>
             <a:endParaRPr kumimoji="1" lang="ja-JP" altLang="en-US" dirty="0"/>
           </a:p>
         </p:txBody>
@@ -5737,7 +4429,7 @@
           <p:cNvPr id="4" name="Slide Number Placeholder 3">
             <a:extLst>
               <a:ext uri="{FF2B5EF4-FFF2-40B4-BE49-F238E27FC236}">
-                <a16:creationId xmlns:a16="http://schemas.microsoft.com/office/drawing/2014/main" id="{6F944359-1D2E-D614-8379-15908121AE49}"/>
+                <a16:creationId xmlns:a16="http://schemas.microsoft.com/office/drawing/2014/main" id="{594C423C-DC28-BF66-B5A7-42C8E2602B6E}"/>
               </a:ext>
             </a:extLst>
           </p:cNvPr>
@@ -5755,7 +4447,7 @@
           <a:p>
             <a:fld id="{78CED39A-58DD-4C03-9276-40FE00EB9230}" type="slidenum">
               <a:rPr kumimoji="1" lang="ja-JP" altLang="en-US" smtClean="0"/>
-              <a:t>21</a:t>
+              <a:t>19</a:t>
             </a:fld>
             <a:endParaRPr kumimoji="1" lang="ja-JP" altLang="en-US"/>
           </a:p>
@@ -5764,7 +4456,7 @@
     </p:spTree>
     <p:extLst>
       <p:ext uri="{BB962C8B-B14F-4D97-AF65-F5344CB8AC3E}">
-        <p14:creationId xmlns:p14="http://schemas.microsoft.com/office/powerpoint/2010/main" val="757066365"/>
+        <p14:creationId xmlns:p14="http://schemas.microsoft.com/office/powerpoint/2010/main" val="254860756"/>
       </p:ext>
     </p:extLst>
   </p:cSld>
@@ -5818,7 +4510,18 @@
           <a:bodyPr/>
           <a:lstStyle/>
           <a:p>
-            <a:endParaRPr kumimoji="1" lang="ja-JP" altLang="en-US" dirty="0"/>
+            <a:r>
+              <a:rPr kumimoji="1" lang="ja-JP" altLang="en-US" dirty="0"/>
+              <a:t>勉強会ということで、</a:t>
+            </a:r>
+            <a:r>
+              <a:rPr kumimoji="1" lang="en-US" altLang="ja-JP" dirty="0"/>
+              <a:t>PHUSE</a:t>
+            </a:r>
+            <a:r>
+              <a:rPr kumimoji="1" lang="ja-JP" altLang="en-US" dirty="0"/>
+              <a:t>の取り組みだけではなく、一般的な知識も共有したい。</a:t>
+            </a:r>
           </a:p>
         </p:txBody>
       </p:sp>
@@ -5859,242 +4562,6 @@
 </file>
 
 <file path=ppt/notesSlides/notesSlide20.xml><?xml version="1.0" encoding="utf-8"?>
-<p:notes xmlns:a="http://schemas.openxmlformats.org/drawingml/2006/main" xmlns:r="http://schemas.openxmlformats.org/officeDocument/2006/relationships" xmlns:p="http://schemas.openxmlformats.org/presentationml/2006/main">
-  <p:cSld>
-    <p:spTree>
-      <p:nvGrpSpPr>
-        <p:cNvPr id="1" name="">
-          <a:extLst>
-            <a:ext uri="{FF2B5EF4-FFF2-40B4-BE49-F238E27FC236}">
-              <a16:creationId xmlns:a16="http://schemas.microsoft.com/office/drawing/2014/main" id="{063353F6-258F-F93C-2AE5-9B692D40F4E9}"/>
-            </a:ext>
-          </a:extLst>
-        </p:cNvPr>
-        <p:cNvGrpSpPr/>
-        <p:nvPr/>
-      </p:nvGrpSpPr>
-      <p:grpSpPr>
-        <a:xfrm>
-          <a:off x="0" y="0"/>
-          <a:ext cx="0" cy="0"/>
-          <a:chOff x="0" y="0"/>
-          <a:chExt cx="0" cy="0"/>
-        </a:xfrm>
-      </p:grpSpPr>
-      <p:sp>
-        <p:nvSpPr>
-          <p:cNvPr id="2" name="Slide Image Placeholder 1">
-            <a:extLst>
-              <a:ext uri="{FF2B5EF4-FFF2-40B4-BE49-F238E27FC236}">
-                <a16:creationId xmlns:a16="http://schemas.microsoft.com/office/drawing/2014/main" id="{81155B4C-E282-7D9A-8B9E-42F8088F795A}"/>
-              </a:ext>
-            </a:extLst>
-          </p:cNvPr>
-          <p:cNvSpPr>
-            <a:spLocks noGrp="1" noRot="1" noChangeAspect="1"/>
-          </p:cNvSpPr>
-          <p:nvPr>
-            <p:ph type="sldImg"/>
-          </p:nvPr>
-        </p:nvSpPr>
-        <p:spPr/>
-      </p:sp>
-      <p:sp>
-        <p:nvSpPr>
-          <p:cNvPr id="3" name="Notes Placeholder 2">
-            <a:extLst>
-              <a:ext uri="{FF2B5EF4-FFF2-40B4-BE49-F238E27FC236}">
-                <a16:creationId xmlns:a16="http://schemas.microsoft.com/office/drawing/2014/main" id="{0882F98B-F510-7953-09D3-CBCEC5A164C5}"/>
-              </a:ext>
-            </a:extLst>
-          </p:cNvPr>
-          <p:cNvSpPr>
-            <a:spLocks noGrp="1"/>
-          </p:cNvSpPr>
-          <p:nvPr>
-            <p:ph type="body" idx="1"/>
-          </p:nvPr>
-        </p:nvSpPr>
-        <p:spPr/>
-        <p:txBody>
-          <a:bodyPr/>
-          <a:lstStyle/>
-          <a:p>
-            <a:endParaRPr kumimoji="1" lang="ja-JP" altLang="en-US" dirty="0"/>
-          </a:p>
-        </p:txBody>
-      </p:sp>
-      <p:sp>
-        <p:nvSpPr>
-          <p:cNvPr id="4" name="Slide Number Placeholder 3">
-            <a:extLst>
-              <a:ext uri="{FF2B5EF4-FFF2-40B4-BE49-F238E27FC236}">
-                <a16:creationId xmlns:a16="http://schemas.microsoft.com/office/drawing/2014/main" id="{899B6705-A45F-027B-D39C-C6DF5724313A}"/>
-              </a:ext>
-            </a:extLst>
-          </p:cNvPr>
-          <p:cNvSpPr>
-            <a:spLocks noGrp="1"/>
-          </p:cNvSpPr>
-          <p:nvPr>
-            <p:ph type="sldNum" sz="quarter" idx="5"/>
-          </p:nvPr>
-        </p:nvSpPr>
-        <p:spPr/>
-        <p:txBody>
-          <a:bodyPr/>
-          <a:lstStyle/>
-          <a:p>
-            <a:fld id="{78CED39A-58DD-4C03-9276-40FE00EB9230}" type="slidenum">
-              <a:rPr kumimoji="1" lang="ja-JP" altLang="en-US" smtClean="0"/>
-              <a:t>23</a:t>
-            </a:fld>
-            <a:endParaRPr kumimoji="1" lang="ja-JP" altLang="en-US"/>
-          </a:p>
-        </p:txBody>
-      </p:sp>
-    </p:spTree>
-    <p:extLst>
-      <p:ext uri="{BB962C8B-B14F-4D97-AF65-F5344CB8AC3E}">
-        <p14:creationId xmlns:p14="http://schemas.microsoft.com/office/powerpoint/2010/main" val="298870019"/>
-      </p:ext>
-    </p:extLst>
-  </p:cSld>
-  <p:clrMapOvr>
-    <a:masterClrMapping/>
-  </p:clrMapOvr>
-</p:notes>
-</file>
-
-<file path=ppt/notesSlides/notesSlide21.xml><?xml version="1.0" encoding="utf-8"?>
-<p:notes xmlns:a="http://schemas.openxmlformats.org/drawingml/2006/main" xmlns:r="http://schemas.openxmlformats.org/officeDocument/2006/relationships" xmlns:p="http://schemas.openxmlformats.org/presentationml/2006/main">
-  <p:cSld>
-    <p:spTree>
-      <p:nvGrpSpPr>
-        <p:cNvPr id="1" name="">
-          <a:extLst>
-            <a:ext uri="{FF2B5EF4-FFF2-40B4-BE49-F238E27FC236}">
-              <a16:creationId xmlns:a16="http://schemas.microsoft.com/office/drawing/2014/main" id="{621EAD3B-6357-598B-04B0-DF1DF2FA9B92}"/>
-            </a:ext>
-          </a:extLst>
-        </p:cNvPr>
-        <p:cNvGrpSpPr/>
-        <p:nvPr/>
-      </p:nvGrpSpPr>
-      <p:grpSpPr>
-        <a:xfrm>
-          <a:off x="0" y="0"/>
-          <a:ext cx="0" cy="0"/>
-          <a:chOff x="0" y="0"/>
-          <a:chExt cx="0" cy="0"/>
-        </a:xfrm>
-      </p:grpSpPr>
-      <p:sp>
-        <p:nvSpPr>
-          <p:cNvPr id="2" name="Slide Image Placeholder 1">
-            <a:extLst>
-              <a:ext uri="{FF2B5EF4-FFF2-40B4-BE49-F238E27FC236}">
-                <a16:creationId xmlns:a16="http://schemas.microsoft.com/office/drawing/2014/main" id="{B81A29F8-903C-9D0B-A1D6-1230ED5D640B}"/>
-              </a:ext>
-            </a:extLst>
-          </p:cNvPr>
-          <p:cNvSpPr>
-            <a:spLocks noGrp="1" noRot="1" noChangeAspect="1"/>
-          </p:cNvSpPr>
-          <p:nvPr>
-            <p:ph type="sldImg"/>
-          </p:nvPr>
-        </p:nvSpPr>
-        <p:spPr/>
-      </p:sp>
-      <p:sp>
-        <p:nvSpPr>
-          <p:cNvPr id="3" name="Notes Placeholder 2">
-            <a:extLst>
-              <a:ext uri="{FF2B5EF4-FFF2-40B4-BE49-F238E27FC236}">
-                <a16:creationId xmlns:a16="http://schemas.microsoft.com/office/drawing/2014/main" id="{396FD03E-AF77-BAC3-434A-31BA2AA4B3EE}"/>
-              </a:ext>
-            </a:extLst>
-          </p:cNvPr>
-          <p:cNvSpPr>
-            <a:spLocks noGrp="1"/>
-          </p:cNvSpPr>
-          <p:nvPr>
-            <p:ph type="body" idx="1"/>
-          </p:nvPr>
-        </p:nvSpPr>
-        <p:spPr/>
-        <p:txBody>
-          <a:bodyPr/>
-          <a:lstStyle/>
-          <a:p>
-            <a:r>
-              <a:rPr lang="ja-JP" altLang="en-US" dirty="0"/>
-              <a:t>各関数の説明は手書きするのではなく、</a:t>
-            </a:r>
-            <a:r>
-              <a:rPr lang="en-US" altLang="ja-JP" dirty="0" err="1"/>
-              <a:t>roxygen</a:t>
-            </a:r>
-            <a:r>
-              <a:rPr lang="ja-JP" altLang="en-US" dirty="0"/>
-              <a:t>で記述した内容を自動的に</a:t>
-            </a:r>
-            <a:r>
-              <a:rPr lang="en-US" altLang="ja-JP" dirty="0"/>
-              <a:t>Markdown</a:t>
-            </a:r>
-            <a:r>
-              <a:rPr lang="ja-JP" altLang="en-US" dirty="0"/>
-              <a:t>にすることが多い</a:t>
-            </a:r>
-            <a:endParaRPr kumimoji="1" lang="ja-JP" altLang="en-US" dirty="0"/>
-          </a:p>
-        </p:txBody>
-      </p:sp>
-      <p:sp>
-        <p:nvSpPr>
-          <p:cNvPr id="4" name="Slide Number Placeholder 3">
-            <a:extLst>
-              <a:ext uri="{FF2B5EF4-FFF2-40B4-BE49-F238E27FC236}">
-                <a16:creationId xmlns:a16="http://schemas.microsoft.com/office/drawing/2014/main" id="{44FDB23A-72A9-102E-749C-DC887F9EE408}"/>
-              </a:ext>
-            </a:extLst>
-          </p:cNvPr>
-          <p:cNvSpPr>
-            <a:spLocks noGrp="1"/>
-          </p:cNvSpPr>
-          <p:nvPr>
-            <p:ph type="sldNum" sz="quarter" idx="5"/>
-          </p:nvPr>
-        </p:nvSpPr>
-        <p:spPr/>
-        <p:txBody>
-          <a:bodyPr/>
-          <a:lstStyle/>
-          <a:p>
-            <a:fld id="{78CED39A-58DD-4C03-9276-40FE00EB9230}" type="slidenum">
-              <a:rPr kumimoji="1" lang="ja-JP" altLang="en-US" smtClean="0"/>
-              <a:t>25</a:t>
-            </a:fld>
-            <a:endParaRPr kumimoji="1" lang="ja-JP" altLang="en-US"/>
-          </a:p>
-        </p:txBody>
-      </p:sp>
-    </p:spTree>
-    <p:extLst>
-      <p:ext uri="{BB962C8B-B14F-4D97-AF65-F5344CB8AC3E}">
-        <p14:creationId xmlns:p14="http://schemas.microsoft.com/office/powerpoint/2010/main" val="3253782704"/>
-      </p:ext>
-    </p:extLst>
-  </p:cSld>
-  <p:clrMapOvr>
-    <a:masterClrMapping/>
-  </p:clrMapOvr>
-</p:notes>
-</file>
-
-<file path=ppt/notesSlides/notesSlide22.xml><?xml version="1.0" encoding="utf-8"?>
 <p:notes xmlns:a="http://schemas.openxmlformats.org/drawingml/2006/main" xmlns:r="http://schemas.openxmlformats.org/officeDocument/2006/relationships" xmlns:p="http://schemas.openxmlformats.org/presentationml/2006/main">
   <p:cSld>
     <p:spTree>
@@ -6138,6 +4605,10 @@
           <a:bodyPr/>
           <a:lstStyle/>
           <a:p>
+            <a:pPr marL="171450" indent="-171450">
+              <a:buFont typeface="Arial" panose="020B0604020202020204" pitchFamily="34" charset="0"/>
+              <a:buChar char="•"/>
+            </a:pPr>
             <a:endParaRPr kumimoji="1" lang="ja-JP" altLang="en-US" dirty="0"/>
           </a:p>
         </p:txBody>
@@ -6159,7 +4630,717 @@
           <a:p>
             <a:fld id="{78CED39A-58DD-4C03-9276-40FE00EB9230}" type="slidenum">
               <a:rPr kumimoji="1" lang="ja-JP" altLang="en-US" smtClean="0"/>
+              <a:t>20</a:t>
+            </a:fld>
+            <a:endParaRPr kumimoji="1" lang="ja-JP" altLang="en-US"/>
+          </a:p>
+        </p:txBody>
+      </p:sp>
+    </p:spTree>
+    <p:extLst>
+      <p:ext uri="{BB962C8B-B14F-4D97-AF65-F5344CB8AC3E}">
+        <p14:creationId xmlns:p14="http://schemas.microsoft.com/office/powerpoint/2010/main" val="2825988841"/>
+      </p:ext>
+    </p:extLst>
+  </p:cSld>
+  <p:clrMapOvr>
+    <a:masterClrMapping/>
+  </p:clrMapOvr>
+</p:notes>
+</file>
+
+<file path=ppt/notesSlides/notesSlide21.xml><?xml version="1.0" encoding="utf-8"?>
+<p:notes xmlns:a="http://schemas.openxmlformats.org/drawingml/2006/main" xmlns:r="http://schemas.openxmlformats.org/officeDocument/2006/relationships" xmlns:p="http://schemas.openxmlformats.org/presentationml/2006/main">
+  <p:cSld>
+    <p:spTree>
+      <p:nvGrpSpPr>
+        <p:cNvPr id="1" name=""/>
+        <p:cNvGrpSpPr/>
+        <p:nvPr/>
+      </p:nvGrpSpPr>
+      <p:grpSpPr>
+        <a:xfrm>
+          <a:off x="0" y="0"/>
+          <a:ext cx="0" cy="0"/>
+          <a:chOff x="0" y="0"/>
+          <a:chExt cx="0" cy="0"/>
+        </a:xfrm>
+      </p:grpSpPr>
+      <p:sp>
+        <p:nvSpPr>
+          <p:cNvPr id="2" name="Slide Image Placeholder 1"/>
+          <p:cNvSpPr>
+            <a:spLocks noGrp="1" noRot="1" noChangeAspect="1"/>
+          </p:cNvSpPr>
+          <p:nvPr>
+            <p:ph type="sldImg"/>
+          </p:nvPr>
+        </p:nvSpPr>
+        <p:spPr/>
+      </p:sp>
+      <p:sp>
+        <p:nvSpPr>
+          <p:cNvPr id="3" name="Notes Placeholder 2"/>
+          <p:cNvSpPr>
+            <a:spLocks noGrp="1"/>
+          </p:cNvSpPr>
+          <p:nvPr>
+            <p:ph type="body" idx="1"/>
+          </p:nvPr>
+        </p:nvSpPr>
+        <p:spPr/>
+        <p:txBody>
+          <a:bodyPr/>
+          <a:lstStyle/>
+          <a:p>
+            <a:pPr marL="171450" marR="0" lvl="0" indent="-171450" algn="l" defTabSz="914400" rtl="0" eaLnBrk="1" fontAlgn="auto" latinLnBrk="0" hangingPunct="1">
+              <a:lnSpc>
+                <a:spcPct val="100000"/>
+              </a:lnSpc>
+              <a:spcBef>
+                <a:spcPts val="0"/>
+              </a:spcBef>
+              <a:spcAft>
+                <a:spcPts val="0"/>
+              </a:spcAft>
+              <a:buClrTx/>
+              <a:buSzTx/>
+              <a:buFont typeface="Arial" panose="020B0604020202020204" pitchFamily="34" charset="0"/>
+              <a:buChar char="•"/>
+              <a:tabLst/>
+              <a:defRPr/>
+            </a:pPr>
+            <a:endParaRPr kumimoji="1" lang="ja-JP" altLang="en-US" dirty="0"/>
+          </a:p>
+        </p:txBody>
+      </p:sp>
+      <p:sp>
+        <p:nvSpPr>
+          <p:cNvPr id="4" name="Slide Number Placeholder 3"/>
+          <p:cNvSpPr>
+            <a:spLocks noGrp="1"/>
+          </p:cNvSpPr>
+          <p:nvPr>
+            <p:ph type="sldNum" sz="quarter" idx="5"/>
+          </p:nvPr>
+        </p:nvSpPr>
+        <p:spPr/>
+        <p:txBody>
+          <a:bodyPr/>
+          <a:lstStyle/>
+          <a:p>
+            <a:fld id="{78CED39A-58DD-4C03-9276-40FE00EB9230}" type="slidenum">
+              <a:rPr kumimoji="1" lang="ja-JP" altLang="en-US" smtClean="0"/>
+              <a:t>21</a:t>
+            </a:fld>
+            <a:endParaRPr kumimoji="1" lang="ja-JP" altLang="en-US"/>
+          </a:p>
+        </p:txBody>
+      </p:sp>
+    </p:spTree>
+    <p:extLst>
+      <p:ext uri="{BB962C8B-B14F-4D97-AF65-F5344CB8AC3E}">
+        <p14:creationId xmlns:p14="http://schemas.microsoft.com/office/powerpoint/2010/main" val="2664884948"/>
+      </p:ext>
+    </p:extLst>
+  </p:cSld>
+  <p:clrMapOvr>
+    <a:masterClrMapping/>
+  </p:clrMapOvr>
+</p:notes>
+</file>
+
+<file path=ppt/notesSlides/notesSlide22.xml><?xml version="1.0" encoding="utf-8"?>
+<p:notes xmlns:a="http://schemas.openxmlformats.org/drawingml/2006/main" xmlns:r="http://schemas.openxmlformats.org/officeDocument/2006/relationships" xmlns:p="http://schemas.openxmlformats.org/presentationml/2006/main">
+  <p:cSld>
+    <p:spTree>
+      <p:nvGrpSpPr>
+        <p:cNvPr id="1" name="">
+          <a:extLst>
+            <a:ext uri="{FF2B5EF4-FFF2-40B4-BE49-F238E27FC236}">
+              <a16:creationId xmlns:a16="http://schemas.microsoft.com/office/drawing/2014/main" id="{B5D5A7EB-D4DC-93CF-1EED-ED5F87909696}"/>
+            </a:ext>
+          </a:extLst>
+        </p:cNvPr>
+        <p:cNvGrpSpPr/>
+        <p:nvPr/>
+      </p:nvGrpSpPr>
+      <p:grpSpPr>
+        <a:xfrm>
+          <a:off x="0" y="0"/>
+          <a:ext cx="0" cy="0"/>
+          <a:chOff x="0" y="0"/>
+          <a:chExt cx="0" cy="0"/>
+        </a:xfrm>
+      </p:grpSpPr>
+      <p:sp>
+        <p:nvSpPr>
+          <p:cNvPr id="2" name="Slide Image Placeholder 1">
+            <a:extLst>
+              <a:ext uri="{FF2B5EF4-FFF2-40B4-BE49-F238E27FC236}">
+                <a16:creationId xmlns:a16="http://schemas.microsoft.com/office/drawing/2014/main" id="{E1F4EE60-6DE2-5F89-FAD8-E905A044CF59}"/>
+              </a:ext>
+            </a:extLst>
+          </p:cNvPr>
+          <p:cNvSpPr>
+            <a:spLocks noGrp="1" noRot="1" noChangeAspect="1"/>
+          </p:cNvSpPr>
+          <p:nvPr>
+            <p:ph type="sldImg"/>
+          </p:nvPr>
+        </p:nvSpPr>
+        <p:spPr/>
+      </p:sp>
+      <p:sp>
+        <p:nvSpPr>
+          <p:cNvPr id="3" name="Notes Placeholder 2">
+            <a:extLst>
+              <a:ext uri="{FF2B5EF4-FFF2-40B4-BE49-F238E27FC236}">
+                <a16:creationId xmlns:a16="http://schemas.microsoft.com/office/drawing/2014/main" id="{26376534-0504-9F71-C45C-AB2606C9E36C}"/>
+              </a:ext>
+            </a:extLst>
+          </p:cNvPr>
+          <p:cNvSpPr>
+            <a:spLocks noGrp="1"/>
+          </p:cNvSpPr>
+          <p:nvPr>
+            <p:ph type="body" idx="1"/>
+          </p:nvPr>
+        </p:nvSpPr>
+        <p:spPr/>
+        <p:txBody>
+          <a:bodyPr/>
+          <a:lstStyle/>
+          <a:p>
+            <a:pPr marL="0" indent="0">
+              <a:buFont typeface="Arial" panose="020B0604020202020204" pitchFamily="34" charset="0"/>
+              <a:buNone/>
+            </a:pPr>
+            <a:endParaRPr kumimoji="1" lang="en-US" altLang="ja-JP" dirty="0"/>
+          </a:p>
+        </p:txBody>
+      </p:sp>
+      <p:sp>
+        <p:nvSpPr>
+          <p:cNvPr id="4" name="Slide Number Placeholder 3">
+            <a:extLst>
+              <a:ext uri="{FF2B5EF4-FFF2-40B4-BE49-F238E27FC236}">
+                <a16:creationId xmlns:a16="http://schemas.microsoft.com/office/drawing/2014/main" id="{6F944359-1D2E-D614-8379-15908121AE49}"/>
+              </a:ext>
+            </a:extLst>
+          </p:cNvPr>
+          <p:cNvSpPr>
+            <a:spLocks noGrp="1"/>
+          </p:cNvSpPr>
+          <p:nvPr>
+            <p:ph type="sldNum" sz="quarter" idx="5"/>
+          </p:nvPr>
+        </p:nvSpPr>
+        <p:spPr/>
+        <p:txBody>
+          <a:bodyPr/>
+          <a:lstStyle/>
+          <a:p>
+            <a:fld id="{78CED39A-58DD-4C03-9276-40FE00EB9230}" type="slidenum">
+              <a:rPr kumimoji="1" lang="ja-JP" altLang="en-US" smtClean="0"/>
+              <a:t>22</a:t>
+            </a:fld>
+            <a:endParaRPr kumimoji="1" lang="ja-JP" altLang="en-US"/>
+          </a:p>
+        </p:txBody>
+      </p:sp>
+    </p:spTree>
+    <p:extLst>
+      <p:ext uri="{BB962C8B-B14F-4D97-AF65-F5344CB8AC3E}">
+        <p14:creationId xmlns:p14="http://schemas.microsoft.com/office/powerpoint/2010/main" val="757066365"/>
+      </p:ext>
+    </p:extLst>
+  </p:cSld>
+  <p:clrMapOvr>
+    <a:masterClrMapping/>
+  </p:clrMapOvr>
+</p:notes>
+</file>
+
+<file path=ppt/notesSlides/notesSlide23.xml><?xml version="1.0" encoding="utf-8"?>
+<p:notes xmlns:a="http://schemas.openxmlformats.org/drawingml/2006/main" xmlns:r="http://schemas.openxmlformats.org/officeDocument/2006/relationships" xmlns:p="http://schemas.openxmlformats.org/presentationml/2006/main">
+  <p:cSld>
+    <p:spTree>
+      <p:nvGrpSpPr>
+        <p:cNvPr id="1" name=""/>
+        <p:cNvGrpSpPr/>
+        <p:nvPr/>
+      </p:nvGrpSpPr>
+      <p:grpSpPr>
+        <a:xfrm>
+          <a:off x="0" y="0"/>
+          <a:ext cx="0" cy="0"/>
+          <a:chOff x="0" y="0"/>
+          <a:chExt cx="0" cy="0"/>
+        </a:xfrm>
+      </p:grpSpPr>
+      <p:sp>
+        <p:nvSpPr>
+          <p:cNvPr id="2" name="Slide Image Placeholder 1"/>
+          <p:cNvSpPr>
+            <a:spLocks noGrp="1" noRot="1" noChangeAspect="1"/>
+          </p:cNvSpPr>
+          <p:nvPr>
+            <p:ph type="sldImg"/>
+          </p:nvPr>
+        </p:nvSpPr>
+        <p:spPr/>
+      </p:sp>
+      <p:sp>
+        <p:nvSpPr>
+          <p:cNvPr id="3" name="Notes Placeholder 2"/>
+          <p:cNvSpPr>
+            <a:spLocks noGrp="1"/>
+          </p:cNvSpPr>
+          <p:nvPr>
+            <p:ph type="body" idx="1"/>
+          </p:nvPr>
+        </p:nvSpPr>
+        <p:spPr/>
+        <p:txBody>
+          <a:bodyPr/>
+          <a:lstStyle/>
+          <a:p>
+            <a:pPr marL="171450" indent="-171450">
+              <a:buFont typeface="Arial" panose="020B0604020202020204" pitchFamily="34" charset="0"/>
+              <a:buChar char="•"/>
+            </a:pPr>
+            <a:endParaRPr kumimoji="1" lang="ja-JP" altLang="en-US" dirty="0"/>
+          </a:p>
+        </p:txBody>
+      </p:sp>
+      <p:sp>
+        <p:nvSpPr>
+          <p:cNvPr id="4" name="Slide Number Placeholder 3"/>
+          <p:cNvSpPr>
+            <a:spLocks noGrp="1"/>
+          </p:cNvSpPr>
+          <p:nvPr>
+            <p:ph type="sldNum" sz="quarter" idx="5"/>
+          </p:nvPr>
+        </p:nvSpPr>
+        <p:spPr/>
+        <p:txBody>
+          <a:bodyPr/>
+          <a:lstStyle/>
+          <a:p>
+            <a:fld id="{78CED39A-58DD-4C03-9276-40FE00EB9230}" type="slidenum">
+              <a:rPr kumimoji="1" lang="ja-JP" altLang="en-US" smtClean="0"/>
+              <a:t>23</a:t>
+            </a:fld>
+            <a:endParaRPr kumimoji="1" lang="ja-JP" altLang="en-US"/>
+          </a:p>
+        </p:txBody>
+      </p:sp>
+    </p:spTree>
+    <p:extLst>
+      <p:ext uri="{BB962C8B-B14F-4D97-AF65-F5344CB8AC3E}">
+        <p14:creationId xmlns:p14="http://schemas.microsoft.com/office/powerpoint/2010/main" val="2201982549"/>
+      </p:ext>
+    </p:extLst>
+  </p:cSld>
+  <p:clrMapOvr>
+    <a:masterClrMapping/>
+  </p:clrMapOvr>
+</p:notes>
+</file>
+
+<file path=ppt/notesSlides/notesSlide24.xml><?xml version="1.0" encoding="utf-8"?>
+<p:notes xmlns:a="http://schemas.openxmlformats.org/drawingml/2006/main" xmlns:r="http://schemas.openxmlformats.org/officeDocument/2006/relationships" xmlns:p="http://schemas.openxmlformats.org/presentationml/2006/main">
+  <p:cSld>
+    <p:spTree>
+      <p:nvGrpSpPr>
+        <p:cNvPr id="1" name="">
+          <a:extLst>
+            <a:ext uri="{FF2B5EF4-FFF2-40B4-BE49-F238E27FC236}">
+              <a16:creationId xmlns:a16="http://schemas.microsoft.com/office/drawing/2014/main" id="{063353F6-258F-F93C-2AE5-9B692D40F4E9}"/>
+            </a:ext>
+          </a:extLst>
+        </p:cNvPr>
+        <p:cNvGrpSpPr/>
+        <p:nvPr/>
+      </p:nvGrpSpPr>
+      <p:grpSpPr>
+        <a:xfrm>
+          <a:off x="0" y="0"/>
+          <a:ext cx="0" cy="0"/>
+          <a:chOff x="0" y="0"/>
+          <a:chExt cx="0" cy="0"/>
+        </a:xfrm>
+      </p:grpSpPr>
+      <p:sp>
+        <p:nvSpPr>
+          <p:cNvPr id="2" name="Slide Image Placeholder 1">
+            <a:extLst>
+              <a:ext uri="{FF2B5EF4-FFF2-40B4-BE49-F238E27FC236}">
+                <a16:creationId xmlns:a16="http://schemas.microsoft.com/office/drawing/2014/main" id="{81155B4C-E282-7D9A-8B9E-42F8088F795A}"/>
+              </a:ext>
+            </a:extLst>
+          </p:cNvPr>
+          <p:cNvSpPr>
+            <a:spLocks noGrp="1" noRot="1" noChangeAspect="1"/>
+          </p:cNvSpPr>
+          <p:nvPr>
+            <p:ph type="sldImg"/>
+          </p:nvPr>
+        </p:nvSpPr>
+        <p:spPr/>
+      </p:sp>
+      <p:sp>
+        <p:nvSpPr>
+          <p:cNvPr id="3" name="Notes Placeholder 2">
+            <a:extLst>
+              <a:ext uri="{FF2B5EF4-FFF2-40B4-BE49-F238E27FC236}">
+                <a16:creationId xmlns:a16="http://schemas.microsoft.com/office/drawing/2014/main" id="{0882F98B-F510-7953-09D3-CBCEC5A164C5}"/>
+              </a:ext>
+            </a:extLst>
+          </p:cNvPr>
+          <p:cNvSpPr>
+            <a:spLocks noGrp="1"/>
+          </p:cNvSpPr>
+          <p:nvPr>
+            <p:ph type="body" idx="1"/>
+          </p:nvPr>
+        </p:nvSpPr>
+        <p:spPr/>
+        <p:txBody>
+          <a:bodyPr/>
+          <a:lstStyle/>
+          <a:p>
+            <a:pPr marL="171450" marR="0" lvl="0" indent="-171450" algn="l" defTabSz="914400" rtl="0" eaLnBrk="1" fontAlgn="auto" latinLnBrk="0" hangingPunct="1">
+              <a:lnSpc>
+                <a:spcPct val="100000"/>
+              </a:lnSpc>
+              <a:spcBef>
+                <a:spcPts val="0"/>
+              </a:spcBef>
+              <a:spcAft>
+                <a:spcPts val="0"/>
+              </a:spcAft>
+              <a:buClrTx/>
+              <a:buSzTx/>
+              <a:buFont typeface="Arial" panose="020B0604020202020204" pitchFamily="34" charset="0"/>
+              <a:buChar char="•"/>
+              <a:tabLst/>
+              <a:defRPr/>
+            </a:pPr>
+            <a:endParaRPr kumimoji="1" lang="ja-JP" altLang="en-US" dirty="0"/>
+          </a:p>
+        </p:txBody>
+      </p:sp>
+      <p:sp>
+        <p:nvSpPr>
+          <p:cNvPr id="4" name="Slide Number Placeholder 3">
+            <a:extLst>
+              <a:ext uri="{FF2B5EF4-FFF2-40B4-BE49-F238E27FC236}">
+                <a16:creationId xmlns:a16="http://schemas.microsoft.com/office/drawing/2014/main" id="{899B6705-A45F-027B-D39C-C6DF5724313A}"/>
+              </a:ext>
+            </a:extLst>
+          </p:cNvPr>
+          <p:cNvSpPr>
+            <a:spLocks noGrp="1"/>
+          </p:cNvSpPr>
+          <p:nvPr>
+            <p:ph type="sldNum" sz="quarter" idx="5"/>
+          </p:nvPr>
+        </p:nvSpPr>
+        <p:spPr/>
+        <p:txBody>
+          <a:bodyPr/>
+          <a:lstStyle/>
+          <a:p>
+            <a:fld id="{78CED39A-58DD-4C03-9276-40FE00EB9230}" type="slidenum">
+              <a:rPr kumimoji="1" lang="ja-JP" altLang="en-US" smtClean="0"/>
+              <a:t>24</a:t>
+            </a:fld>
+            <a:endParaRPr kumimoji="1" lang="ja-JP" altLang="en-US"/>
+          </a:p>
+        </p:txBody>
+      </p:sp>
+    </p:spTree>
+    <p:extLst>
+      <p:ext uri="{BB962C8B-B14F-4D97-AF65-F5344CB8AC3E}">
+        <p14:creationId xmlns:p14="http://schemas.microsoft.com/office/powerpoint/2010/main" val="298870019"/>
+      </p:ext>
+    </p:extLst>
+  </p:cSld>
+  <p:clrMapOvr>
+    <a:masterClrMapping/>
+  </p:clrMapOvr>
+</p:notes>
+</file>
+
+<file path=ppt/notesSlides/notesSlide25.xml><?xml version="1.0" encoding="utf-8"?>
+<p:notes xmlns:a="http://schemas.openxmlformats.org/drawingml/2006/main" xmlns:r="http://schemas.openxmlformats.org/officeDocument/2006/relationships" xmlns:p="http://schemas.openxmlformats.org/presentationml/2006/main">
+  <p:cSld>
+    <p:spTree>
+      <p:nvGrpSpPr>
+        <p:cNvPr id="1" name=""/>
+        <p:cNvGrpSpPr/>
+        <p:nvPr/>
+      </p:nvGrpSpPr>
+      <p:grpSpPr>
+        <a:xfrm>
+          <a:off x="0" y="0"/>
+          <a:ext cx="0" cy="0"/>
+          <a:chOff x="0" y="0"/>
+          <a:chExt cx="0" cy="0"/>
+        </a:xfrm>
+      </p:grpSpPr>
+      <p:sp>
+        <p:nvSpPr>
+          <p:cNvPr id="2" name="Slide Image Placeholder 1"/>
+          <p:cNvSpPr>
+            <a:spLocks noGrp="1" noRot="1" noChangeAspect="1"/>
+          </p:cNvSpPr>
+          <p:nvPr>
+            <p:ph type="sldImg"/>
+          </p:nvPr>
+        </p:nvSpPr>
+        <p:spPr/>
+      </p:sp>
+      <p:sp>
+        <p:nvSpPr>
+          <p:cNvPr id="3" name="Notes Placeholder 2"/>
+          <p:cNvSpPr>
+            <a:spLocks noGrp="1"/>
+          </p:cNvSpPr>
+          <p:nvPr>
+            <p:ph type="body" idx="1"/>
+          </p:nvPr>
+        </p:nvSpPr>
+        <p:spPr/>
+        <p:txBody>
+          <a:bodyPr/>
+          <a:lstStyle/>
+          <a:p>
+            <a:endParaRPr kumimoji="1" lang="ja-JP" altLang="en-US" dirty="0"/>
+          </a:p>
+        </p:txBody>
+      </p:sp>
+      <p:sp>
+        <p:nvSpPr>
+          <p:cNvPr id="4" name="Slide Number Placeholder 3"/>
+          <p:cNvSpPr>
+            <a:spLocks noGrp="1"/>
+          </p:cNvSpPr>
+          <p:nvPr>
+            <p:ph type="sldNum" sz="quarter" idx="5"/>
+          </p:nvPr>
+        </p:nvSpPr>
+        <p:spPr/>
+        <p:txBody>
+          <a:bodyPr/>
+          <a:lstStyle/>
+          <a:p>
+            <a:fld id="{78CED39A-58DD-4C03-9276-40FE00EB9230}" type="slidenum">
+              <a:rPr kumimoji="1" lang="ja-JP" altLang="en-US" smtClean="0"/>
+              <a:t>25</a:t>
+            </a:fld>
+            <a:endParaRPr kumimoji="1" lang="ja-JP" altLang="en-US"/>
+          </a:p>
+        </p:txBody>
+      </p:sp>
+    </p:spTree>
+    <p:extLst>
+      <p:ext uri="{BB962C8B-B14F-4D97-AF65-F5344CB8AC3E}">
+        <p14:creationId xmlns:p14="http://schemas.microsoft.com/office/powerpoint/2010/main" val="1681969609"/>
+      </p:ext>
+    </p:extLst>
+  </p:cSld>
+  <p:clrMapOvr>
+    <a:masterClrMapping/>
+  </p:clrMapOvr>
+</p:notes>
+</file>
+
+<file path=ppt/notesSlides/notesSlide26.xml><?xml version="1.0" encoding="utf-8"?>
+<p:notes xmlns:a="http://schemas.openxmlformats.org/drawingml/2006/main" xmlns:r="http://schemas.openxmlformats.org/officeDocument/2006/relationships" xmlns:p="http://schemas.openxmlformats.org/presentationml/2006/main">
+  <p:cSld>
+    <p:spTree>
+      <p:nvGrpSpPr>
+        <p:cNvPr id="1" name="">
+          <a:extLst>
+            <a:ext uri="{FF2B5EF4-FFF2-40B4-BE49-F238E27FC236}">
+              <a16:creationId xmlns:a16="http://schemas.microsoft.com/office/drawing/2014/main" id="{621EAD3B-6357-598B-04B0-DF1DF2FA9B92}"/>
+            </a:ext>
+          </a:extLst>
+        </p:cNvPr>
+        <p:cNvGrpSpPr/>
+        <p:nvPr/>
+      </p:nvGrpSpPr>
+      <p:grpSpPr>
+        <a:xfrm>
+          <a:off x="0" y="0"/>
+          <a:ext cx="0" cy="0"/>
+          <a:chOff x="0" y="0"/>
+          <a:chExt cx="0" cy="0"/>
+        </a:xfrm>
+      </p:grpSpPr>
+      <p:sp>
+        <p:nvSpPr>
+          <p:cNvPr id="2" name="Slide Image Placeholder 1">
+            <a:extLst>
+              <a:ext uri="{FF2B5EF4-FFF2-40B4-BE49-F238E27FC236}">
+                <a16:creationId xmlns:a16="http://schemas.microsoft.com/office/drawing/2014/main" id="{B81A29F8-903C-9D0B-A1D6-1230ED5D640B}"/>
+              </a:ext>
+            </a:extLst>
+          </p:cNvPr>
+          <p:cNvSpPr>
+            <a:spLocks noGrp="1" noRot="1" noChangeAspect="1"/>
+          </p:cNvSpPr>
+          <p:nvPr>
+            <p:ph type="sldImg"/>
+          </p:nvPr>
+        </p:nvSpPr>
+        <p:spPr/>
+      </p:sp>
+      <p:sp>
+        <p:nvSpPr>
+          <p:cNvPr id="3" name="Notes Placeholder 2">
+            <a:extLst>
+              <a:ext uri="{FF2B5EF4-FFF2-40B4-BE49-F238E27FC236}">
+                <a16:creationId xmlns:a16="http://schemas.microsoft.com/office/drawing/2014/main" id="{396FD03E-AF77-BAC3-434A-31BA2AA4B3EE}"/>
+              </a:ext>
+            </a:extLst>
+          </p:cNvPr>
+          <p:cNvSpPr>
+            <a:spLocks noGrp="1"/>
+          </p:cNvSpPr>
+          <p:nvPr>
+            <p:ph type="body" idx="1"/>
+          </p:nvPr>
+        </p:nvSpPr>
+        <p:spPr/>
+        <p:txBody>
+          <a:bodyPr/>
+          <a:lstStyle/>
+          <a:p>
+            <a:pPr marL="171450" indent="-171450">
+              <a:buFont typeface="Arial" panose="020B0604020202020204" pitchFamily="34" charset="0"/>
+              <a:buChar char="•"/>
+            </a:pPr>
+            <a:endParaRPr lang="en-US" altLang="ja-JP" dirty="0"/>
+          </a:p>
+        </p:txBody>
+      </p:sp>
+      <p:sp>
+        <p:nvSpPr>
+          <p:cNvPr id="4" name="Slide Number Placeholder 3">
+            <a:extLst>
+              <a:ext uri="{FF2B5EF4-FFF2-40B4-BE49-F238E27FC236}">
+                <a16:creationId xmlns:a16="http://schemas.microsoft.com/office/drawing/2014/main" id="{44FDB23A-72A9-102E-749C-DC887F9EE408}"/>
+              </a:ext>
+            </a:extLst>
+          </p:cNvPr>
+          <p:cNvSpPr>
+            <a:spLocks noGrp="1"/>
+          </p:cNvSpPr>
+          <p:nvPr>
+            <p:ph type="sldNum" sz="quarter" idx="5"/>
+          </p:nvPr>
+        </p:nvSpPr>
+        <p:spPr/>
+        <p:txBody>
+          <a:bodyPr/>
+          <a:lstStyle/>
+          <a:p>
+            <a:fld id="{78CED39A-58DD-4C03-9276-40FE00EB9230}" type="slidenum">
+              <a:rPr kumimoji="1" lang="ja-JP" altLang="en-US" smtClean="0"/>
               <a:t>26</a:t>
+            </a:fld>
+            <a:endParaRPr kumimoji="1" lang="ja-JP" altLang="en-US"/>
+          </a:p>
+        </p:txBody>
+      </p:sp>
+    </p:spTree>
+    <p:extLst>
+      <p:ext uri="{BB962C8B-B14F-4D97-AF65-F5344CB8AC3E}">
+        <p14:creationId xmlns:p14="http://schemas.microsoft.com/office/powerpoint/2010/main" val="3253782704"/>
+      </p:ext>
+    </p:extLst>
+  </p:cSld>
+  <p:clrMapOvr>
+    <a:masterClrMapping/>
+  </p:clrMapOvr>
+</p:notes>
+</file>
+
+<file path=ppt/notesSlides/notesSlide27.xml><?xml version="1.0" encoding="utf-8"?>
+<p:notes xmlns:a="http://schemas.openxmlformats.org/drawingml/2006/main" xmlns:r="http://schemas.openxmlformats.org/officeDocument/2006/relationships" xmlns:p="http://schemas.openxmlformats.org/presentationml/2006/main">
+  <p:cSld>
+    <p:spTree>
+      <p:nvGrpSpPr>
+        <p:cNvPr id="1" name=""/>
+        <p:cNvGrpSpPr/>
+        <p:nvPr/>
+      </p:nvGrpSpPr>
+      <p:grpSpPr>
+        <a:xfrm>
+          <a:off x="0" y="0"/>
+          <a:ext cx="0" cy="0"/>
+          <a:chOff x="0" y="0"/>
+          <a:chExt cx="0" cy="0"/>
+        </a:xfrm>
+      </p:grpSpPr>
+      <p:sp>
+        <p:nvSpPr>
+          <p:cNvPr id="2" name="Slide Image Placeholder 1"/>
+          <p:cNvSpPr>
+            <a:spLocks noGrp="1" noRot="1" noChangeAspect="1"/>
+          </p:cNvSpPr>
+          <p:nvPr>
+            <p:ph type="sldImg"/>
+          </p:nvPr>
+        </p:nvSpPr>
+        <p:spPr/>
+      </p:sp>
+      <p:sp>
+        <p:nvSpPr>
+          <p:cNvPr id="3" name="Notes Placeholder 2"/>
+          <p:cNvSpPr>
+            <a:spLocks noGrp="1"/>
+          </p:cNvSpPr>
+          <p:nvPr>
+            <p:ph type="body" idx="1"/>
+          </p:nvPr>
+        </p:nvSpPr>
+        <p:spPr/>
+        <p:txBody>
+          <a:bodyPr/>
+          <a:lstStyle/>
+          <a:p>
+            <a:pPr marL="0" indent="0">
+              <a:buFont typeface="Arial" panose="020B0604020202020204" pitchFamily="34" charset="0"/>
+              <a:buNone/>
+            </a:pPr>
+            <a:endParaRPr kumimoji="1" lang="ja-JP" altLang="en-US" dirty="0"/>
+          </a:p>
+        </p:txBody>
+      </p:sp>
+      <p:sp>
+        <p:nvSpPr>
+          <p:cNvPr id="4" name="Slide Number Placeholder 3"/>
+          <p:cNvSpPr>
+            <a:spLocks noGrp="1"/>
+          </p:cNvSpPr>
+          <p:nvPr>
+            <p:ph type="sldNum" sz="quarter" idx="5"/>
+          </p:nvPr>
+        </p:nvSpPr>
+        <p:spPr/>
+        <p:txBody>
+          <a:bodyPr/>
+          <a:lstStyle/>
+          <a:p>
+            <a:fld id="{78CED39A-58DD-4C03-9276-40FE00EB9230}" type="slidenum">
+              <a:rPr kumimoji="1" lang="ja-JP" altLang="en-US" smtClean="0"/>
+              <a:t>27</a:t>
             </a:fld>
             <a:endParaRPr kumimoji="1" lang="ja-JP" altLang="en-US"/>
           </a:p>
@@ -6178,7 +5359,7 @@
 </p:notes>
 </file>
 
-<file path=ppt/notesSlides/notesSlide23.xml><?xml version="1.0" encoding="utf-8"?>
+<file path=ppt/notesSlides/notesSlide28.xml><?xml version="1.0" encoding="utf-8"?>
 <p:notes xmlns:a="http://schemas.openxmlformats.org/drawingml/2006/main" xmlns:r="http://schemas.openxmlformats.org/officeDocument/2006/relationships" xmlns:p="http://schemas.openxmlformats.org/presentationml/2006/main">
   <p:cSld>
     <p:spTree>
@@ -6240,26 +5421,10 @@
           <a:bodyPr/>
           <a:lstStyle/>
           <a:p>
-            <a:r>
-              <a:rPr lang="ja-JP" altLang="en-US" dirty="0"/>
-              <a:t>各関数の説明は手書きするのではなく、</a:t>
-            </a:r>
-            <a:r>
-              <a:rPr lang="en-US" altLang="ja-JP" dirty="0" err="1"/>
-              <a:t>roxygen</a:t>
-            </a:r>
-            <a:r>
-              <a:rPr lang="ja-JP" altLang="en-US" dirty="0"/>
-              <a:t>で記述した内容を自動的に</a:t>
-            </a:r>
-            <a:r>
-              <a:rPr lang="en-US" altLang="ja-JP" dirty="0"/>
-              <a:t>Markdown</a:t>
-            </a:r>
-            <a:r>
-              <a:rPr lang="ja-JP" altLang="en-US" dirty="0"/>
-              <a:t>にすることが多い</a:t>
-            </a:r>
+            <a:pPr marL="0" indent="0">
+              <a:buFont typeface="Arial" panose="020B0604020202020204" pitchFamily="34" charset="0"/>
+              <a:buNone/>
+            </a:pPr>
             <a:endParaRPr kumimoji="1" lang="ja-JP" altLang="en-US" dirty="0"/>
           </a:p>
         </p:txBody>
@@ -6287,7 +5452,7 @@
           <a:p>
             <a:fld id="{78CED39A-58DD-4C03-9276-40FE00EB9230}" type="slidenum">
               <a:rPr kumimoji="1" lang="ja-JP" altLang="en-US" smtClean="0"/>
-              <a:t>27</a:t>
+              <a:t>28</a:t>
             </a:fld>
             <a:endParaRPr kumimoji="1" lang="ja-JP" altLang="en-US"/>
           </a:p>
@@ -6306,7 +5471,7 @@
 </p:notes>
 </file>
 
-<file path=ppt/notesSlides/notesSlide24.xml><?xml version="1.0" encoding="utf-8"?>
+<file path=ppt/notesSlides/notesSlide29.xml><?xml version="1.0" encoding="utf-8"?>
 <p:notes xmlns:a="http://schemas.openxmlformats.org/drawingml/2006/main" xmlns:r="http://schemas.openxmlformats.org/officeDocument/2006/relationships" xmlns:p="http://schemas.openxmlformats.org/presentationml/2006/main">
   <p:cSld>
     <p:spTree>
@@ -6368,27 +5533,18 @@
           <a:bodyPr/>
           <a:lstStyle/>
           <a:p>
-            <a:r>
-              <a:rPr lang="ja-JP" altLang="en-US" dirty="0"/>
-              <a:t>各関数の説明は手書きするのではなく、</a:t>
-            </a:r>
-            <a:r>
-              <a:rPr lang="en-US" altLang="ja-JP" dirty="0" err="1"/>
-              <a:t>roxygen</a:t>
-            </a:r>
-            <a:r>
-              <a:rPr lang="ja-JP" altLang="en-US" dirty="0"/>
-              <a:t>で記述した内容を自動的に</a:t>
-            </a:r>
-            <a:r>
-              <a:rPr lang="en-US" altLang="ja-JP" dirty="0"/>
-              <a:t>Markdown</a:t>
-            </a:r>
-            <a:r>
-              <a:rPr lang="ja-JP" altLang="en-US" dirty="0"/>
-              <a:t>にすることが多い</a:t>
-            </a:r>
-            <a:endParaRPr kumimoji="1" lang="ja-JP" altLang="en-US" dirty="0"/>
+            <a:pPr marL="0" indent="0">
+              <a:buFont typeface="Arial" panose="020B0604020202020204" pitchFamily="34" charset="0"/>
+              <a:buNone/>
+            </a:pPr>
+            <a:endParaRPr kumimoji="1" lang="en-US" altLang="ja-JP" b="1" u="sng" dirty="0">
+              <a:solidFill>
+                <a:srgbClr val="FF0000"/>
+              </a:solidFill>
+              <a:highlight>
+                <a:srgbClr val="FFFF00"/>
+              </a:highlight>
+            </a:endParaRPr>
           </a:p>
         </p:txBody>
       </p:sp>
@@ -6415,7 +5571,7 @@
           <a:p>
             <a:fld id="{78CED39A-58DD-4C03-9276-40FE00EB9230}" type="slidenum">
               <a:rPr kumimoji="1" lang="ja-JP" altLang="en-US" smtClean="0"/>
-              <a:t>28</a:t>
+              <a:t>29</a:t>
             </a:fld>
             <a:endParaRPr kumimoji="1" lang="ja-JP" altLang="en-US"/>
           </a:p>
@@ -6425,549 +5581,6 @@
     <p:extLst>
       <p:ext uri="{BB962C8B-B14F-4D97-AF65-F5344CB8AC3E}">
         <p14:creationId xmlns:p14="http://schemas.microsoft.com/office/powerpoint/2010/main" val="1786628817"/>
-      </p:ext>
-    </p:extLst>
-  </p:cSld>
-  <p:clrMapOvr>
-    <a:masterClrMapping/>
-  </p:clrMapOvr>
-</p:notes>
-</file>
-
-<file path=ppt/notesSlides/notesSlide25.xml><?xml version="1.0" encoding="utf-8"?>
-<p:notes xmlns:a="http://schemas.openxmlformats.org/drawingml/2006/main" xmlns:r="http://schemas.openxmlformats.org/officeDocument/2006/relationships" xmlns:p="http://schemas.openxmlformats.org/presentationml/2006/main">
-  <p:cSld>
-    <p:spTree>
-      <p:nvGrpSpPr>
-        <p:cNvPr id="1" name="">
-          <a:extLst>
-            <a:ext uri="{FF2B5EF4-FFF2-40B4-BE49-F238E27FC236}">
-              <a16:creationId xmlns:a16="http://schemas.microsoft.com/office/drawing/2014/main" id="{6CBF68AD-2171-89F8-637E-6CDF570F96EC}"/>
-            </a:ext>
-          </a:extLst>
-        </p:cNvPr>
-        <p:cNvGrpSpPr/>
-        <p:nvPr/>
-      </p:nvGrpSpPr>
-      <p:grpSpPr>
-        <a:xfrm>
-          <a:off x="0" y="0"/>
-          <a:ext cx="0" cy="0"/>
-          <a:chOff x="0" y="0"/>
-          <a:chExt cx="0" cy="0"/>
-        </a:xfrm>
-      </p:grpSpPr>
-      <p:sp>
-        <p:nvSpPr>
-          <p:cNvPr id="2" name="Slide Image Placeholder 1">
-            <a:extLst>
-              <a:ext uri="{FF2B5EF4-FFF2-40B4-BE49-F238E27FC236}">
-                <a16:creationId xmlns:a16="http://schemas.microsoft.com/office/drawing/2014/main" id="{34AF2A00-3ADD-8CAF-2036-825F7DAA9D6C}"/>
-              </a:ext>
-            </a:extLst>
-          </p:cNvPr>
-          <p:cNvSpPr>
-            <a:spLocks noGrp="1" noRot="1" noChangeAspect="1"/>
-          </p:cNvSpPr>
-          <p:nvPr>
-            <p:ph type="sldImg"/>
-          </p:nvPr>
-        </p:nvSpPr>
-        <p:spPr/>
-      </p:sp>
-      <p:sp>
-        <p:nvSpPr>
-          <p:cNvPr id="3" name="Notes Placeholder 2">
-            <a:extLst>
-              <a:ext uri="{FF2B5EF4-FFF2-40B4-BE49-F238E27FC236}">
-                <a16:creationId xmlns:a16="http://schemas.microsoft.com/office/drawing/2014/main" id="{15FB7D0F-9644-6D0A-89A7-7FE58933A4E8}"/>
-              </a:ext>
-            </a:extLst>
-          </p:cNvPr>
-          <p:cNvSpPr>
-            <a:spLocks noGrp="1"/>
-          </p:cNvSpPr>
-          <p:nvPr>
-            <p:ph type="body" idx="1"/>
-          </p:nvPr>
-        </p:nvSpPr>
-        <p:spPr/>
-        <p:txBody>
-          <a:bodyPr/>
-          <a:lstStyle/>
-          <a:p>
-            <a:endParaRPr kumimoji="1" lang="ja-JP" altLang="en-US" dirty="0"/>
-          </a:p>
-        </p:txBody>
-      </p:sp>
-      <p:sp>
-        <p:nvSpPr>
-          <p:cNvPr id="4" name="Slide Number Placeholder 3">
-            <a:extLst>
-              <a:ext uri="{FF2B5EF4-FFF2-40B4-BE49-F238E27FC236}">
-                <a16:creationId xmlns:a16="http://schemas.microsoft.com/office/drawing/2014/main" id="{BE2FFB1A-4656-4E7B-0F6E-E13F8D4CD195}"/>
-              </a:ext>
-            </a:extLst>
-          </p:cNvPr>
-          <p:cNvSpPr>
-            <a:spLocks noGrp="1"/>
-          </p:cNvSpPr>
-          <p:nvPr>
-            <p:ph type="sldNum" sz="quarter" idx="5"/>
-          </p:nvPr>
-        </p:nvSpPr>
-        <p:spPr/>
-        <p:txBody>
-          <a:bodyPr/>
-          <a:lstStyle/>
-          <a:p>
-            <a:fld id="{78CED39A-58DD-4C03-9276-40FE00EB9230}" type="slidenum">
-              <a:rPr kumimoji="1" lang="ja-JP" altLang="en-US" smtClean="0"/>
-              <a:t>29</a:t>
-            </a:fld>
-            <a:endParaRPr kumimoji="1" lang="ja-JP" altLang="en-US"/>
-          </a:p>
-        </p:txBody>
-      </p:sp>
-    </p:spTree>
-    <p:extLst>
-      <p:ext uri="{BB962C8B-B14F-4D97-AF65-F5344CB8AC3E}">
-        <p14:creationId xmlns:p14="http://schemas.microsoft.com/office/powerpoint/2010/main" val="451401269"/>
-      </p:ext>
-    </p:extLst>
-  </p:cSld>
-  <p:clrMapOvr>
-    <a:masterClrMapping/>
-  </p:clrMapOvr>
-</p:notes>
-</file>
-
-<file path=ppt/notesSlides/notesSlide26.xml><?xml version="1.0" encoding="utf-8"?>
-<p:notes xmlns:a="http://schemas.openxmlformats.org/drawingml/2006/main" xmlns:r="http://schemas.openxmlformats.org/officeDocument/2006/relationships" xmlns:p="http://schemas.openxmlformats.org/presentationml/2006/main">
-  <p:cSld>
-    <p:spTree>
-      <p:nvGrpSpPr>
-        <p:cNvPr id="1" name="">
-          <a:extLst>
-            <a:ext uri="{FF2B5EF4-FFF2-40B4-BE49-F238E27FC236}">
-              <a16:creationId xmlns:a16="http://schemas.microsoft.com/office/drawing/2014/main" id="{3614B74F-F476-9EA8-23CC-48C02CF992F3}"/>
-            </a:ext>
-          </a:extLst>
-        </p:cNvPr>
-        <p:cNvGrpSpPr/>
-        <p:nvPr/>
-      </p:nvGrpSpPr>
-      <p:grpSpPr>
-        <a:xfrm>
-          <a:off x="0" y="0"/>
-          <a:ext cx="0" cy="0"/>
-          <a:chOff x="0" y="0"/>
-          <a:chExt cx="0" cy="0"/>
-        </a:xfrm>
-      </p:grpSpPr>
-      <p:sp>
-        <p:nvSpPr>
-          <p:cNvPr id="2" name="Slide Image Placeholder 1">
-            <a:extLst>
-              <a:ext uri="{FF2B5EF4-FFF2-40B4-BE49-F238E27FC236}">
-                <a16:creationId xmlns:a16="http://schemas.microsoft.com/office/drawing/2014/main" id="{0058DB6C-0D0A-BE72-CB3A-A7776F97FF6C}"/>
-              </a:ext>
-            </a:extLst>
-          </p:cNvPr>
-          <p:cNvSpPr>
-            <a:spLocks noGrp="1" noRot="1" noChangeAspect="1"/>
-          </p:cNvSpPr>
-          <p:nvPr>
-            <p:ph type="sldImg"/>
-          </p:nvPr>
-        </p:nvSpPr>
-        <p:spPr/>
-      </p:sp>
-      <p:sp>
-        <p:nvSpPr>
-          <p:cNvPr id="3" name="Notes Placeholder 2">
-            <a:extLst>
-              <a:ext uri="{FF2B5EF4-FFF2-40B4-BE49-F238E27FC236}">
-                <a16:creationId xmlns:a16="http://schemas.microsoft.com/office/drawing/2014/main" id="{0D5D031C-DE1E-DF3D-192D-83FD00ED2E5F}"/>
-              </a:ext>
-            </a:extLst>
-          </p:cNvPr>
-          <p:cNvSpPr>
-            <a:spLocks noGrp="1"/>
-          </p:cNvSpPr>
-          <p:nvPr>
-            <p:ph type="body" idx="1"/>
-          </p:nvPr>
-        </p:nvSpPr>
-        <p:spPr/>
-        <p:txBody>
-          <a:bodyPr/>
-          <a:lstStyle/>
-          <a:p>
-            <a:endParaRPr kumimoji="1" lang="ja-JP" altLang="en-US" dirty="0"/>
-          </a:p>
-        </p:txBody>
-      </p:sp>
-      <p:sp>
-        <p:nvSpPr>
-          <p:cNvPr id="4" name="Slide Number Placeholder 3">
-            <a:extLst>
-              <a:ext uri="{FF2B5EF4-FFF2-40B4-BE49-F238E27FC236}">
-                <a16:creationId xmlns:a16="http://schemas.microsoft.com/office/drawing/2014/main" id="{0CCB7E31-3ECF-48C3-10C1-A1375834210E}"/>
-              </a:ext>
-            </a:extLst>
-          </p:cNvPr>
-          <p:cNvSpPr>
-            <a:spLocks noGrp="1"/>
-          </p:cNvSpPr>
-          <p:nvPr>
-            <p:ph type="sldNum" sz="quarter" idx="5"/>
-          </p:nvPr>
-        </p:nvSpPr>
-        <p:spPr/>
-        <p:txBody>
-          <a:bodyPr/>
-          <a:lstStyle/>
-          <a:p>
-            <a:fld id="{78CED39A-58DD-4C03-9276-40FE00EB9230}" type="slidenum">
-              <a:rPr kumimoji="1" lang="ja-JP" altLang="en-US" smtClean="0"/>
-              <a:t>30</a:t>
-            </a:fld>
-            <a:endParaRPr kumimoji="1" lang="ja-JP" altLang="en-US"/>
-          </a:p>
-        </p:txBody>
-      </p:sp>
-    </p:spTree>
-    <p:extLst>
-      <p:ext uri="{BB962C8B-B14F-4D97-AF65-F5344CB8AC3E}">
-        <p14:creationId xmlns:p14="http://schemas.microsoft.com/office/powerpoint/2010/main" val="295111026"/>
-      </p:ext>
-    </p:extLst>
-  </p:cSld>
-  <p:clrMapOvr>
-    <a:masterClrMapping/>
-  </p:clrMapOvr>
-</p:notes>
-</file>
-
-<file path=ppt/notesSlides/notesSlide27.xml><?xml version="1.0" encoding="utf-8"?>
-<p:notes xmlns:a="http://schemas.openxmlformats.org/drawingml/2006/main" xmlns:r="http://schemas.openxmlformats.org/officeDocument/2006/relationships" xmlns:p="http://schemas.openxmlformats.org/presentationml/2006/main">
-  <p:cSld>
-    <p:spTree>
-      <p:nvGrpSpPr>
-        <p:cNvPr id="1" name="">
-          <a:extLst>
-            <a:ext uri="{FF2B5EF4-FFF2-40B4-BE49-F238E27FC236}">
-              <a16:creationId xmlns:a16="http://schemas.microsoft.com/office/drawing/2014/main" id="{C06809CC-7877-B493-F558-A59171DEB4A8}"/>
-            </a:ext>
-          </a:extLst>
-        </p:cNvPr>
-        <p:cNvGrpSpPr/>
-        <p:nvPr/>
-      </p:nvGrpSpPr>
-      <p:grpSpPr>
-        <a:xfrm>
-          <a:off x="0" y="0"/>
-          <a:ext cx="0" cy="0"/>
-          <a:chOff x="0" y="0"/>
-          <a:chExt cx="0" cy="0"/>
-        </a:xfrm>
-      </p:grpSpPr>
-      <p:sp>
-        <p:nvSpPr>
-          <p:cNvPr id="2" name="Slide Image Placeholder 1">
-            <a:extLst>
-              <a:ext uri="{FF2B5EF4-FFF2-40B4-BE49-F238E27FC236}">
-                <a16:creationId xmlns:a16="http://schemas.microsoft.com/office/drawing/2014/main" id="{547D9B21-F30C-F15F-3D9C-81D6693C5B08}"/>
-              </a:ext>
-            </a:extLst>
-          </p:cNvPr>
-          <p:cNvSpPr>
-            <a:spLocks noGrp="1" noRot="1" noChangeAspect="1"/>
-          </p:cNvSpPr>
-          <p:nvPr>
-            <p:ph type="sldImg"/>
-          </p:nvPr>
-        </p:nvSpPr>
-        <p:spPr/>
-      </p:sp>
-      <p:sp>
-        <p:nvSpPr>
-          <p:cNvPr id="3" name="Notes Placeholder 2">
-            <a:extLst>
-              <a:ext uri="{FF2B5EF4-FFF2-40B4-BE49-F238E27FC236}">
-                <a16:creationId xmlns:a16="http://schemas.microsoft.com/office/drawing/2014/main" id="{C9E42C3D-0A09-776E-111F-FA6F7080E9ED}"/>
-              </a:ext>
-            </a:extLst>
-          </p:cNvPr>
-          <p:cNvSpPr>
-            <a:spLocks noGrp="1"/>
-          </p:cNvSpPr>
-          <p:nvPr>
-            <p:ph type="body" idx="1"/>
-          </p:nvPr>
-        </p:nvSpPr>
-        <p:spPr/>
-        <p:txBody>
-          <a:bodyPr/>
-          <a:lstStyle/>
-          <a:p>
-            <a:endParaRPr kumimoji="1" lang="ja-JP" altLang="en-US" dirty="0"/>
-          </a:p>
-        </p:txBody>
-      </p:sp>
-      <p:sp>
-        <p:nvSpPr>
-          <p:cNvPr id="4" name="Slide Number Placeholder 3">
-            <a:extLst>
-              <a:ext uri="{FF2B5EF4-FFF2-40B4-BE49-F238E27FC236}">
-                <a16:creationId xmlns:a16="http://schemas.microsoft.com/office/drawing/2014/main" id="{93F67C93-A0D3-2767-B7E8-789644C6530A}"/>
-              </a:ext>
-            </a:extLst>
-          </p:cNvPr>
-          <p:cNvSpPr>
-            <a:spLocks noGrp="1"/>
-          </p:cNvSpPr>
-          <p:nvPr>
-            <p:ph type="sldNum" sz="quarter" idx="5"/>
-          </p:nvPr>
-        </p:nvSpPr>
-        <p:spPr/>
-        <p:txBody>
-          <a:bodyPr/>
-          <a:lstStyle/>
-          <a:p>
-            <a:fld id="{78CED39A-58DD-4C03-9276-40FE00EB9230}" type="slidenum">
-              <a:rPr kumimoji="1" lang="ja-JP" altLang="en-US" smtClean="0"/>
-              <a:t>31</a:t>
-            </a:fld>
-            <a:endParaRPr kumimoji="1" lang="ja-JP" altLang="en-US"/>
-          </a:p>
-        </p:txBody>
-      </p:sp>
-    </p:spTree>
-    <p:extLst>
-      <p:ext uri="{BB962C8B-B14F-4D97-AF65-F5344CB8AC3E}">
-        <p14:creationId xmlns:p14="http://schemas.microsoft.com/office/powerpoint/2010/main" val="2185820119"/>
-      </p:ext>
-    </p:extLst>
-  </p:cSld>
-  <p:clrMapOvr>
-    <a:masterClrMapping/>
-  </p:clrMapOvr>
-</p:notes>
-</file>
-
-<file path=ppt/notesSlides/notesSlide28.xml><?xml version="1.0" encoding="utf-8"?>
-<p:notes xmlns:a="http://schemas.openxmlformats.org/drawingml/2006/main" xmlns:r="http://schemas.openxmlformats.org/officeDocument/2006/relationships" xmlns:p="http://schemas.openxmlformats.org/presentationml/2006/main">
-  <p:cSld>
-    <p:spTree>
-      <p:nvGrpSpPr>
-        <p:cNvPr id="1" name="">
-          <a:extLst>
-            <a:ext uri="{FF2B5EF4-FFF2-40B4-BE49-F238E27FC236}">
-              <a16:creationId xmlns:a16="http://schemas.microsoft.com/office/drawing/2014/main" id="{A69FF2D0-0DE3-B788-020B-52035682D6CD}"/>
-            </a:ext>
-          </a:extLst>
-        </p:cNvPr>
-        <p:cNvGrpSpPr/>
-        <p:nvPr/>
-      </p:nvGrpSpPr>
-      <p:grpSpPr>
-        <a:xfrm>
-          <a:off x="0" y="0"/>
-          <a:ext cx="0" cy="0"/>
-          <a:chOff x="0" y="0"/>
-          <a:chExt cx="0" cy="0"/>
-        </a:xfrm>
-      </p:grpSpPr>
-      <p:sp>
-        <p:nvSpPr>
-          <p:cNvPr id="2" name="Slide Image Placeholder 1">
-            <a:extLst>
-              <a:ext uri="{FF2B5EF4-FFF2-40B4-BE49-F238E27FC236}">
-                <a16:creationId xmlns:a16="http://schemas.microsoft.com/office/drawing/2014/main" id="{39DAF1D5-115B-8C73-61B0-3CB5C1B7C9EF}"/>
-              </a:ext>
-            </a:extLst>
-          </p:cNvPr>
-          <p:cNvSpPr>
-            <a:spLocks noGrp="1" noRot="1" noChangeAspect="1"/>
-          </p:cNvSpPr>
-          <p:nvPr>
-            <p:ph type="sldImg"/>
-          </p:nvPr>
-        </p:nvSpPr>
-        <p:spPr/>
-      </p:sp>
-      <p:sp>
-        <p:nvSpPr>
-          <p:cNvPr id="3" name="Notes Placeholder 2">
-            <a:extLst>
-              <a:ext uri="{FF2B5EF4-FFF2-40B4-BE49-F238E27FC236}">
-                <a16:creationId xmlns:a16="http://schemas.microsoft.com/office/drawing/2014/main" id="{9D257E9E-6609-AD8E-8AEA-5E6988006F44}"/>
-              </a:ext>
-            </a:extLst>
-          </p:cNvPr>
-          <p:cNvSpPr>
-            <a:spLocks noGrp="1"/>
-          </p:cNvSpPr>
-          <p:nvPr>
-            <p:ph type="body" idx="1"/>
-          </p:nvPr>
-        </p:nvSpPr>
-        <p:spPr/>
-        <p:txBody>
-          <a:bodyPr/>
-          <a:lstStyle/>
-          <a:p>
-            <a:r>
-              <a:rPr kumimoji="1" lang="ja-JP" altLang="en-US" dirty="0"/>
-              <a:t>テストの実行結果はテスト自体の適切さを表しているわけではない。</a:t>
-            </a:r>
-          </a:p>
-        </p:txBody>
-      </p:sp>
-      <p:sp>
-        <p:nvSpPr>
-          <p:cNvPr id="4" name="Slide Number Placeholder 3">
-            <a:extLst>
-              <a:ext uri="{FF2B5EF4-FFF2-40B4-BE49-F238E27FC236}">
-                <a16:creationId xmlns:a16="http://schemas.microsoft.com/office/drawing/2014/main" id="{6B800E78-CC38-4569-575A-CD9FD6DB2F3D}"/>
-              </a:ext>
-            </a:extLst>
-          </p:cNvPr>
-          <p:cNvSpPr>
-            <a:spLocks noGrp="1"/>
-          </p:cNvSpPr>
-          <p:nvPr>
-            <p:ph type="sldNum" sz="quarter" idx="5"/>
-          </p:nvPr>
-        </p:nvSpPr>
-        <p:spPr/>
-        <p:txBody>
-          <a:bodyPr/>
-          <a:lstStyle/>
-          <a:p>
-            <a:fld id="{78CED39A-58DD-4C03-9276-40FE00EB9230}" type="slidenum">
-              <a:rPr kumimoji="1" lang="ja-JP" altLang="en-US" smtClean="0"/>
-              <a:t>32</a:t>
-            </a:fld>
-            <a:endParaRPr kumimoji="1" lang="ja-JP" altLang="en-US"/>
-          </a:p>
-        </p:txBody>
-      </p:sp>
-    </p:spTree>
-    <p:extLst>
-      <p:ext uri="{BB962C8B-B14F-4D97-AF65-F5344CB8AC3E}">
-        <p14:creationId xmlns:p14="http://schemas.microsoft.com/office/powerpoint/2010/main" val="1252080282"/>
-      </p:ext>
-    </p:extLst>
-  </p:cSld>
-  <p:clrMapOvr>
-    <a:masterClrMapping/>
-  </p:clrMapOvr>
-</p:notes>
-</file>
-
-<file path=ppt/notesSlides/notesSlide29.xml><?xml version="1.0" encoding="utf-8"?>
-<p:notes xmlns:a="http://schemas.openxmlformats.org/drawingml/2006/main" xmlns:r="http://schemas.openxmlformats.org/officeDocument/2006/relationships" xmlns:p="http://schemas.openxmlformats.org/presentationml/2006/main">
-  <p:cSld>
-    <p:spTree>
-      <p:nvGrpSpPr>
-        <p:cNvPr id="1" name="">
-          <a:extLst>
-            <a:ext uri="{FF2B5EF4-FFF2-40B4-BE49-F238E27FC236}">
-              <a16:creationId xmlns:a16="http://schemas.microsoft.com/office/drawing/2014/main" id="{D87B6273-D861-E211-78CE-F1244D0A44B0}"/>
-            </a:ext>
-          </a:extLst>
-        </p:cNvPr>
-        <p:cNvGrpSpPr/>
-        <p:nvPr/>
-      </p:nvGrpSpPr>
-      <p:grpSpPr>
-        <a:xfrm>
-          <a:off x="0" y="0"/>
-          <a:ext cx="0" cy="0"/>
-          <a:chOff x="0" y="0"/>
-          <a:chExt cx="0" cy="0"/>
-        </a:xfrm>
-      </p:grpSpPr>
-      <p:sp>
-        <p:nvSpPr>
-          <p:cNvPr id="2" name="Slide Image Placeholder 1">
-            <a:extLst>
-              <a:ext uri="{FF2B5EF4-FFF2-40B4-BE49-F238E27FC236}">
-                <a16:creationId xmlns:a16="http://schemas.microsoft.com/office/drawing/2014/main" id="{A1383FDB-6557-0B43-016B-BE5D11D85C8F}"/>
-              </a:ext>
-            </a:extLst>
-          </p:cNvPr>
-          <p:cNvSpPr>
-            <a:spLocks noGrp="1" noRot="1" noChangeAspect="1"/>
-          </p:cNvSpPr>
-          <p:nvPr>
-            <p:ph type="sldImg"/>
-          </p:nvPr>
-        </p:nvSpPr>
-        <p:spPr/>
-      </p:sp>
-      <p:sp>
-        <p:nvSpPr>
-          <p:cNvPr id="3" name="Notes Placeholder 2">
-            <a:extLst>
-              <a:ext uri="{FF2B5EF4-FFF2-40B4-BE49-F238E27FC236}">
-                <a16:creationId xmlns:a16="http://schemas.microsoft.com/office/drawing/2014/main" id="{E09C2241-EE5E-5272-EC67-5536DECBA7B8}"/>
-              </a:ext>
-            </a:extLst>
-          </p:cNvPr>
-          <p:cNvSpPr>
-            <a:spLocks noGrp="1"/>
-          </p:cNvSpPr>
-          <p:nvPr>
-            <p:ph type="body" idx="1"/>
-          </p:nvPr>
-        </p:nvSpPr>
-        <p:spPr/>
-        <p:txBody>
-          <a:bodyPr/>
-          <a:lstStyle/>
-          <a:p>
-            <a:endParaRPr kumimoji="1" lang="ja-JP" altLang="en-US" dirty="0"/>
-          </a:p>
-        </p:txBody>
-      </p:sp>
-      <p:sp>
-        <p:nvSpPr>
-          <p:cNvPr id="4" name="Slide Number Placeholder 3">
-            <a:extLst>
-              <a:ext uri="{FF2B5EF4-FFF2-40B4-BE49-F238E27FC236}">
-                <a16:creationId xmlns:a16="http://schemas.microsoft.com/office/drawing/2014/main" id="{D95FD745-AE2A-230B-CF87-69A542C81C1C}"/>
-              </a:ext>
-            </a:extLst>
-          </p:cNvPr>
-          <p:cNvSpPr>
-            <a:spLocks noGrp="1"/>
-          </p:cNvSpPr>
-          <p:nvPr>
-            <p:ph type="sldNum" sz="quarter" idx="5"/>
-          </p:nvPr>
-        </p:nvSpPr>
-        <p:spPr/>
-        <p:txBody>
-          <a:bodyPr/>
-          <a:lstStyle/>
-          <a:p>
-            <a:fld id="{78CED39A-58DD-4C03-9276-40FE00EB9230}" type="slidenum">
-              <a:rPr kumimoji="1" lang="ja-JP" altLang="en-US" smtClean="0"/>
-              <a:t>33</a:t>
-            </a:fld>
-            <a:endParaRPr kumimoji="1" lang="ja-JP" altLang="en-US"/>
-          </a:p>
-        </p:txBody>
-      </p:sp>
-    </p:spTree>
-    <p:extLst>
-      <p:ext uri="{BB962C8B-B14F-4D97-AF65-F5344CB8AC3E}">
-        <p14:creationId xmlns:p14="http://schemas.microsoft.com/office/powerpoint/2010/main" val="2240448470"/>
       </p:ext>
     </p:extLst>
   </p:cSld>
@@ -7021,7 +5634,10 @@
           <a:bodyPr/>
           <a:lstStyle/>
           <a:p>
-            <a:endParaRPr kumimoji="1" lang="ja-JP" altLang="en-US" dirty="0"/>
+            <a:r>
+              <a:rPr kumimoji="1" lang="ja-JP" altLang="en-US" dirty="0"/>
+              <a:t>はじめに穴埋めについて</a:t>
+            </a:r>
           </a:p>
         </p:txBody>
       </p:sp>
@@ -7062,6 +5678,558 @@
 </file>
 
 <file path=ppt/notesSlides/notesSlide30.xml><?xml version="1.0" encoding="utf-8"?>
+<p:notes xmlns:a="http://schemas.openxmlformats.org/drawingml/2006/main" xmlns:r="http://schemas.openxmlformats.org/officeDocument/2006/relationships" xmlns:p="http://schemas.openxmlformats.org/presentationml/2006/main">
+  <p:cSld>
+    <p:spTree>
+      <p:nvGrpSpPr>
+        <p:cNvPr id="1" name="">
+          <a:extLst>
+            <a:ext uri="{FF2B5EF4-FFF2-40B4-BE49-F238E27FC236}">
+              <a16:creationId xmlns:a16="http://schemas.microsoft.com/office/drawing/2014/main" id="{6CBF68AD-2171-89F8-637E-6CDF570F96EC}"/>
+            </a:ext>
+          </a:extLst>
+        </p:cNvPr>
+        <p:cNvGrpSpPr/>
+        <p:nvPr/>
+      </p:nvGrpSpPr>
+      <p:grpSpPr>
+        <a:xfrm>
+          <a:off x="0" y="0"/>
+          <a:ext cx="0" cy="0"/>
+          <a:chOff x="0" y="0"/>
+          <a:chExt cx="0" cy="0"/>
+        </a:xfrm>
+      </p:grpSpPr>
+      <p:sp>
+        <p:nvSpPr>
+          <p:cNvPr id="2" name="Slide Image Placeholder 1">
+            <a:extLst>
+              <a:ext uri="{FF2B5EF4-FFF2-40B4-BE49-F238E27FC236}">
+                <a16:creationId xmlns:a16="http://schemas.microsoft.com/office/drawing/2014/main" id="{34AF2A00-3ADD-8CAF-2036-825F7DAA9D6C}"/>
+              </a:ext>
+            </a:extLst>
+          </p:cNvPr>
+          <p:cNvSpPr>
+            <a:spLocks noGrp="1" noRot="1" noChangeAspect="1"/>
+          </p:cNvSpPr>
+          <p:nvPr>
+            <p:ph type="sldImg"/>
+          </p:nvPr>
+        </p:nvSpPr>
+        <p:spPr/>
+      </p:sp>
+      <p:sp>
+        <p:nvSpPr>
+          <p:cNvPr id="3" name="Notes Placeholder 2">
+            <a:extLst>
+              <a:ext uri="{FF2B5EF4-FFF2-40B4-BE49-F238E27FC236}">
+                <a16:creationId xmlns:a16="http://schemas.microsoft.com/office/drawing/2014/main" id="{15FB7D0F-9644-6D0A-89A7-7FE58933A4E8}"/>
+              </a:ext>
+            </a:extLst>
+          </p:cNvPr>
+          <p:cNvSpPr>
+            <a:spLocks noGrp="1"/>
+          </p:cNvSpPr>
+          <p:nvPr>
+            <p:ph type="body" idx="1"/>
+          </p:nvPr>
+        </p:nvSpPr>
+        <p:spPr/>
+        <p:txBody>
+          <a:bodyPr/>
+          <a:lstStyle/>
+          <a:p>
+            <a:pPr marL="0" indent="0">
+              <a:buFont typeface="Arial" panose="020B0604020202020204" pitchFamily="34" charset="0"/>
+              <a:buNone/>
+            </a:pPr>
+            <a:endParaRPr kumimoji="1" lang="ja-JP" altLang="en-US" dirty="0"/>
+          </a:p>
+        </p:txBody>
+      </p:sp>
+      <p:sp>
+        <p:nvSpPr>
+          <p:cNvPr id="4" name="Slide Number Placeholder 3">
+            <a:extLst>
+              <a:ext uri="{FF2B5EF4-FFF2-40B4-BE49-F238E27FC236}">
+                <a16:creationId xmlns:a16="http://schemas.microsoft.com/office/drawing/2014/main" id="{BE2FFB1A-4656-4E7B-0F6E-E13F8D4CD195}"/>
+              </a:ext>
+            </a:extLst>
+          </p:cNvPr>
+          <p:cNvSpPr>
+            <a:spLocks noGrp="1"/>
+          </p:cNvSpPr>
+          <p:nvPr>
+            <p:ph type="sldNum" sz="quarter" idx="5"/>
+          </p:nvPr>
+        </p:nvSpPr>
+        <p:spPr/>
+        <p:txBody>
+          <a:bodyPr/>
+          <a:lstStyle/>
+          <a:p>
+            <a:fld id="{78CED39A-58DD-4C03-9276-40FE00EB9230}" type="slidenum">
+              <a:rPr kumimoji="1" lang="ja-JP" altLang="en-US" smtClean="0"/>
+              <a:t>30</a:t>
+            </a:fld>
+            <a:endParaRPr kumimoji="1" lang="ja-JP" altLang="en-US"/>
+          </a:p>
+        </p:txBody>
+      </p:sp>
+    </p:spTree>
+    <p:extLst>
+      <p:ext uri="{BB962C8B-B14F-4D97-AF65-F5344CB8AC3E}">
+        <p14:creationId xmlns:p14="http://schemas.microsoft.com/office/powerpoint/2010/main" val="451401269"/>
+      </p:ext>
+    </p:extLst>
+  </p:cSld>
+  <p:clrMapOvr>
+    <a:masterClrMapping/>
+  </p:clrMapOvr>
+</p:notes>
+</file>
+
+<file path=ppt/notesSlides/notesSlide31.xml><?xml version="1.0" encoding="utf-8"?>
+<p:notes xmlns:a="http://schemas.openxmlformats.org/drawingml/2006/main" xmlns:r="http://schemas.openxmlformats.org/officeDocument/2006/relationships" xmlns:p="http://schemas.openxmlformats.org/presentationml/2006/main">
+  <p:cSld>
+    <p:spTree>
+      <p:nvGrpSpPr>
+        <p:cNvPr id="1" name="">
+          <a:extLst>
+            <a:ext uri="{FF2B5EF4-FFF2-40B4-BE49-F238E27FC236}">
+              <a16:creationId xmlns:a16="http://schemas.microsoft.com/office/drawing/2014/main" id="{3614B74F-F476-9EA8-23CC-48C02CF992F3}"/>
+            </a:ext>
+          </a:extLst>
+        </p:cNvPr>
+        <p:cNvGrpSpPr/>
+        <p:nvPr/>
+      </p:nvGrpSpPr>
+      <p:grpSpPr>
+        <a:xfrm>
+          <a:off x="0" y="0"/>
+          <a:ext cx="0" cy="0"/>
+          <a:chOff x="0" y="0"/>
+          <a:chExt cx="0" cy="0"/>
+        </a:xfrm>
+      </p:grpSpPr>
+      <p:sp>
+        <p:nvSpPr>
+          <p:cNvPr id="2" name="Slide Image Placeholder 1">
+            <a:extLst>
+              <a:ext uri="{FF2B5EF4-FFF2-40B4-BE49-F238E27FC236}">
+                <a16:creationId xmlns:a16="http://schemas.microsoft.com/office/drawing/2014/main" id="{0058DB6C-0D0A-BE72-CB3A-A7776F97FF6C}"/>
+              </a:ext>
+            </a:extLst>
+          </p:cNvPr>
+          <p:cNvSpPr>
+            <a:spLocks noGrp="1" noRot="1" noChangeAspect="1"/>
+          </p:cNvSpPr>
+          <p:nvPr>
+            <p:ph type="sldImg"/>
+          </p:nvPr>
+        </p:nvSpPr>
+        <p:spPr/>
+      </p:sp>
+      <p:sp>
+        <p:nvSpPr>
+          <p:cNvPr id="3" name="Notes Placeholder 2">
+            <a:extLst>
+              <a:ext uri="{FF2B5EF4-FFF2-40B4-BE49-F238E27FC236}">
+                <a16:creationId xmlns:a16="http://schemas.microsoft.com/office/drawing/2014/main" id="{0D5D031C-DE1E-DF3D-192D-83FD00ED2E5F}"/>
+              </a:ext>
+            </a:extLst>
+          </p:cNvPr>
+          <p:cNvSpPr>
+            <a:spLocks noGrp="1"/>
+          </p:cNvSpPr>
+          <p:nvPr>
+            <p:ph type="body" idx="1"/>
+          </p:nvPr>
+        </p:nvSpPr>
+        <p:spPr/>
+        <p:txBody>
+          <a:bodyPr/>
+          <a:lstStyle/>
+          <a:p>
+            <a:endParaRPr kumimoji="1" lang="ja-JP" altLang="en-US" dirty="0"/>
+          </a:p>
+        </p:txBody>
+      </p:sp>
+      <p:sp>
+        <p:nvSpPr>
+          <p:cNvPr id="4" name="Slide Number Placeholder 3">
+            <a:extLst>
+              <a:ext uri="{FF2B5EF4-FFF2-40B4-BE49-F238E27FC236}">
+                <a16:creationId xmlns:a16="http://schemas.microsoft.com/office/drawing/2014/main" id="{0CCB7E31-3ECF-48C3-10C1-A1375834210E}"/>
+              </a:ext>
+            </a:extLst>
+          </p:cNvPr>
+          <p:cNvSpPr>
+            <a:spLocks noGrp="1"/>
+          </p:cNvSpPr>
+          <p:nvPr>
+            <p:ph type="sldNum" sz="quarter" idx="5"/>
+          </p:nvPr>
+        </p:nvSpPr>
+        <p:spPr/>
+        <p:txBody>
+          <a:bodyPr/>
+          <a:lstStyle/>
+          <a:p>
+            <a:fld id="{78CED39A-58DD-4C03-9276-40FE00EB9230}" type="slidenum">
+              <a:rPr kumimoji="1" lang="ja-JP" altLang="en-US" smtClean="0"/>
+              <a:t>31</a:t>
+            </a:fld>
+            <a:endParaRPr kumimoji="1" lang="ja-JP" altLang="en-US"/>
+          </a:p>
+        </p:txBody>
+      </p:sp>
+    </p:spTree>
+    <p:extLst>
+      <p:ext uri="{BB962C8B-B14F-4D97-AF65-F5344CB8AC3E}">
+        <p14:creationId xmlns:p14="http://schemas.microsoft.com/office/powerpoint/2010/main" val="295111026"/>
+      </p:ext>
+    </p:extLst>
+  </p:cSld>
+  <p:clrMapOvr>
+    <a:masterClrMapping/>
+  </p:clrMapOvr>
+</p:notes>
+</file>
+
+<file path=ppt/notesSlides/notesSlide32.xml><?xml version="1.0" encoding="utf-8"?>
+<p:notes xmlns:a="http://schemas.openxmlformats.org/drawingml/2006/main" xmlns:r="http://schemas.openxmlformats.org/officeDocument/2006/relationships" xmlns:p="http://schemas.openxmlformats.org/presentationml/2006/main">
+  <p:cSld>
+    <p:spTree>
+      <p:nvGrpSpPr>
+        <p:cNvPr id="1" name="">
+          <a:extLst>
+            <a:ext uri="{FF2B5EF4-FFF2-40B4-BE49-F238E27FC236}">
+              <a16:creationId xmlns:a16="http://schemas.microsoft.com/office/drawing/2014/main" id="{C06809CC-7877-B493-F558-A59171DEB4A8}"/>
+            </a:ext>
+          </a:extLst>
+        </p:cNvPr>
+        <p:cNvGrpSpPr/>
+        <p:nvPr/>
+      </p:nvGrpSpPr>
+      <p:grpSpPr>
+        <a:xfrm>
+          <a:off x="0" y="0"/>
+          <a:ext cx="0" cy="0"/>
+          <a:chOff x="0" y="0"/>
+          <a:chExt cx="0" cy="0"/>
+        </a:xfrm>
+      </p:grpSpPr>
+      <p:sp>
+        <p:nvSpPr>
+          <p:cNvPr id="2" name="Slide Image Placeholder 1">
+            <a:extLst>
+              <a:ext uri="{FF2B5EF4-FFF2-40B4-BE49-F238E27FC236}">
+                <a16:creationId xmlns:a16="http://schemas.microsoft.com/office/drawing/2014/main" id="{547D9B21-F30C-F15F-3D9C-81D6693C5B08}"/>
+              </a:ext>
+            </a:extLst>
+          </p:cNvPr>
+          <p:cNvSpPr>
+            <a:spLocks noGrp="1" noRot="1" noChangeAspect="1"/>
+          </p:cNvSpPr>
+          <p:nvPr>
+            <p:ph type="sldImg"/>
+          </p:nvPr>
+        </p:nvSpPr>
+        <p:spPr/>
+      </p:sp>
+      <p:sp>
+        <p:nvSpPr>
+          <p:cNvPr id="3" name="Notes Placeholder 2">
+            <a:extLst>
+              <a:ext uri="{FF2B5EF4-FFF2-40B4-BE49-F238E27FC236}">
+                <a16:creationId xmlns:a16="http://schemas.microsoft.com/office/drawing/2014/main" id="{C9E42C3D-0A09-776E-111F-FA6F7080E9ED}"/>
+              </a:ext>
+            </a:extLst>
+          </p:cNvPr>
+          <p:cNvSpPr>
+            <a:spLocks noGrp="1"/>
+          </p:cNvSpPr>
+          <p:nvPr>
+            <p:ph type="body" idx="1"/>
+          </p:nvPr>
+        </p:nvSpPr>
+        <p:spPr/>
+        <p:txBody>
+          <a:bodyPr/>
+          <a:lstStyle/>
+          <a:p>
+            <a:pPr marL="0" indent="0">
+              <a:buFont typeface="Arial" panose="020B0604020202020204" pitchFamily="34" charset="0"/>
+              <a:buNone/>
+            </a:pPr>
+            <a:endParaRPr kumimoji="1" lang="ja-JP" altLang="en-US" dirty="0"/>
+          </a:p>
+        </p:txBody>
+      </p:sp>
+      <p:sp>
+        <p:nvSpPr>
+          <p:cNvPr id="4" name="Slide Number Placeholder 3">
+            <a:extLst>
+              <a:ext uri="{FF2B5EF4-FFF2-40B4-BE49-F238E27FC236}">
+                <a16:creationId xmlns:a16="http://schemas.microsoft.com/office/drawing/2014/main" id="{93F67C93-A0D3-2767-B7E8-789644C6530A}"/>
+              </a:ext>
+            </a:extLst>
+          </p:cNvPr>
+          <p:cNvSpPr>
+            <a:spLocks noGrp="1"/>
+          </p:cNvSpPr>
+          <p:nvPr>
+            <p:ph type="sldNum" sz="quarter" idx="5"/>
+          </p:nvPr>
+        </p:nvSpPr>
+        <p:spPr/>
+        <p:txBody>
+          <a:bodyPr/>
+          <a:lstStyle/>
+          <a:p>
+            <a:fld id="{78CED39A-58DD-4C03-9276-40FE00EB9230}" type="slidenum">
+              <a:rPr kumimoji="1" lang="ja-JP" altLang="en-US" smtClean="0"/>
+              <a:t>32</a:t>
+            </a:fld>
+            <a:endParaRPr kumimoji="1" lang="ja-JP" altLang="en-US"/>
+          </a:p>
+        </p:txBody>
+      </p:sp>
+    </p:spTree>
+    <p:extLst>
+      <p:ext uri="{BB962C8B-B14F-4D97-AF65-F5344CB8AC3E}">
+        <p14:creationId xmlns:p14="http://schemas.microsoft.com/office/powerpoint/2010/main" val="2185820119"/>
+      </p:ext>
+    </p:extLst>
+  </p:cSld>
+  <p:clrMapOvr>
+    <a:masterClrMapping/>
+  </p:clrMapOvr>
+</p:notes>
+</file>
+
+<file path=ppt/notesSlides/notesSlide33.xml><?xml version="1.0" encoding="utf-8"?>
+<p:notes xmlns:a="http://schemas.openxmlformats.org/drawingml/2006/main" xmlns:r="http://schemas.openxmlformats.org/officeDocument/2006/relationships" xmlns:p="http://schemas.openxmlformats.org/presentationml/2006/main">
+  <p:cSld>
+    <p:spTree>
+      <p:nvGrpSpPr>
+        <p:cNvPr id="1" name="">
+          <a:extLst>
+            <a:ext uri="{FF2B5EF4-FFF2-40B4-BE49-F238E27FC236}">
+              <a16:creationId xmlns:a16="http://schemas.microsoft.com/office/drawing/2014/main" id="{A69FF2D0-0DE3-B788-020B-52035682D6CD}"/>
+            </a:ext>
+          </a:extLst>
+        </p:cNvPr>
+        <p:cNvGrpSpPr/>
+        <p:nvPr/>
+      </p:nvGrpSpPr>
+      <p:grpSpPr>
+        <a:xfrm>
+          <a:off x="0" y="0"/>
+          <a:ext cx="0" cy="0"/>
+          <a:chOff x="0" y="0"/>
+          <a:chExt cx="0" cy="0"/>
+        </a:xfrm>
+      </p:grpSpPr>
+      <p:sp>
+        <p:nvSpPr>
+          <p:cNvPr id="2" name="Slide Image Placeholder 1">
+            <a:extLst>
+              <a:ext uri="{FF2B5EF4-FFF2-40B4-BE49-F238E27FC236}">
+                <a16:creationId xmlns:a16="http://schemas.microsoft.com/office/drawing/2014/main" id="{39DAF1D5-115B-8C73-61B0-3CB5C1B7C9EF}"/>
+              </a:ext>
+            </a:extLst>
+          </p:cNvPr>
+          <p:cNvSpPr>
+            <a:spLocks noGrp="1" noRot="1" noChangeAspect="1"/>
+          </p:cNvSpPr>
+          <p:nvPr>
+            <p:ph type="sldImg"/>
+          </p:nvPr>
+        </p:nvSpPr>
+        <p:spPr/>
+      </p:sp>
+      <p:sp>
+        <p:nvSpPr>
+          <p:cNvPr id="3" name="Notes Placeholder 2">
+            <a:extLst>
+              <a:ext uri="{FF2B5EF4-FFF2-40B4-BE49-F238E27FC236}">
+                <a16:creationId xmlns:a16="http://schemas.microsoft.com/office/drawing/2014/main" id="{9D257E9E-6609-AD8E-8AEA-5E6988006F44}"/>
+              </a:ext>
+            </a:extLst>
+          </p:cNvPr>
+          <p:cNvSpPr>
+            <a:spLocks noGrp="1"/>
+          </p:cNvSpPr>
+          <p:nvPr>
+            <p:ph type="body" idx="1"/>
+          </p:nvPr>
+        </p:nvSpPr>
+        <p:spPr/>
+        <p:txBody>
+          <a:bodyPr/>
+          <a:lstStyle/>
+          <a:p>
+            <a:pPr marL="0" indent="0">
+              <a:buFont typeface="Arial" panose="020B0604020202020204" pitchFamily="34" charset="0"/>
+              <a:buNone/>
+            </a:pPr>
+            <a:endParaRPr kumimoji="1" lang="ja-JP" altLang="en-US" dirty="0"/>
+          </a:p>
+        </p:txBody>
+      </p:sp>
+      <p:sp>
+        <p:nvSpPr>
+          <p:cNvPr id="4" name="Slide Number Placeholder 3">
+            <a:extLst>
+              <a:ext uri="{FF2B5EF4-FFF2-40B4-BE49-F238E27FC236}">
+                <a16:creationId xmlns:a16="http://schemas.microsoft.com/office/drawing/2014/main" id="{6B800E78-CC38-4569-575A-CD9FD6DB2F3D}"/>
+              </a:ext>
+            </a:extLst>
+          </p:cNvPr>
+          <p:cNvSpPr>
+            <a:spLocks noGrp="1"/>
+          </p:cNvSpPr>
+          <p:nvPr>
+            <p:ph type="sldNum" sz="quarter" idx="5"/>
+          </p:nvPr>
+        </p:nvSpPr>
+        <p:spPr/>
+        <p:txBody>
+          <a:bodyPr/>
+          <a:lstStyle/>
+          <a:p>
+            <a:fld id="{78CED39A-58DD-4C03-9276-40FE00EB9230}" type="slidenum">
+              <a:rPr kumimoji="1" lang="ja-JP" altLang="en-US" smtClean="0"/>
+              <a:t>33</a:t>
+            </a:fld>
+            <a:endParaRPr kumimoji="1" lang="ja-JP" altLang="en-US"/>
+          </a:p>
+        </p:txBody>
+      </p:sp>
+    </p:spTree>
+    <p:extLst>
+      <p:ext uri="{BB962C8B-B14F-4D97-AF65-F5344CB8AC3E}">
+        <p14:creationId xmlns:p14="http://schemas.microsoft.com/office/powerpoint/2010/main" val="1252080282"/>
+      </p:ext>
+    </p:extLst>
+  </p:cSld>
+  <p:clrMapOvr>
+    <a:masterClrMapping/>
+  </p:clrMapOvr>
+</p:notes>
+</file>
+
+<file path=ppt/notesSlides/notesSlide34.xml><?xml version="1.0" encoding="utf-8"?>
+<p:notes xmlns:a="http://schemas.openxmlformats.org/drawingml/2006/main" xmlns:r="http://schemas.openxmlformats.org/officeDocument/2006/relationships" xmlns:p="http://schemas.openxmlformats.org/presentationml/2006/main">
+  <p:cSld>
+    <p:spTree>
+      <p:nvGrpSpPr>
+        <p:cNvPr id="1" name="">
+          <a:extLst>
+            <a:ext uri="{FF2B5EF4-FFF2-40B4-BE49-F238E27FC236}">
+              <a16:creationId xmlns:a16="http://schemas.microsoft.com/office/drawing/2014/main" id="{D87B6273-D861-E211-78CE-F1244D0A44B0}"/>
+            </a:ext>
+          </a:extLst>
+        </p:cNvPr>
+        <p:cNvGrpSpPr/>
+        <p:nvPr/>
+      </p:nvGrpSpPr>
+      <p:grpSpPr>
+        <a:xfrm>
+          <a:off x="0" y="0"/>
+          <a:ext cx="0" cy="0"/>
+          <a:chOff x="0" y="0"/>
+          <a:chExt cx="0" cy="0"/>
+        </a:xfrm>
+      </p:grpSpPr>
+      <p:sp>
+        <p:nvSpPr>
+          <p:cNvPr id="2" name="Slide Image Placeholder 1">
+            <a:extLst>
+              <a:ext uri="{FF2B5EF4-FFF2-40B4-BE49-F238E27FC236}">
+                <a16:creationId xmlns:a16="http://schemas.microsoft.com/office/drawing/2014/main" id="{A1383FDB-6557-0B43-016B-BE5D11D85C8F}"/>
+              </a:ext>
+            </a:extLst>
+          </p:cNvPr>
+          <p:cNvSpPr>
+            <a:spLocks noGrp="1" noRot="1" noChangeAspect="1"/>
+          </p:cNvSpPr>
+          <p:nvPr>
+            <p:ph type="sldImg"/>
+          </p:nvPr>
+        </p:nvSpPr>
+        <p:spPr/>
+      </p:sp>
+      <p:sp>
+        <p:nvSpPr>
+          <p:cNvPr id="3" name="Notes Placeholder 2">
+            <a:extLst>
+              <a:ext uri="{FF2B5EF4-FFF2-40B4-BE49-F238E27FC236}">
+                <a16:creationId xmlns:a16="http://schemas.microsoft.com/office/drawing/2014/main" id="{E09C2241-EE5E-5272-EC67-5536DECBA7B8}"/>
+              </a:ext>
+            </a:extLst>
+          </p:cNvPr>
+          <p:cNvSpPr>
+            <a:spLocks noGrp="1"/>
+          </p:cNvSpPr>
+          <p:nvPr>
+            <p:ph type="body" idx="1"/>
+          </p:nvPr>
+        </p:nvSpPr>
+        <p:spPr/>
+        <p:txBody>
+          <a:bodyPr/>
+          <a:lstStyle/>
+          <a:p>
+            <a:endParaRPr kumimoji="1" lang="ja-JP" altLang="en-US" dirty="0"/>
+          </a:p>
+        </p:txBody>
+      </p:sp>
+      <p:sp>
+        <p:nvSpPr>
+          <p:cNvPr id="4" name="Slide Number Placeholder 3">
+            <a:extLst>
+              <a:ext uri="{FF2B5EF4-FFF2-40B4-BE49-F238E27FC236}">
+                <a16:creationId xmlns:a16="http://schemas.microsoft.com/office/drawing/2014/main" id="{D95FD745-AE2A-230B-CF87-69A542C81C1C}"/>
+              </a:ext>
+            </a:extLst>
+          </p:cNvPr>
+          <p:cNvSpPr>
+            <a:spLocks noGrp="1"/>
+          </p:cNvSpPr>
+          <p:nvPr>
+            <p:ph type="sldNum" sz="quarter" idx="5"/>
+          </p:nvPr>
+        </p:nvSpPr>
+        <p:spPr/>
+        <p:txBody>
+          <a:bodyPr/>
+          <a:lstStyle/>
+          <a:p>
+            <a:fld id="{78CED39A-58DD-4C03-9276-40FE00EB9230}" type="slidenum">
+              <a:rPr kumimoji="1" lang="ja-JP" altLang="en-US" smtClean="0"/>
+              <a:t>34</a:t>
+            </a:fld>
+            <a:endParaRPr kumimoji="1" lang="ja-JP" altLang="en-US"/>
+          </a:p>
+        </p:txBody>
+      </p:sp>
+    </p:spTree>
+    <p:extLst>
+      <p:ext uri="{BB962C8B-B14F-4D97-AF65-F5344CB8AC3E}">
+        <p14:creationId xmlns:p14="http://schemas.microsoft.com/office/powerpoint/2010/main" val="2240448470"/>
+      </p:ext>
+    </p:extLst>
+  </p:cSld>
+  <p:clrMapOvr>
+    <a:masterClrMapping/>
+  </p:clrMapOvr>
+</p:notes>
+</file>
+
+<file path=ppt/notesSlides/notesSlide35.xml><?xml version="1.0" encoding="utf-8"?>
 <p:notes xmlns:a="http://schemas.openxmlformats.org/drawingml/2006/main" xmlns:r="http://schemas.openxmlformats.org/officeDocument/2006/relationships" xmlns:p="http://schemas.openxmlformats.org/presentationml/2006/main">
   <p:cSld>
     <p:spTree>
@@ -7105,88 +6273,11 @@
           <a:bodyPr/>
           <a:lstStyle/>
           <a:p>
-            <a:r>
-              <a:rPr kumimoji="1" lang="ja-JP" altLang="en-US" dirty="0"/>
-              <a:t>参考になりますが、今ご紹介した</a:t>
-            </a:r>
-            <a:r>
-              <a:rPr kumimoji="1" lang="en-US" altLang="ja-JP" dirty="0"/>
-              <a:t>2</a:t>
-            </a:r>
-            <a:r>
-              <a:rPr kumimoji="1" lang="ja-JP" altLang="en-US" dirty="0"/>
-              <a:t>つの関数は</a:t>
-            </a:r>
-            <a:r>
-              <a:rPr kumimoji="1" lang="en-US" altLang="ja-JP" dirty="0"/>
-              <a:t>cards package</a:t>
-            </a:r>
-            <a:r>
-              <a:rPr kumimoji="1" lang="ja-JP" altLang="en-US" dirty="0"/>
-              <a:t>の関数を使って作成されております。</a:t>
-            </a:r>
-            <a:endParaRPr kumimoji="1" lang="en-US" altLang="ja-JP" dirty="0"/>
-          </a:p>
-          <a:p>
-            <a:r>
-              <a:rPr kumimoji="1" lang="en-US" altLang="ja-JP" dirty="0"/>
-              <a:t>Cards</a:t>
-            </a:r>
-            <a:r>
-              <a:rPr kumimoji="1" lang="ja-JP" altLang="en-US" dirty="0"/>
-              <a:t>は</a:t>
-            </a:r>
-            <a:r>
-              <a:rPr kumimoji="1" lang="en-US" altLang="ja-JP" dirty="0" err="1"/>
-              <a:t>Pharmaverse</a:t>
-            </a:r>
-            <a:r>
-              <a:rPr kumimoji="1" lang="ja-JP" altLang="en-US" dirty="0"/>
-              <a:t>の一部でして、非常に簡単に</a:t>
-            </a:r>
-            <a:r>
-              <a:rPr kumimoji="1" lang="en-US" altLang="ja-JP" dirty="0"/>
-              <a:t>ARD</a:t>
-            </a:r>
-            <a:r>
-              <a:rPr kumimoji="1" lang="ja-JP" altLang="en-US" dirty="0"/>
-              <a:t>を作成できる</a:t>
-            </a:r>
-            <a:r>
-              <a:rPr kumimoji="1" lang="en-US" altLang="ja-JP" dirty="0"/>
-              <a:t>Package</a:t>
-            </a:r>
-            <a:r>
-              <a:rPr kumimoji="1" lang="ja-JP" altLang="en-US" dirty="0"/>
-              <a:t>になっています。割と直観で操作できるので、</a:t>
-            </a:r>
-            <a:br>
-              <a:rPr kumimoji="1" lang="en-US" altLang="ja-JP" dirty="0"/>
-            </a:br>
-            <a:r>
-              <a:rPr kumimoji="1" lang="en-US" altLang="ja-JP" dirty="0"/>
-              <a:t>ARD</a:t>
-            </a:r>
-            <a:r>
-              <a:rPr kumimoji="1" lang="ja-JP" altLang="en-US" dirty="0"/>
-              <a:t>のことを全く知らないという方も、まずは</a:t>
-            </a:r>
-            <a:r>
-              <a:rPr kumimoji="1" lang="en-US" altLang="ja-JP" dirty="0"/>
-              <a:t>{cards}</a:t>
-            </a:r>
-            <a:r>
-              <a:rPr kumimoji="1" lang="ja-JP" altLang="en-US" dirty="0"/>
-              <a:t>を用いて実際に</a:t>
-            </a:r>
-            <a:r>
-              <a:rPr kumimoji="1" lang="en-US" altLang="ja-JP" dirty="0"/>
-              <a:t>ARD</a:t>
-            </a:r>
-            <a:r>
-              <a:rPr kumimoji="1" lang="ja-JP" altLang="en-US" dirty="0"/>
-              <a:t>を作成してみるとイメージがわくのではないかと思います。</a:t>
-            </a:r>
+            <a:pPr marL="0" indent="0">
+              <a:buFont typeface="Arial" panose="020B0604020202020204" pitchFamily="34" charset="0"/>
+              <a:buNone/>
+            </a:pPr>
+            <a:endParaRPr kumimoji="1" lang="ja-JP" altLang="en-US" dirty="0"/>
           </a:p>
         </p:txBody>
       </p:sp>
@@ -7207,7 +6298,7 @@
           <a:p>
             <a:fld id="{78CED39A-58DD-4C03-9276-40FE00EB9230}" type="slidenum">
               <a:rPr kumimoji="1" lang="ja-JP" altLang="en-US" smtClean="0"/>
-              <a:t>36</a:t>
+              <a:t>37</a:t>
             </a:fld>
             <a:endParaRPr kumimoji="1" lang="ja-JP" altLang="en-US"/>
           </a:p>
@@ -7216,7 +6307,7 @@
     </p:spTree>
     <p:extLst>
       <p:ext uri="{BB962C8B-B14F-4D97-AF65-F5344CB8AC3E}">
-        <p14:creationId xmlns:p14="http://schemas.microsoft.com/office/powerpoint/2010/main" val="3806102577"/>
+        <p14:creationId xmlns:p14="http://schemas.microsoft.com/office/powerpoint/2010/main" val="2035359811"/>
       </p:ext>
     </p:extLst>
   </p:cSld>
@@ -7226,7 +6317,7 @@
 </p:notes>
 </file>
 
-<file path=ppt/notesSlides/notesSlide31.xml><?xml version="1.0" encoding="utf-8"?>
+<file path=ppt/notesSlides/notesSlide36.xml><?xml version="1.0" encoding="utf-8"?>
 <p:notes xmlns:a="http://schemas.openxmlformats.org/drawingml/2006/main" xmlns:r="http://schemas.openxmlformats.org/officeDocument/2006/relationships" xmlns:p="http://schemas.openxmlformats.org/presentationml/2006/main">
   <p:cSld>
     <p:spTree>
@@ -7270,525 +6361,6 @@
           <a:bodyPr/>
           <a:lstStyle/>
           <a:p>
-            <a:pPr marL="171450" indent="-171450">
-              <a:buFont typeface="Arial" panose="020B0604020202020204" pitchFamily="34" charset="0"/>
-              <a:buChar char="•"/>
-            </a:pPr>
-            <a:r>
-              <a:rPr kumimoji="1" lang="ja-JP" altLang="en-US" dirty="0"/>
-              <a:t>参考情報</a:t>
-            </a:r>
-            <a:endParaRPr kumimoji="1" lang="en-US" altLang="ja-JP" dirty="0"/>
-          </a:p>
-          <a:p>
-            <a:pPr marL="628650" lvl="1" indent="-171450">
-              <a:buFont typeface="Arial" panose="020B0604020202020204" pitchFamily="34" charset="0"/>
-              <a:buChar char="•"/>
-            </a:pPr>
-            <a:r>
-              <a:rPr kumimoji="1" lang="ja-JP" altLang="en-US" dirty="0"/>
-              <a:t>参考として、穴埋め問題の種類をこちらに掲載しております。</a:t>
-            </a:r>
-            <a:endParaRPr kumimoji="1" lang="en-US" altLang="ja-JP" dirty="0"/>
-          </a:p>
-          <a:p>
-            <a:pPr marL="628650" lvl="1" indent="-171450">
-              <a:buFont typeface="Arial" panose="020B0604020202020204" pitchFamily="34" charset="0"/>
-              <a:buChar char="•"/>
-            </a:pPr>
-            <a:r>
-              <a:rPr kumimoji="1" lang="en-US" altLang="ja-JP" dirty="0"/>
-              <a:t>Subgroup</a:t>
-            </a:r>
-            <a:r>
-              <a:rPr kumimoji="1" lang="ja-JP" altLang="en-US" dirty="0"/>
-              <a:t>の方法や</a:t>
-            </a:r>
-            <a:r>
-              <a:rPr kumimoji="1" lang="en-US" altLang="ja-JP" dirty="0"/>
-              <a:t>AE</a:t>
-            </a:r>
-            <a:r>
-              <a:rPr kumimoji="1" lang="ja-JP" altLang="en-US" dirty="0"/>
-              <a:t>の</a:t>
-            </a:r>
-            <a:r>
-              <a:rPr kumimoji="1" lang="en-US" altLang="ja-JP" dirty="0"/>
-              <a:t>Type</a:t>
-            </a:r>
-            <a:r>
-              <a:rPr kumimoji="1" lang="ja-JP" altLang="en-US" dirty="0"/>
-              <a:t>に幅があるということがわかるかと思います。</a:t>
-            </a:r>
-          </a:p>
-        </p:txBody>
-      </p:sp>
-      <p:sp>
-        <p:nvSpPr>
-          <p:cNvPr id="4" name="Slide Number Placeholder 3"/>
-          <p:cNvSpPr>
-            <a:spLocks noGrp="1"/>
-          </p:cNvSpPr>
-          <p:nvPr>
-            <p:ph type="sldNum" sz="quarter" idx="5"/>
-          </p:nvPr>
-        </p:nvSpPr>
-        <p:spPr/>
-        <p:txBody>
-          <a:bodyPr/>
-          <a:lstStyle/>
-          <a:p>
-            <a:fld id="{78CED39A-58DD-4C03-9276-40FE00EB9230}" type="slidenum">
-              <a:rPr kumimoji="1" lang="ja-JP" altLang="en-US" smtClean="0"/>
-              <a:t>37</a:t>
-            </a:fld>
-            <a:endParaRPr kumimoji="1" lang="ja-JP" altLang="en-US"/>
-          </a:p>
-        </p:txBody>
-      </p:sp>
-    </p:spTree>
-    <p:extLst>
-      <p:ext uri="{BB962C8B-B14F-4D97-AF65-F5344CB8AC3E}">
-        <p14:creationId xmlns:p14="http://schemas.microsoft.com/office/powerpoint/2010/main" val="2035359811"/>
-      </p:ext>
-    </p:extLst>
-  </p:cSld>
-  <p:clrMapOvr>
-    <a:masterClrMapping/>
-  </p:clrMapOvr>
-</p:notes>
-</file>
-
-<file path=ppt/notesSlides/notesSlide32.xml><?xml version="1.0" encoding="utf-8"?>
-<p:notes xmlns:a="http://schemas.openxmlformats.org/drawingml/2006/main" xmlns:r="http://schemas.openxmlformats.org/officeDocument/2006/relationships" xmlns:p="http://schemas.openxmlformats.org/presentationml/2006/main">
-  <p:cSld>
-    <p:spTree>
-      <p:nvGrpSpPr>
-        <p:cNvPr id="1" name=""/>
-        <p:cNvGrpSpPr/>
-        <p:nvPr/>
-      </p:nvGrpSpPr>
-      <p:grpSpPr>
-        <a:xfrm>
-          <a:off x="0" y="0"/>
-          <a:ext cx="0" cy="0"/>
-          <a:chOff x="0" y="0"/>
-          <a:chExt cx="0" cy="0"/>
-        </a:xfrm>
-      </p:grpSpPr>
-      <p:sp>
-        <p:nvSpPr>
-          <p:cNvPr id="2" name="Slide Image Placeholder 1"/>
-          <p:cNvSpPr>
-            <a:spLocks noGrp="1" noRot="1" noChangeAspect="1"/>
-          </p:cNvSpPr>
-          <p:nvPr>
-            <p:ph type="sldImg"/>
-          </p:nvPr>
-        </p:nvSpPr>
-        <p:spPr/>
-      </p:sp>
-      <p:sp>
-        <p:nvSpPr>
-          <p:cNvPr id="3" name="Notes Placeholder 2"/>
-          <p:cNvSpPr>
-            <a:spLocks noGrp="1"/>
-          </p:cNvSpPr>
-          <p:nvPr>
-            <p:ph type="body" idx="1"/>
-          </p:nvPr>
-        </p:nvSpPr>
-        <p:spPr/>
-        <p:txBody>
-          <a:bodyPr/>
-          <a:lstStyle/>
-          <a:p>
-            <a:r>
-              <a:rPr lang="ja-JP" altLang="en-US" dirty="0">
-                <a:latin typeface="Calibri"/>
-                <a:ea typeface="Calibri"/>
-                <a:cs typeface="Calibri"/>
-              </a:rPr>
-              <a:t>各</a:t>
-            </a:r>
-            <a:r>
-              <a:rPr lang="en-US" altLang="ja-JP" dirty="0">
-                <a:latin typeface="Calibri"/>
-                <a:ea typeface="Calibri"/>
-                <a:cs typeface="Calibri"/>
-              </a:rPr>
-              <a:t>Function</a:t>
-            </a:r>
-            <a:r>
-              <a:rPr lang="ja-JP" altLang="en-US" dirty="0">
-                <a:latin typeface="Calibri"/>
-                <a:ea typeface="Calibri"/>
-                <a:cs typeface="Calibri"/>
-              </a:rPr>
-              <a:t>を説明する前に、</a:t>
-            </a:r>
-            <a:r>
-              <a:rPr lang="en-US" altLang="ja-JP" dirty="0">
-                <a:latin typeface="Calibri"/>
-                <a:ea typeface="Calibri"/>
-                <a:cs typeface="Calibri"/>
-              </a:rPr>
-              <a:t>Function</a:t>
-            </a:r>
-            <a:r>
-              <a:rPr lang="ja-JP" altLang="en-US" dirty="0">
-                <a:latin typeface="Calibri"/>
-                <a:ea typeface="Calibri"/>
-                <a:cs typeface="Calibri"/>
-              </a:rPr>
-              <a:t>のスコープについて少し説明します。</a:t>
-            </a:r>
-            <a:br>
-              <a:rPr lang="en-US" altLang="ja-JP" dirty="0">
-                <a:latin typeface="Calibri"/>
-                <a:ea typeface="Calibri"/>
-                <a:cs typeface="Calibri"/>
-              </a:rPr>
-            </a:br>
-            <a:r>
-              <a:rPr lang="ja-JP" altLang="en-US" dirty="0">
-                <a:latin typeface="Calibri"/>
-                <a:ea typeface="Calibri"/>
-                <a:cs typeface="Calibri"/>
-              </a:rPr>
-              <a:t>こちらが</a:t>
-            </a:r>
-            <a:r>
-              <a:rPr lang="en-US" altLang="ja-JP" dirty="0">
-                <a:latin typeface="Calibri"/>
-                <a:ea typeface="Calibri"/>
-                <a:cs typeface="Calibri"/>
-              </a:rPr>
-              <a:t>PMDA</a:t>
-            </a:r>
-            <a:r>
-              <a:rPr lang="ja-JP" altLang="en-US" dirty="0">
-                <a:latin typeface="Calibri"/>
-                <a:ea typeface="Calibri"/>
-                <a:cs typeface="Calibri"/>
-              </a:rPr>
-              <a:t>の照会事項回答用の</a:t>
-            </a:r>
-            <a:r>
-              <a:rPr lang="en-US" altLang="ja-JP" dirty="0">
-                <a:latin typeface="Calibri"/>
-                <a:ea typeface="Calibri"/>
-                <a:cs typeface="Calibri"/>
-              </a:rPr>
-              <a:t>ARD</a:t>
-            </a:r>
-            <a:r>
-              <a:rPr lang="ja-JP" altLang="en-US" dirty="0">
-                <a:latin typeface="Calibri"/>
-                <a:ea typeface="Calibri"/>
-                <a:cs typeface="Calibri"/>
-              </a:rPr>
-              <a:t>の構造と、そこから作成された</a:t>
-            </a:r>
-            <a:r>
-              <a:rPr lang="en-US" altLang="ja-JP" dirty="0">
-                <a:latin typeface="Calibri"/>
-                <a:ea typeface="Calibri"/>
-                <a:cs typeface="Calibri"/>
-              </a:rPr>
-              <a:t>Table</a:t>
-            </a:r>
-            <a:r>
-              <a:rPr lang="ja-JP" altLang="en-US" dirty="0">
-                <a:latin typeface="Calibri"/>
-                <a:ea typeface="Calibri"/>
-                <a:cs typeface="Calibri"/>
-              </a:rPr>
-              <a:t>を表すスライドです。</a:t>
-            </a:r>
-            <a:endParaRPr lang="en-US" altLang="ja-JP" dirty="0">
-              <a:latin typeface="Calibri"/>
-              <a:ea typeface="Calibri"/>
-              <a:cs typeface="Calibri"/>
-            </a:endParaRPr>
-          </a:p>
-          <a:p>
-            <a:r>
-              <a:rPr lang="ja-JP" altLang="en-US" dirty="0">
-                <a:latin typeface="Calibri"/>
-                <a:ea typeface="Calibri"/>
-                <a:cs typeface="Calibri"/>
-              </a:rPr>
-              <a:t>現状この</a:t>
-            </a:r>
-            <a:r>
-              <a:rPr lang="en-US" altLang="ja-JP" dirty="0">
-                <a:latin typeface="Calibri"/>
-                <a:ea typeface="Calibri"/>
-                <a:cs typeface="Calibri"/>
-              </a:rPr>
-              <a:t>Package</a:t>
-            </a:r>
-            <a:r>
-              <a:rPr lang="ja-JP" altLang="en-US" dirty="0">
-                <a:latin typeface="Calibri"/>
-                <a:ea typeface="Calibri"/>
-                <a:cs typeface="Calibri"/>
-              </a:rPr>
-              <a:t>ではこの</a:t>
-            </a:r>
-            <a:r>
-              <a:rPr lang="en-US" altLang="ja-JP" dirty="0">
-                <a:latin typeface="Calibri"/>
-                <a:ea typeface="Calibri"/>
-                <a:cs typeface="Calibri"/>
-              </a:rPr>
-              <a:t>ARD</a:t>
-            </a:r>
-            <a:r>
-              <a:rPr lang="ja-JP" altLang="en-US" dirty="0">
-                <a:latin typeface="Calibri"/>
-                <a:ea typeface="Calibri"/>
-                <a:cs typeface="Calibri"/>
-              </a:rPr>
-              <a:t>を作成するというところまでを</a:t>
-            </a:r>
-            <a:r>
-              <a:rPr lang="en-US" altLang="ja-JP" dirty="0">
-                <a:latin typeface="Calibri"/>
-                <a:ea typeface="Calibri"/>
-                <a:cs typeface="Calibri"/>
-              </a:rPr>
-              <a:t>Package</a:t>
-            </a:r>
-            <a:r>
-              <a:rPr lang="ja-JP" altLang="en-US" dirty="0">
-                <a:latin typeface="Calibri"/>
-                <a:ea typeface="Calibri"/>
-                <a:cs typeface="Calibri"/>
-              </a:rPr>
-              <a:t>の</a:t>
-            </a:r>
-            <a:r>
-              <a:rPr lang="en-US" altLang="ja-JP" dirty="0">
-                <a:latin typeface="Calibri"/>
-                <a:ea typeface="Calibri"/>
-                <a:cs typeface="Calibri"/>
-              </a:rPr>
-              <a:t>Function</a:t>
-            </a:r>
-            <a:r>
-              <a:rPr lang="ja-JP" altLang="en-US" dirty="0">
-                <a:latin typeface="Calibri"/>
-                <a:ea typeface="Calibri"/>
-                <a:cs typeface="Calibri"/>
-              </a:rPr>
-              <a:t>でカバーし、</a:t>
-            </a:r>
-            <a:r>
-              <a:rPr lang="en-US" altLang="ja-JP" dirty="0">
-                <a:latin typeface="Calibri"/>
-                <a:ea typeface="Calibri"/>
-                <a:cs typeface="Calibri"/>
-              </a:rPr>
-              <a:t>ARD</a:t>
-            </a:r>
-            <a:r>
-              <a:rPr lang="ja-JP" altLang="en-US" dirty="0">
-                <a:latin typeface="Calibri"/>
-                <a:ea typeface="Calibri"/>
-                <a:cs typeface="Calibri"/>
-              </a:rPr>
-              <a:t>から</a:t>
-            </a:r>
-            <a:r>
-              <a:rPr lang="en-US" altLang="ja-JP" dirty="0">
-                <a:latin typeface="Calibri"/>
-                <a:ea typeface="Calibri"/>
-                <a:cs typeface="Calibri"/>
-              </a:rPr>
-              <a:t>Table</a:t>
-            </a:r>
-            <a:r>
-              <a:rPr lang="ja-JP" altLang="en-US" dirty="0">
-                <a:latin typeface="Calibri"/>
-                <a:ea typeface="Calibri"/>
-                <a:cs typeface="Calibri"/>
-              </a:rPr>
-              <a:t>を作成するというところは</a:t>
-            </a:r>
-            <a:r>
-              <a:rPr lang="en-US" altLang="ja-JP" dirty="0">
-                <a:latin typeface="Calibri"/>
-                <a:ea typeface="Calibri"/>
-                <a:cs typeface="Calibri"/>
-              </a:rPr>
-              <a:t>Vignette</a:t>
-            </a:r>
-            <a:r>
-              <a:rPr lang="ja-JP" altLang="en-US" dirty="0">
-                <a:latin typeface="Calibri"/>
-                <a:ea typeface="Calibri"/>
-                <a:cs typeface="Calibri"/>
-              </a:rPr>
-              <a:t>や</a:t>
-            </a:r>
-            <a:r>
-              <a:rPr lang="en-US" altLang="ja-JP" dirty="0">
-                <a:latin typeface="Calibri"/>
-                <a:ea typeface="Calibri"/>
-                <a:cs typeface="Calibri"/>
-              </a:rPr>
-              <a:t>Template </a:t>
-            </a:r>
-            <a:r>
-              <a:rPr lang="en-US" altLang="ja-JP" dirty="0" err="1">
-                <a:latin typeface="Calibri"/>
-                <a:ea typeface="Calibri"/>
-                <a:cs typeface="Calibri"/>
-              </a:rPr>
-              <a:t>pgm</a:t>
-            </a:r>
-            <a:r>
-              <a:rPr lang="ja-JP" altLang="en-US" dirty="0">
-                <a:latin typeface="Calibri"/>
-                <a:ea typeface="Calibri"/>
-                <a:cs typeface="Calibri"/>
-              </a:rPr>
-              <a:t>でカバーすることを想定しています。</a:t>
-            </a:r>
-            <a:br>
-              <a:rPr lang="en-US" altLang="ja-JP" dirty="0">
-                <a:latin typeface="Calibri"/>
-                <a:ea typeface="Calibri"/>
-                <a:cs typeface="Calibri"/>
-              </a:rPr>
-            </a:br>
-            <a:endParaRPr lang="en-US" altLang="ja-JP" dirty="0">
-              <a:latin typeface="Calibri"/>
-              <a:ea typeface="Calibri"/>
-              <a:cs typeface="Calibri"/>
-            </a:endParaRPr>
-          </a:p>
-          <a:p>
-            <a:r>
-              <a:rPr lang="ja-JP" altLang="en-US" dirty="0">
-                <a:latin typeface="Calibri"/>
-                <a:ea typeface="Calibri"/>
-                <a:cs typeface="Calibri"/>
-              </a:rPr>
-              <a:t>というのも、</a:t>
-            </a:r>
-            <a:r>
-              <a:rPr lang="en-US" altLang="ja-JP" dirty="0">
-                <a:latin typeface="Calibri"/>
-                <a:ea typeface="Calibri"/>
-                <a:cs typeface="Calibri"/>
-              </a:rPr>
-              <a:t>ARD</a:t>
-            </a:r>
-            <a:r>
-              <a:rPr lang="ja-JP" altLang="en-US" dirty="0">
-                <a:latin typeface="Calibri"/>
-                <a:ea typeface="Calibri"/>
-                <a:cs typeface="Calibri"/>
-              </a:rPr>
-              <a:t>から</a:t>
-            </a:r>
-            <a:r>
-              <a:rPr lang="en-US" altLang="ja-JP" dirty="0">
-                <a:latin typeface="Calibri"/>
-                <a:ea typeface="Calibri"/>
-                <a:cs typeface="Calibri"/>
-              </a:rPr>
-              <a:t>Table</a:t>
-            </a:r>
-            <a:r>
-              <a:rPr lang="ja-JP" altLang="en-US" dirty="0">
-                <a:latin typeface="Calibri"/>
-                <a:ea typeface="Calibri"/>
-                <a:cs typeface="Calibri"/>
-              </a:rPr>
-              <a:t>の形式に出力する</a:t>
-            </a:r>
-            <a:r>
-              <a:rPr lang="en-US" altLang="ja-JP" dirty="0">
-                <a:latin typeface="Calibri"/>
-                <a:ea typeface="Calibri"/>
-                <a:cs typeface="Calibri"/>
-              </a:rPr>
-              <a:t>Package</a:t>
-            </a:r>
-            <a:r>
-              <a:rPr lang="ja-JP" altLang="en-US" dirty="0">
-                <a:latin typeface="Calibri"/>
-                <a:ea typeface="Calibri"/>
-                <a:cs typeface="Calibri"/>
-              </a:rPr>
-              <a:t>については既に幾つか使い勝手の良いものがあります。</a:t>
-            </a:r>
-            <a:br>
-              <a:rPr lang="en-US" altLang="ja-JP" dirty="0">
-                <a:latin typeface="Calibri"/>
-                <a:ea typeface="Calibri"/>
-                <a:cs typeface="Calibri"/>
-              </a:rPr>
-            </a:br>
-            <a:r>
-              <a:rPr lang="ja-JP" altLang="en-US" dirty="0">
-                <a:latin typeface="Calibri"/>
-                <a:ea typeface="Calibri"/>
-                <a:cs typeface="Calibri"/>
-              </a:rPr>
-              <a:t>新しく関数を整備するというよりは、それらの関数を利用するための方法を整備した方が良いと考えています。</a:t>
-            </a:r>
-            <a:br>
-              <a:rPr lang="en-US" altLang="ja-JP" dirty="0">
-                <a:latin typeface="Calibri"/>
-                <a:ea typeface="Calibri"/>
-                <a:cs typeface="Calibri"/>
-              </a:rPr>
-            </a:br>
-            <a:r>
-              <a:rPr lang="ja-JP" altLang="en-US" dirty="0">
-                <a:latin typeface="Calibri"/>
-                <a:ea typeface="Calibri"/>
-                <a:cs typeface="Calibri"/>
-              </a:rPr>
-              <a:t>そのため、現時点では</a:t>
-            </a:r>
-            <a:r>
-              <a:rPr lang="en-US" altLang="ja-JP" dirty="0">
-                <a:latin typeface="Calibri"/>
-                <a:ea typeface="Calibri"/>
-                <a:cs typeface="Calibri"/>
-              </a:rPr>
-              <a:t>ARD</a:t>
-            </a:r>
-            <a:r>
-              <a:rPr lang="ja-JP" altLang="en-US" dirty="0">
-                <a:latin typeface="Calibri"/>
-                <a:ea typeface="Calibri"/>
-                <a:cs typeface="Calibri"/>
-              </a:rPr>
-              <a:t>から</a:t>
-            </a:r>
-            <a:r>
-              <a:rPr lang="en-US" altLang="ja-JP" dirty="0">
-                <a:latin typeface="Calibri"/>
-                <a:ea typeface="Calibri"/>
-                <a:cs typeface="Calibri"/>
-              </a:rPr>
-              <a:t>Table</a:t>
-            </a:r>
-            <a:r>
-              <a:rPr lang="ja-JP" altLang="en-US" dirty="0">
-                <a:latin typeface="Calibri"/>
-                <a:ea typeface="Calibri"/>
-                <a:cs typeface="Calibri"/>
-              </a:rPr>
-              <a:t>を作成するステップについてはドキュメントでサポートすることを想定しております。</a:t>
-            </a:r>
             <a:endParaRPr lang="en-US" altLang="ja-JP" dirty="0">
               <a:latin typeface="Calibri"/>
               <a:ea typeface="Calibri"/>
@@ -7899,355 +6471,6 @@
               <a:buFont typeface="Arial" panose="020B0604020202020204" pitchFamily="34" charset="0"/>
               <a:buChar char="•"/>
             </a:pPr>
-            <a:r>
-              <a:rPr kumimoji="1" lang="ja-JP" altLang="en-US" b="1" dirty="0"/>
-              <a:t>穴埋め問題の説明</a:t>
-            </a:r>
-            <a:endParaRPr kumimoji="1" lang="en-US" altLang="ja-JP" b="1" dirty="0"/>
-          </a:p>
-          <a:p>
-            <a:pPr marL="628650" lvl="1" indent="-171450">
-              <a:buFont typeface="Arial" panose="020B0604020202020204" pitchFamily="34" charset="0"/>
-              <a:buChar char="•"/>
-            </a:pPr>
-            <a:r>
-              <a:rPr kumimoji="1" lang="en-US" altLang="ja-JP" dirty="0"/>
-              <a:t>Oncology</a:t>
-            </a:r>
-            <a:r>
-              <a:rPr kumimoji="1" lang="ja-JP" altLang="en-US" dirty="0"/>
-              <a:t>の申請においては、</a:t>
-            </a:r>
-            <a:r>
-              <a:rPr kumimoji="1" lang="en-US" altLang="ja-JP" dirty="0"/>
-              <a:t>PMDA</a:t>
-            </a:r>
-            <a:r>
-              <a:rPr kumimoji="1" lang="ja-JP" altLang="en-US" dirty="0"/>
-              <a:t>から通称穴埋め問題と呼ばれる照会事項が発出されることが知られております。</a:t>
-            </a:r>
-            <a:endParaRPr kumimoji="1" lang="en-US" altLang="ja-JP" dirty="0"/>
-          </a:p>
-          <a:p>
-            <a:pPr marL="171450" marR="0" lvl="0" indent="-171450" algn="l" defTabSz="914400" rtl="0" eaLnBrk="1" fontAlgn="auto" latinLnBrk="0" hangingPunct="1">
-              <a:lnSpc>
-                <a:spcPct val="100000"/>
-              </a:lnSpc>
-              <a:spcBef>
-                <a:spcPts val="0"/>
-              </a:spcBef>
-              <a:spcAft>
-                <a:spcPts val="0"/>
-              </a:spcAft>
-              <a:buClrTx/>
-              <a:buSzTx/>
-              <a:buFont typeface="Arial" panose="020B0604020202020204" pitchFamily="34" charset="0"/>
-              <a:buChar char="•"/>
-              <a:tabLst/>
-              <a:defRPr/>
-            </a:pPr>
-            <a:r>
-              <a:rPr kumimoji="1" lang="ja-JP" altLang="en-US" b="1" dirty="0"/>
-              <a:t>詳細説明</a:t>
-            </a:r>
-            <a:r>
-              <a:rPr kumimoji="1" lang="en-US" altLang="ja-JP" b="1" dirty="0"/>
-              <a:t>		</a:t>
-            </a:r>
-          </a:p>
-          <a:p>
-            <a:pPr marL="628650" marR="0" lvl="1" indent="-171450" algn="l" defTabSz="914400" rtl="0" eaLnBrk="1" fontAlgn="auto" latinLnBrk="0" hangingPunct="1">
-              <a:lnSpc>
-                <a:spcPct val="100000"/>
-              </a:lnSpc>
-              <a:spcBef>
-                <a:spcPts val="0"/>
-              </a:spcBef>
-              <a:spcAft>
-                <a:spcPts val="0"/>
-              </a:spcAft>
-              <a:buClrTx/>
-              <a:buSzTx/>
-              <a:buFont typeface="Arial" panose="020B0604020202020204" pitchFamily="34" charset="0"/>
-              <a:buChar char="•"/>
-              <a:tabLst/>
-              <a:defRPr/>
-            </a:pPr>
-            <a:r>
-              <a:rPr kumimoji="1" lang="ja-JP" altLang="en-US" b="0" dirty="0"/>
-              <a:t>穴埋め問題は</a:t>
-            </a:r>
-            <a:r>
-              <a:rPr kumimoji="1" lang="en-US" altLang="ja-JP" b="0" dirty="0"/>
-              <a:t>AE</a:t>
-            </a:r>
-            <a:r>
-              <a:rPr kumimoji="1" lang="ja-JP" altLang="en-US" b="0" dirty="0"/>
-              <a:t>に関する照会事項でして、具体例を右側にお示ししております。</a:t>
-            </a:r>
-            <a:endParaRPr kumimoji="1" lang="en-US" altLang="ja-JP" b="0" dirty="0"/>
-          </a:p>
-          <a:p>
-            <a:pPr marL="628650" marR="0" lvl="1" indent="-171450" algn="l" defTabSz="914400" rtl="0" eaLnBrk="1" fontAlgn="auto" latinLnBrk="0" hangingPunct="1">
-              <a:lnSpc>
-                <a:spcPct val="100000"/>
-              </a:lnSpc>
-              <a:spcBef>
-                <a:spcPts val="0"/>
-              </a:spcBef>
-              <a:spcAft>
-                <a:spcPts val="0"/>
-              </a:spcAft>
-              <a:buClrTx/>
-              <a:buSzTx/>
-              <a:buFont typeface="Arial" panose="020B0604020202020204" pitchFamily="34" charset="0"/>
-              <a:buChar char="•"/>
-              <a:tabLst/>
-              <a:defRPr/>
-            </a:pPr>
-            <a:r>
-              <a:rPr kumimoji="1" lang="ja-JP" altLang="en-US" b="0" dirty="0"/>
-              <a:t>穴埋め問題では、</a:t>
-            </a:r>
-            <a:r>
-              <a:rPr kumimoji="1" lang="en-US" altLang="ja-JP" b="0" dirty="0"/>
-              <a:t>Grade 3</a:t>
-            </a:r>
-            <a:r>
-              <a:rPr kumimoji="1" lang="ja-JP" altLang="en-US" b="0" dirty="0"/>
-              <a:t>以上の有害事象や重篤な有害事象などの</a:t>
-            </a:r>
-            <a:r>
-              <a:rPr kumimoji="1" lang="en-US" altLang="ja-JP" b="0" dirty="0"/>
-              <a:t>Type</a:t>
-            </a:r>
-            <a:r>
-              <a:rPr kumimoji="1" lang="ja-JP" altLang="en-US" b="0" dirty="0"/>
-              <a:t>ごとの集計を、</a:t>
-            </a:r>
-            <a:br>
-              <a:rPr kumimoji="1" lang="en-US" altLang="ja-JP" b="0" dirty="0"/>
-            </a:br>
-            <a:r>
-              <a:rPr kumimoji="1" lang="ja-JP" altLang="en-US" b="0" dirty="0"/>
-              <a:t>何らかの</a:t>
-            </a:r>
-            <a:r>
-              <a:rPr kumimoji="1" lang="en-US" altLang="ja-JP" b="0" dirty="0"/>
-              <a:t>Subgroup</a:t>
-            </a:r>
-            <a:r>
-              <a:rPr kumimoji="1" lang="ja-JP" altLang="en-US" b="0" dirty="0"/>
-              <a:t>や</a:t>
-            </a:r>
-            <a:r>
-              <a:rPr kumimoji="1" lang="en-US" altLang="ja-JP" b="0" dirty="0"/>
-              <a:t>Treatment arm</a:t>
-            </a:r>
-            <a:r>
-              <a:rPr kumimoji="1" lang="ja-JP" altLang="en-US" b="0" dirty="0"/>
-              <a:t>ごとに求められることが一般的かと思います。</a:t>
-            </a:r>
-            <a:endParaRPr kumimoji="1" lang="en-US" altLang="ja-JP" b="0" dirty="0"/>
-          </a:p>
-          <a:p>
-            <a:pPr marL="171450" marR="0" lvl="0" indent="-171450" algn="l" defTabSz="914400" rtl="0" eaLnBrk="1" fontAlgn="auto" latinLnBrk="0" hangingPunct="1">
-              <a:lnSpc>
-                <a:spcPct val="100000"/>
-              </a:lnSpc>
-              <a:spcBef>
-                <a:spcPts val="0"/>
-              </a:spcBef>
-              <a:spcAft>
-                <a:spcPts val="0"/>
-              </a:spcAft>
-              <a:buClrTx/>
-              <a:buSzTx/>
-              <a:buFont typeface="Arial" panose="020B0604020202020204" pitchFamily="34" charset="0"/>
-              <a:buChar char="•"/>
-              <a:tabLst/>
-              <a:defRPr/>
-            </a:pPr>
-            <a:r>
-              <a:rPr kumimoji="1" lang="ja-JP" altLang="en-US" b="0" dirty="0"/>
-              <a:t>課題</a:t>
-            </a:r>
-            <a:endParaRPr kumimoji="1" lang="en-US" altLang="ja-JP" b="0" dirty="0"/>
-          </a:p>
-          <a:p>
-            <a:pPr marL="628650" marR="0" lvl="1" indent="-171450" algn="l" defTabSz="914400" rtl="0" eaLnBrk="1" fontAlgn="auto" latinLnBrk="0" hangingPunct="1">
-              <a:lnSpc>
-                <a:spcPct val="100000"/>
-              </a:lnSpc>
-              <a:spcBef>
-                <a:spcPts val="0"/>
-              </a:spcBef>
-              <a:spcAft>
-                <a:spcPts val="0"/>
-              </a:spcAft>
-              <a:buClrTx/>
-              <a:buSzTx/>
-              <a:buFont typeface="Arial" panose="020B0604020202020204" pitchFamily="34" charset="0"/>
-              <a:buChar char="•"/>
-              <a:tabLst/>
-              <a:defRPr/>
-            </a:pPr>
-            <a:r>
-              <a:rPr kumimoji="1" lang="ja-JP" altLang="en-US" b="0" dirty="0"/>
-              <a:t>この穴埋め問題ではいくつかの課題があります。</a:t>
-            </a:r>
-            <a:endParaRPr kumimoji="1" lang="en-US" altLang="ja-JP" b="0" dirty="0"/>
-          </a:p>
-          <a:p>
-            <a:pPr marL="628650" marR="0" lvl="1" indent="-171450" algn="l" defTabSz="914400" rtl="0" eaLnBrk="1" fontAlgn="auto" latinLnBrk="0" hangingPunct="1">
-              <a:lnSpc>
-                <a:spcPct val="100000"/>
-              </a:lnSpc>
-              <a:spcBef>
-                <a:spcPts val="0"/>
-              </a:spcBef>
-              <a:spcAft>
-                <a:spcPts val="0"/>
-              </a:spcAft>
-              <a:buClrTx/>
-              <a:buSzTx/>
-              <a:buFont typeface="Arial" panose="020B0604020202020204" pitchFamily="34" charset="0"/>
-              <a:buChar char="•"/>
-              <a:tabLst/>
-              <a:defRPr/>
-            </a:pPr>
-            <a:r>
-              <a:rPr kumimoji="1" lang="en-US" altLang="ja-JP" b="0" dirty="0"/>
-              <a:t>1</a:t>
-            </a:r>
-            <a:r>
-              <a:rPr kumimoji="1" lang="ja-JP" altLang="en-US" b="0" dirty="0"/>
-              <a:t>点目としては</a:t>
-            </a:r>
-            <a:r>
-              <a:rPr kumimoji="1" lang="en-US" altLang="ja-JP" b="0" dirty="0"/>
-              <a:t>Timeline</a:t>
-            </a:r>
-            <a:r>
-              <a:rPr kumimoji="1" lang="ja-JP" altLang="en-US" b="0" dirty="0"/>
-              <a:t>です。申請時にはこの似たようなフォーマットでの解析を短い時間で大量に要求されます。</a:t>
-            </a:r>
-            <a:endParaRPr kumimoji="1" lang="en-US" altLang="ja-JP" b="0" dirty="0"/>
-          </a:p>
-          <a:p>
-            <a:pPr marL="628650" marR="0" lvl="1" indent="-171450" algn="l" defTabSz="914400" rtl="0" eaLnBrk="1" fontAlgn="auto" latinLnBrk="0" hangingPunct="1">
-              <a:lnSpc>
-                <a:spcPct val="100000"/>
-              </a:lnSpc>
-              <a:spcBef>
-                <a:spcPts val="0"/>
-              </a:spcBef>
-              <a:spcAft>
-                <a:spcPts val="0"/>
-              </a:spcAft>
-              <a:buClrTx/>
-              <a:buSzTx/>
-              <a:buFont typeface="Arial" panose="020B0604020202020204" pitchFamily="34" charset="0"/>
-              <a:buChar char="•"/>
-              <a:tabLst/>
-              <a:defRPr/>
-            </a:pPr>
-            <a:r>
-              <a:rPr kumimoji="1" lang="en-US" altLang="ja-JP" b="0" dirty="0"/>
-              <a:t>2</a:t>
-            </a:r>
-            <a:r>
-              <a:rPr kumimoji="1" lang="ja-JP" altLang="en-US" b="0" dirty="0"/>
-              <a:t>点目としては</a:t>
-            </a:r>
-            <a:r>
-              <a:rPr kumimoji="1" lang="en-US" altLang="ja-JP" b="0" dirty="0"/>
-              <a:t>Format</a:t>
-            </a:r>
-            <a:r>
-              <a:rPr kumimoji="1" lang="ja-JP" altLang="en-US" b="0" dirty="0"/>
-              <a:t>です。</a:t>
-            </a:r>
-            <a:r>
-              <a:rPr kumimoji="1" lang="en-US" altLang="ja-JP" b="0" dirty="0"/>
-              <a:t>Format</a:t>
-            </a:r>
-            <a:r>
-              <a:rPr kumimoji="1" lang="ja-JP" altLang="en-US" b="0" dirty="0"/>
-              <a:t>が標準化されておらず、</a:t>
-            </a:r>
-            <a:r>
-              <a:rPr kumimoji="1" lang="en-US" altLang="ja-JP" b="0" dirty="0"/>
-              <a:t>Subgroup</a:t>
-            </a:r>
-            <a:r>
-              <a:rPr kumimoji="1" lang="ja-JP" altLang="en-US" b="0" dirty="0"/>
-              <a:t>や</a:t>
-            </a:r>
-            <a:r>
-              <a:rPr kumimoji="1" lang="en-US" altLang="ja-JP" b="0" dirty="0"/>
-              <a:t>AE</a:t>
-            </a:r>
-            <a:r>
-              <a:rPr kumimoji="1" lang="ja-JP" altLang="en-US" b="0" dirty="0"/>
-              <a:t>の</a:t>
-            </a:r>
-            <a:r>
-              <a:rPr kumimoji="1" lang="en-US" altLang="ja-JP" b="0" dirty="0"/>
-              <a:t>Type</a:t>
-            </a:r>
-            <a:r>
-              <a:rPr kumimoji="1" lang="ja-JP" altLang="en-US" b="0" dirty="0"/>
-              <a:t>の定義が照会事項によって変わることがあります。</a:t>
-            </a:r>
-            <a:endParaRPr kumimoji="1" lang="en-US" altLang="ja-JP" b="0" dirty="0"/>
-          </a:p>
-          <a:p>
-            <a:pPr marL="171450" marR="0" lvl="0" indent="-171450" algn="l" defTabSz="914400" rtl="0" eaLnBrk="1" fontAlgn="auto" latinLnBrk="0" hangingPunct="1">
-              <a:lnSpc>
-                <a:spcPct val="100000"/>
-              </a:lnSpc>
-              <a:spcBef>
-                <a:spcPts val="0"/>
-              </a:spcBef>
-              <a:spcAft>
-                <a:spcPts val="0"/>
-              </a:spcAft>
-              <a:buClrTx/>
-              <a:buSzTx/>
-              <a:buFont typeface="Arial" panose="020B0604020202020204" pitchFamily="34" charset="0"/>
-              <a:buChar char="•"/>
-              <a:tabLst/>
-              <a:defRPr/>
-            </a:pPr>
-            <a:r>
-              <a:rPr kumimoji="1" lang="ja-JP" altLang="en-US" b="0" dirty="0"/>
-              <a:t>課題へのアプローチ</a:t>
-            </a:r>
-            <a:endParaRPr kumimoji="1" lang="en-US" altLang="ja-JP" b="0" dirty="0"/>
-          </a:p>
-          <a:p>
-            <a:pPr marL="628650" marR="0" lvl="1" indent="-171450" algn="l" defTabSz="914400" rtl="0" eaLnBrk="1" fontAlgn="auto" latinLnBrk="0" hangingPunct="1">
-              <a:lnSpc>
-                <a:spcPct val="100000"/>
-              </a:lnSpc>
-              <a:spcBef>
-                <a:spcPts val="0"/>
-              </a:spcBef>
-              <a:spcAft>
-                <a:spcPts val="0"/>
-              </a:spcAft>
-              <a:buClrTx/>
-              <a:buSzTx/>
-              <a:buFont typeface="Arial" panose="020B0604020202020204" pitchFamily="34" charset="0"/>
-              <a:buChar char="•"/>
-              <a:tabLst/>
-              <a:defRPr/>
-            </a:pPr>
-            <a:r>
-              <a:rPr kumimoji="1" lang="ja-JP" altLang="en-US" b="0" dirty="0"/>
-              <a:t>これらの課題に対して、パッケージを通じてアプローチをしていく、というものが本サブチームの取り組みです。</a:t>
-            </a:r>
             <a:endParaRPr kumimoji="1" lang="en-US" altLang="ja-JP" b="0" dirty="0"/>
           </a:p>
         </p:txBody>
@@ -8338,124 +6561,6 @@
           <a:bodyPr/>
           <a:lstStyle/>
           <a:p>
-            <a:pPr marL="171450" indent="-171450">
-              <a:buFont typeface="Arial" panose="020B0604020202020204" pitchFamily="34" charset="0"/>
-              <a:buChar char="•"/>
-            </a:pPr>
-            <a:r>
-              <a:rPr kumimoji="1" lang="ja-JP" altLang="en-US" dirty="0"/>
-              <a:t>パッケージについて</a:t>
-            </a:r>
-            <a:endParaRPr kumimoji="1" lang="en-US" altLang="ja-JP" dirty="0"/>
-          </a:p>
-          <a:p>
-            <a:pPr marL="628650" lvl="1" indent="-171450">
-              <a:buFont typeface="Arial" panose="020B0604020202020204" pitchFamily="34" charset="0"/>
-              <a:buChar char="•"/>
-            </a:pPr>
-            <a:r>
-              <a:rPr kumimoji="1" lang="ja-JP" altLang="en-US" dirty="0"/>
-              <a:t>穴埋め問題への回答を効率化するため、現在私たちが作成をしているのが、この</a:t>
-            </a:r>
-            <a:r>
-              <a:rPr kumimoji="1" lang="en-US" altLang="ja-JP" dirty="0"/>
-              <a:t>{</a:t>
-            </a:r>
-            <a:r>
-              <a:rPr kumimoji="1" lang="en-US" altLang="ja-JP" dirty="0" err="1"/>
-              <a:t>anaume</a:t>
-            </a:r>
-            <a:r>
-              <a:rPr kumimoji="1" lang="en-US" altLang="ja-JP" dirty="0"/>
-              <a:t>} package</a:t>
-            </a:r>
-            <a:r>
-              <a:rPr kumimoji="1" lang="ja-JP" altLang="en-US" dirty="0"/>
-              <a:t>です。</a:t>
-            </a:r>
-            <a:endParaRPr kumimoji="1" lang="en-US" altLang="ja-JP" dirty="0"/>
-          </a:p>
-          <a:p>
-            <a:pPr marL="628650" lvl="1" indent="-171450">
-              <a:buFont typeface="Arial" panose="020B0604020202020204" pitchFamily="34" charset="0"/>
-              <a:buChar char="•"/>
-            </a:pPr>
-            <a:r>
-              <a:rPr kumimoji="1" lang="ja-JP" altLang="en-US" dirty="0"/>
-              <a:t>日本特有の</a:t>
-            </a:r>
-            <a:r>
-              <a:rPr kumimoji="1" lang="en-US" altLang="ja-JP" dirty="0"/>
-              <a:t>Package</a:t>
-            </a:r>
-            <a:r>
-              <a:rPr kumimoji="1" lang="ja-JP" altLang="en-US" dirty="0"/>
-              <a:t>になると思いますので、日本ぽいものを載せておこうということで、穴を埋めている忍者を載せています。</a:t>
-            </a:r>
-            <a:endParaRPr kumimoji="1" lang="en-US" altLang="ja-JP" dirty="0"/>
-          </a:p>
-          <a:p>
-            <a:pPr marL="171450" lvl="0" indent="-171450">
-              <a:buFont typeface="Arial" panose="020B0604020202020204" pitchFamily="34" charset="0"/>
-              <a:buChar char="•"/>
-            </a:pPr>
-            <a:endParaRPr kumimoji="1" lang="en-US" altLang="ja-JP" dirty="0"/>
-          </a:p>
-          <a:p>
-            <a:pPr marL="171450" lvl="0" indent="-171450">
-              <a:buFont typeface="Arial" panose="020B0604020202020204" pitchFamily="34" charset="0"/>
-              <a:buChar char="•"/>
-            </a:pPr>
-            <a:r>
-              <a:rPr kumimoji="1" lang="ja-JP" altLang="en-US" dirty="0"/>
-              <a:t>特徴</a:t>
-            </a:r>
-            <a:endParaRPr kumimoji="1" lang="en-US" altLang="ja-JP" dirty="0"/>
-          </a:p>
-          <a:p>
-            <a:pPr marL="628650" lvl="1" indent="-171450">
-              <a:buFont typeface="Arial" panose="020B0604020202020204" pitchFamily="34" charset="0"/>
-              <a:buChar char="•"/>
-            </a:pPr>
-            <a:r>
-              <a:rPr kumimoji="1" lang="ja-JP" altLang="en-US" dirty="0"/>
-              <a:t>特徴としては、解析結果を出力する前に一度</a:t>
-            </a:r>
-            <a:r>
-              <a:rPr kumimoji="1" lang="en-US" altLang="ja-JP" dirty="0" err="1"/>
-              <a:t>ADaM</a:t>
-            </a:r>
-            <a:r>
-              <a:rPr kumimoji="1" lang="ja-JP" altLang="en-US" dirty="0"/>
-              <a:t>を</a:t>
-            </a:r>
-            <a:r>
-              <a:rPr kumimoji="1" lang="en-US" altLang="ja-JP" dirty="0"/>
-              <a:t>ARD</a:t>
-            </a:r>
-            <a:r>
-              <a:rPr kumimoji="1" lang="ja-JP" altLang="en-US" dirty="0"/>
-              <a:t>形式に変換しておりまして、その後</a:t>
-            </a:r>
-            <a:r>
-              <a:rPr kumimoji="1" lang="en-US" altLang="ja-JP" dirty="0"/>
-              <a:t>ARD</a:t>
-            </a:r>
-            <a:r>
-              <a:rPr kumimoji="1" lang="ja-JP" altLang="en-US" dirty="0"/>
-              <a:t>から</a:t>
-            </a:r>
-            <a:r>
-              <a:rPr kumimoji="1" lang="en-US" altLang="ja-JP" dirty="0"/>
-              <a:t>Table</a:t>
-            </a:r>
-            <a:r>
-              <a:rPr kumimoji="1" lang="ja-JP" altLang="en-US" dirty="0"/>
-              <a:t>を作成します。</a:t>
-            </a:r>
-            <a:endParaRPr kumimoji="1" lang="en-US" altLang="ja-JP" dirty="0"/>
-          </a:p>
-          <a:p>
             <a:pPr marL="628650" lvl="1" indent="-171450">
               <a:buFont typeface="Arial" panose="020B0604020202020204" pitchFamily="34" charset="0"/>
               <a:buChar char="•"/>
@@ -8561,209 +6666,6 @@
         <p:txBody>
           <a:bodyPr/>
           <a:lstStyle/>
-          <a:p>
-            <a:pPr marL="171450" indent="-171450">
-              <a:buFont typeface="Arial" panose="020B0604020202020204" pitchFamily="34" charset="0"/>
-              <a:buChar char="•"/>
-            </a:pPr>
-            <a:r>
-              <a:rPr kumimoji="1" lang="en-US" altLang="ja-JP" dirty="0"/>
-              <a:t>ARD</a:t>
-            </a:r>
-            <a:r>
-              <a:rPr kumimoji="1" lang="ja-JP" altLang="en-US" dirty="0"/>
-              <a:t>とは</a:t>
-            </a:r>
-            <a:endParaRPr kumimoji="1" lang="en-US" altLang="ja-JP" dirty="0"/>
-          </a:p>
-          <a:p>
-            <a:pPr marL="628650" lvl="1" indent="-171450">
-              <a:buFont typeface="Arial" panose="020B0604020202020204" pitchFamily="34" charset="0"/>
-              <a:buChar char="•"/>
-            </a:pPr>
-            <a:r>
-              <a:rPr kumimoji="1" lang="en-US" altLang="ja-JP" dirty="0"/>
-              <a:t>ARD</a:t>
-            </a:r>
-            <a:r>
-              <a:rPr kumimoji="1" lang="ja-JP" altLang="en-US" dirty="0"/>
-              <a:t>とは、</a:t>
-            </a:r>
-            <a:r>
-              <a:rPr lang="en-US" altLang="ja-JP" dirty="0"/>
-              <a:t>Analysis Results Data </a:t>
-            </a:r>
-            <a:r>
-              <a:rPr lang="ja-JP" altLang="en-US" dirty="0"/>
-              <a:t>の略</a:t>
-            </a:r>
-            <a:endParaRPr lang="en-US" altLang="ja-JP" dirty="0"/>
-          </a:p>
-          <a:p>
-            <a:pPr marL="628650" lvl="1" indent="-171450">
-              <a:buFont typeface="Arial" panose="020B0604020202020204" pitchFamily="34" charset="0"/>
-              <a:buChar char="•"/>
-            </a:pPr>
-            <a:r>
-              <a:rPr lang="ja-JP" altLang="en-US" dirty="0"/>
-              <a:t>解析結果を標準化した出力形式</a:t>
-            </a:r>
-            <a:endParaRPr lang="en-US" altLang="ja-JP" dirty="0"/>
-          </a:p>
-          <a:p>
-            <a:pPr marL="628650" lvl="1" indent="-171450">
-              <a:buFont typeface="Arial" panose="020B0604020202020204" pitchFamily="34" charset="0"/>
-              <a:buChar char="•"/>
-            </a:pPr>
-            <a:r>
-              <a:rPr lang="ja-JP" altLang="en-US" dirty="0"/>
-              <a:t>解析結果ではあるが、</a:t>
-            </a:r>
-            <a:r>
-              <a:rPr lang="en-US" altLang="ja-JP" dirty="0"/>
-              <a:t>rtf</a:t>
-            </a:r>
-            <a:r>
-              <a:rPr lang="ja-JP" altLang="en-US" dirty="0"/>
-              <a:t>や</a:t>
-            </a:r>
-            <a:r>
-              <a:rPr lang="en-US" altLang="ja-JP" dirty="0"/>
-              <a:t>pdf</a:t>
-            </a:r>
-            <a:r>
-              <a:rPr lang="ja-JP" altLang="en-US" dirty="0"/>
-              <a:t>と異なりデータテーブルの形式になっております。</a:t>
-            </a:r>
-            <a:br>
-              <a:rPr lang="en-US" altLang="ja-JP" dirty="0"/>
-            </a:br>
-            <a:endParaRPr kumimoji="1" lang="en-US" altLang="ja-JP" dirty="0"/>
-          </a:p>
-          <a:p>
-            <a:endParaRPr kumimoji="1" lang="en-US" altLang="ja-JP" dirty="0"/>
-          </a:p>
-          <a:p>
-            <a:endParaRPr kumimoji="1" lang="en-US" altLang="ja-JP" dirty="0"/>
-          </a:p>
-          <a:p>
-            <a:r>
-              <a:rPr kumimoji="1" lang="en-US" altLang="ja-JP" dirty="0"/>
-              <a:t>{cards} </a:t>
-            </a:r>
-            <a:r>
-              <a:rPr kumimoji="1" lang="ja-JP" altLang="en-US" dirty="0"/>
-              <a:t>が出力する </a:t>
-            </a:r>
-            <a:r>
-              <a:rPr kumimoji="1" lang="en-US" altLang="ja-JP" dirty="0"/>
-              <a:t>ARD </a:t>
-            </a:r>
-            <a:r>
-              <a:rPr kumimoji="1" lang="ja-JP" altLang="en-US" dirty="0"/>
-              <a:t>は、単なる「サマリーテーブルの一時的な集計結果」ではなく、以下のように再利用可能かつ規格に沿った形で設計されています。</a:t>
-            </a:r>
-          </a:p>
-          <a:p>
-            <a:r>
-              <a:rPr kumimoji="1" lang="ja-JP" altLang="en-US" dirty="0"/>
-              <a:t>標準化されたカラム設計</a:t>
-            </a:r>
-          </a:p>
-          <a:p>
-            <a:r>
-              <a:rPr kumimoji="1" lang="ja-JP" altLang="en-US" dirty="0"/>
-              <a:t>例</a:t>
-            </a:r>
-            <a:r>
-              <a:rPr kumimoji="1" lang="en-US" altLang="ja-JP" dirty="0"/>
-              <a:t>: parameter</a:t>
-            </a:r>
-            <a:r>
-              <a:rPr kumimoji="1" lang="ja-JP" altLang="en-US" dirty="0"/>
-              <a:t>（解析対象の項目名）、</a:t>
-            </a:r>
-            <a:r>
-              <a:rPr kumimoji="1" lang="en-US" altLang="ja-JP" dirty="0" err="1"/>
-              <a:t>analysis_value</a:t>
-            </a:r>
-            <a:r>
-              <a:rPr kumimoji="1" lang="ja-JP" altLang="en-US" dirty="0"/>
-              <a:t>（結果値）、</a:t>
-            </a:r>
-            <a:r>
-              <a:rPr kumimoji="1" lang="en-US" altLang="ja-JP" dirty="0" err="1"/>
-              <a:t>analysis_var</a:t>
-            </a:r>
-            <a:r>
-              <a:rPr kumimoji="1" lang="ja-JP" altLang="en-US" dirty="0"/>
-              <a:t>（どの変数を集計したか）、</a:t>
-            </a:r>
-            <a:r>
-              <a:rPr kumimoji="1" lang="en-US" altLang="ja-JP" dirty="0" err="1"/>
-              <a:t>trt_group</a:t>
-            </a:r>
-            <a:r>
-              <a:rPr kumimoji="1" lang="ja-JP" altLang="en-US" dirty="0"/>
-              <a:t>（治療群）、</a:t>
-            </a:r>
-            <a:r>
-              <a:rPr kumimoji="1" lang="en-US" altLang="ja-JP" dirty="0"/>
-              <a:t>population</a:t>
-            </a:r>
-            <a:r>
-              <a:rPr kumimoji="1" lang="ja-JP" altLang="en-US" dirty="0"/>
-              <a:t>（母集団定義）など。</a:t>
-            </a:r>
-          </a:p>
-          <a:p>
-            <a:r>
-              <a:rPr kumimoji="1" lang="ja-JP" altLang="en-US" dirty="0"/>
-              <a:t>メタデータ付き</a:t>
-            </a:r>
-          </a:p>
-          <a:p>
-            <a:r>
-              <a:rPr kumimoji="1" lang="ja-JP" altLang="en-US" dirty="0"/>
-              <a:t>解析の種類（例</a:t>
-            </a:r>
-            <a:r>
-              <a:rPr kumimoji="1" lang="en-US" altLang="ja-JP" dirty="0"/>
-              <a:t>: AE incidence, summary statistics</a:t>
-            </a:r>
-            <a:r>
-              <a:rPr kumimoji="1" lang="ja-JP" altLang="en-US" dirty="0"/>
-              <a:t>）、集計方法、分母の定義（</a:t>
-            </a:r>
-            <a:r>
-              <a:rPr kumimoji="1" lang="en-US" altLang="ja-JP" dirty="0"/>
-              <a:t>N</a:t>
-            </a:r>
-            <a:r>
-              <a:rPr kumimoji="1" lang="ja-JP" altLang="en-US" dirty="0"/>
-              <a:t>）、小数点桁数などを保持。</a:t>
-            </a:r>
-          </a:p>
-          <a:p>
-            <a:r>
-              <a:rPr kumimoji="1" lang="ja-JP" altLang="en-US" dirty="0"/>
-              <a:t>人が読むテーブルだけでなく、マシンリーダブル</a:t>
-            </a:r>
-          </a:p>
-          <a:p>
-            <a:r>
-              <a:rPr kumimoji="1" lang="ja-JP" altLang="en-US" dirty="0"/>
-              <a:t>結果が</a:t>
-            </a:r>
-            <a:r>
-              <a:rPr kumimoji="1" lang="en-US" altLang="ja-JP" dirty="0"/>
-              <a:t>JSON</a:t>
-            </a:r>
-            <a:r>
-              <a:rPr kumimoji="1" lang="ja-JP" altLang="en-US" dirty="0"/>
-              <a:t>や規格化データとして保持できるため、後続処理（可視化、再集計、照会対応）に適用可能。</a:t>
-            </a:r>
-          </a:p>
           <a:p>
             <a:endParaRPr kumimoji="1" lang="ja-JP" altLang="en-US" dirty="0"/>
           </a:p>
@@ -8855,94 +6757,6 @@
           <a:bodyPr/>
           <a:lstStyle/>
           <a:p>
-            <a:pPr marL="171450" lvl="0" indent="-171450">
-              <a:buFont typeface="Arial" panose="020B0604020202020204" pitchFamily="34" charset="0"/>
-              <a:buChar char="•"/>
-            </a:pPr>
-            <a:r>
-              <a:rPr lang="ja-JP" altLang="en-US" dirty="0"/>
-              <a:t>利用するメリット</a:t>
-            </a:r>
-            <a:endParaRPr lang="en-US" altLang="ja-JP" dirty="0"/>
-          </a:p>
-          <a:p>
-            <a:pPr marL="628650" lvl="1" indent="-171450">
-              <a:buFont typeface="Arial" panose="020B0604020202020204" pitchFamily="34" charset="0"/>
-              <a:buChar char="•"/>
-            </a:pPr>
-            <a:r>
-              <a:rPr lang="en-US" altLang="ja-JP" dirty="0"/>
-              <a:t>1</a:t>
-            </a:r>
-            <a:r>
-              <a:rPr lang="ja-JP" altLang="en-US" dirty="0"/>
-              <a:t>つ名は標準化：列名や構造が標準化されていて扱いやすい</a:t>
-            </a:r>
-            <a:endParaRPr lang="en-US" altLang="ja-JP" dirty="0"/>
-          </a:p>
-          <a:p>
-            <a:pPr marL="628650" lvl="1" indent="-171450">
-              <a:buFont typeface="Arial" panose="020B0604020202020204" pitchFamily="34" charset="0"/>
-              <a:buChar char="•"/>
-            </a:pPr>
-            <a:r>
-              <a:rPr lang="en-US" altLang="ja-JP" dirty="0"/>
-              <a:t>2</a:t>
-            </a:r>
-            <a:r>
-              <a:rPr lang="ja-JP" altLang="en-US" dirty="0"/>
-              <a:t>つ名は効率：データとして解析結果を保有しているため、</a:t>
-            </a:r>
-            <a:r>
-              <a:rPr lang="en-US" altLang="ja-JP" dirty="0"/>
-              <a:t>Format</a:t>
-            </a:r>
-            <a:r>
-              <a:rPr lang="ja-JP" altLang="en-US" dirty="0"/>
-              <a:t>の変更が容易で</a:t>
-            </a:r>
-            <a:r>
-              <a:rPr lang="en-US" altLang="ja-JP" dirty="0"/>
-              <a:t>QC</a:t>
-            </a:r>
-            <a:r>
-              <a:rPr lang="ja-JP" altLang="en-US" dirty="0"/>
-              <a:t>も取りやすい</a:t>
-            </a:r>
-            <a:endParaRPr lang="en-US" altLang="ja-JP" dirty="0"/>
-          </a:p>
-          <a:p>
-            <a:pPr marL="628650" lvl="1" indent="-171450">
-              <a:buFont typeface="Arial" panose="020B0604020202020204" pitchFamily="34" charset="0"/>
-              <a:buChar char="•"/>
-            </a:pPr>
-            <a:r>
-              <a:rPr lang="en-US" altLang="ja-JP" dirty="0"/>
-              <a:t>3</a:t>
-            </a:r>
-            <a:r>
-              <a:rPr lang="ja-JP" altLang="en-US" dirty="0"/>
-              <a:t>つ名は再利用・自動化の観点：また、</a:t>
-            </a:r>
-            <a:r>
-              <a:rPr lang="en-US" altLang="ja-JP" dirty="0"/>
-              <a:t>Table</a:t>
-            </a:r>
-            <a:r>
-              <a:rPr lang="ja-JP" altLang="en-US" dirty="0"/>
-              <a:t>として出力するだけでなく、</a:t>
-            </a:r>
-            <a:r>
-              <a:rPr lang="en-US" altLang="ja-JP" dirty="0"/>
-              <a:t>R Shiny</a:t>
-            </a:r>
-            <a:r>
-              <a:rPr lang="ja-JP" altLang="en-US" dirty="0"/>
-              <a:t>にも転用できるなど、再利用しやすい、オートメーションに使用しやすいなどもメリットになっています。</a:t>
-            </a:r>
-            <a:endParaRPr lang="en-US" altLang="ja-JP" dirty="0"/>
-          </a:p>
-          <a:p>
             <a:endParaRPr kumimoji="1" lang="ja-JP" altLang="en-US" dirty="0"/>
           </a:p>
         </p:txBody>
@@ -9044,222 +6858,6 @@
         <p:txBody>
           <a:bodyPr/>
           <a:lstStyle/>
-          <a:p>
-            <a:pPr marL="171450" indent="-171450">
-              <a:buFont typeface="Arial" panose="020B0604020202020204" pitchFamily="34" charset="0"/>
-              <a:buChar char="•"/>
-            </a:pPr>
-            <a:r>
-              <a:rPr kumimoji="1" lang="ja-JP" altLang="en-US" dirty="0"/>
-              <a:t>穴埋め問題の回答作成の流れ：</a:t>
-            </a:r>
-            <a:endParaRPr kumimoji="1" lang="en-US" altLang="ja-JP" dirty="0"/>
-          </a:p>
-          <a:p>
-            <a:pPr marL="628650" lvl="1" indent="-171450">
-              <a:buFont typeface="Arial" panose="020B0604020202020204" pitchFamily="34" charset="0"/>
-              <a:buChar char="•"/>
-            </a:pPr>
-            <a:r>
-              <a:rPr kumimoji="1" lang="ja-JP" altLang="en-US" dirty="0"/>
-              <a:t>穴埋め問題の回答を作成するまでの流れを表した図がこちらになります。</a:t>
-            </a:r>
-            <a:endParaRPr kumimoji="1" lang="en-US" altLang="ja-JP" dirty="0"/>
-          </a:p>
-          <a:p>
-            <a:pPr marL="628650" lvl="1" indent="-171450">
-              <a:buFont typeface="Arial" panose="020B0604020202020204" pitchFamily="34" charset="0"/>
-              <a:buChar char="•"/>
-            </a:pPr>
-            <a:r>
-              <a:rPr kumimoji="1" lang="en-US" altLang="ja-JP" dirty="0" err="1"/>
-              <a:t>ADaM</a:t>
-            </a:r>
-            <a:r>
-              <a:rPr kumimoji="1" lang="ja-JP" altLang="en-US" dirty="0"/>
-              <a:t>を</a:t>
-            </a:r>
-            <a:r>
-              <a:rPr kumimoji="1" lang="en-US" altLang="ja-JP" dirty="0"/>
-              <a:t>{cards} package</a:t>
-            </a:r>
-            <a:r>
-              <a:rPr kumimoji="1" lang="ja-JP" altLang="en-US" dirty="0"/>
-              <a:t>を用いて</a:t>
-            </a:r>
-            <a:r>
-              <a:rPr kumimoji="1" lang="en-US" altLang="ja-JP" dirty="0"/>
-              <a:t>ARD</a:t>
-            </a:r>
-            <a:r>
-              <a:rPr kumimoji="1" lang="ja-JP" altLang="en-US" dirty="0"/>
-              <a:t>形式に変換します。その後、</a:t>
-            </a:r>
-            <a:r>
-              <a:rPr kumimoji="1" lang="en-US" altLang="ja-JP" dirty="0" err="1"/>
-              <a:t>gtsummary</a:t>
-            </a:r>
-            <a:r>
-              <a:rPr kumimoji="1" lang="ja-JP" altLang="en-US" dirty="0"/>
-              <a:t>や</a:t>
-            </a:r>
-            <a:r>
-              <a:rPr kumimoji="1" lang="en-US" altLang="ja-JP" dirty="0" err="1"/>
-              <a:t>tfrmt</a:t>
-            </a:r>
-            <a:r>
-              <a:rPr kumimoji="1" lang="ja-JP" altLang="en-US" dirty="0"/>
-              <a:t>といった</a:t>
-            </a:r>
-            <a:r>
-              <a:rPr kumimoji="1" lang="en-US" altLang="ja-JP" dirty="0"/>
-              <a:t>Package</a:t>
-            </a:r>
-            <a:r>
-              <a:rPr kumimoji="1" lang="ja-JP" altLang="en-US" dirty="0"/>
-              <a:t>を用いて</a:t>
-            </a:r>
-            <a:r>
-              <a:rPr kumimoji="1" lang="en-US" altLang="ja-JP" dirty="0"/>
-              <a:t>Report</a:t>
-            </a:r>
-            <a:r>
-              <a:rPr kumimoji="1" lang="ja-JP" altLang="en-US" dirty="0"/>
-              <a:t>形式にして出力いたします。</a:t>
-            </a:r>
-            <a:endParaRPr kumimoji="1" lang="en-US" altLang="ja-JP" dirty="0"/>
-          </a:p>
-          <a:p>
-            <a:pPr marL="457200" lvl="1" indent="0">
-              <a:buFont typeface="Arial" panose="020B0604020202020204" pitchFamily="34" charset="0"/>
-              <a:buNone/>
-            </a:pPr>
-            <a:endParaRPr kumimoji="1" lang="en-US" altLang="ja-JP" dirty="0"/>
-          </a:p>
-          <a:p>
-            <a:endParaRPr kumimoji="1" lang="en-US" altLang="ja-JP" dirty="0"/>
-          </a:p>
-          <a:p>
-            <a:endParaRPr kumimoji="1" lang="en-US" altLang="ja-JP" dirty="0"/>
-          </a:p>
-          <a:p>
-            <a:r>
-              <a:rPr kumimoji="1" lang="en-US" altLang="ja-JP" dirty="0"/>
-              <a:t>{cards} </a:t>
-            </a:r>
-            <a:r>
-              <a:rPr kumimoji="1" lang="ja-JP" altLang="en-US" dirty="0"/>
-              <a:t>が出力する </a:t>
-            </a:r>
-            <a:r>
-              <a:rPr kumimoji="1" lang="en-US" altLang="ja-JP" dirty="0"/>
-              <a:t>ARD </a:t>
-            </a:r>
-            <a:r>
-              <a:rPr kumimoji="1" lang="ja-JP" altLang="en-US" dirty="0"/>
-              <a:t>は、単なる「サマリーテーブルの一時的な集計結果」ではなく、以下のように再利用可能かつ規格に沿った形で設計されています。</a:t>
-            </a:r>
-          </a:p>
-          <a:p>
-            <a:r>
-              <a:rPr kumimoji="1" lang="ja-JP" altLang="en-US" dirty="0"/>
-              <a:t>標準化されたカラム設計</a:t>
-            </a:r>
-          </a:p>
-          <a:p>
-            <a:r>
-              <a:rPr kumimoji="1" lang="ja-JP" altLang="en-US" dirty="0"/>
-              <a:t>例</a:t>
-            </a:r>
-            <a:r>
-              <a:rPr kumimoji="1" lang="en-US" altLang="ja-JP" dirty="0"/>
-              <a:t>: parameter</a:t>
-            </a:r>
-            <a:r>
-              <a:rPr kumimoji="1" lang="ja-JP" altLang="en-US" dirty="0"/>
-              <a:t>（解析対象の項目名）、</a:t>
-            </a:r>
-            <a:r>
-              <a:rPr kumimoji="1" lang="en-US" altLang="ja-JP" dirty="0" err="1"/>
-              <a:t>analysis_value</a:t>
-            </a:r>
-            <a:r>
-              <a:rPr kumimoji="1" lang="ja-JP" altLang="en-US" dirty="0"/>
-              <a:t>（結果値）、</a:t>
-            </a:r>
-            <a:r>
-              <a:rPr kumimoji="1" lang="en-US" altLang="ja-JP" dirty="0" err="1"/>
-              <a:t>analysis_var</a:t>
-            </a:r>
-            <a:r>
-              <a:rPr kumimoji="1" lang="ja-JP" altLang="en-US" dirty="0"/>
-              <a:t>（どの変数を集計したか）、</a:t>
-            </a:r>
-            <a:r>
-              <a:rPr kumimoji="1" lang="en-US" altLang="ja-JP" dirty="0" err="1"/>
-              <a:t>trt_group</a:t>
-            </a:r>
-            <a:r>
-              <a:rPr kumimoji="1" lang="ja-JP" altLang="en-US" dirty="0"/>
-              <a:t>（治療群）、</a:t>
-            </a:r>
-            <a:r>
-              <a:rPr kumimoji="1" lang="en-US" altLang="ja-JP" dirty="0"/>
-              <a:t>population</a:t>
-            </a:r>
-            <a:r>
-              <a:rPr kumimoji="1" lang="ja-JP" altLang="en-US" dirty="0"/>
-              <a:t>（母集団定義）など。</a:t>
-            </a:r>
-          </a:p>
-          <a:p>
-            <a:r>
-              <a:rPr kumimoji="1" lang="ja-JP" altLang="en-US" dirty="0"/>
-              <a:t>メタデータ付き</a:t>
-            </a:r>
-          </a:p>
-          <a:p>
-            <a:r>
-              <a:rPr kumimoji="1" lang="ja-JP" altLang="en-US" dirty="0"/>
-              <a:t>解析の種類（例</a:t>
-            </a:r>
-            <a:r>
-              <a:rPr kumimoji="1" lang="en-US" altLang="ja-JP" dirty="0"/>
-              <a:t>: AE incidence, summary statistics</a:t>
-            </a:r>
-            <a:r>
-              <a:rPr kumimoji="1" lang="ja-JP" altLang="en-US" dirty="0"/>
-              <a:t>）、集計方法、分母の定義（</a:t>
-            </a:r>
-            <a:r>
-              <a:rPr kumimoji="1" lang="en-US" altLang="ja-JP" dirty="0"/>
-              <a:t>N</a:t>
-            </a:r>
-            <a:r>
-              <a:rPr kumimoji="1" lang="ja-JP" altLang="en-US" dirty="0"/>
-              <a:t>）、小数点桁数などを保持。</a:t>
-            </a:r>
-          </a:p>
-          <a:p>
-            <a:r>
-              <a:rPr kumimoji="1" lang="ja-JP" altLang="en-US" dirty="0"/>
-              <a:t>人が読むテーブルだけでなく、マシンリーダブル</a:t>
-            </a:r>
-          </a:p>
-          <a:p>
-            <a:r>
-              <a:rPr kumimoji="1" lang="ja-JP" altLang="en-US" dirty="0"/>
-              <a:t>結果が</a:t>
-            </a:r>
-            <a:r>
-              <a:rPr kumimoji="1" lang="en-US" altLang="ja-JP" dirty="0"/>
-              <a:t>JSON</a:t>
-            </a:r>
-            <a:r>
-              <a:rPr kumimoji="1" lang="ja-JP" altLang="en-US" dirty="0"/>
-              <a:t>や規格化データとして保持できるため、後続処理（可視化、再集計、照会対応）に適用可能。</a:t>
-            </a:r>
-          </a:p>
           <a:p>
             <a:endParaRPr kumimoji="1" lang="ja-JP" altLang="en-US" dirty="0"/>
           </a:p>
@@ -9351,38 +6949,7 @@
           <a:bodyPr/>
           <a:lstStyle/>
           <a:p>
-            <a:r>
-              <a:rPr kumimoji="1" lang="ja-JP" altLang="en-US" dirty="0"/>
-              <a:t>こちらが今回の</a:t>
-            </a:r>
-            <a:r>
-              <a:rPr kumimoji="1" lang="en-US" altLang="ja-JP" dirty="0" err="1"/>
-              <a:t>anaume</a:t>
-            </a:r>
-            <a:r>
-              <a:rPr kumimoji="1" lang="ja-JP" altLang="en-US" dirty="0"/>
-              <a:t> </a:t>
-            </a:r>
-            <a:r>
-              <a:rPr kumimoji="1" lang="en-US" altLang="ja-JP" dirty="0"/>
-              <a:t>package</a:t>
-            </a:r>
-            <a:r>
-              <a:rPr kumimoji="1" lang="ja-JP" altLang="en-US" dirty="0"/>
-              <a:t>における</a:t>
-            </a:r>
-            <a:r>
-              <a:rPr kumimoji="1" lang="en-US" altLang="ja-JP" dirty="0"/>
-              <a:t>Table</a:t>
-            </a:r>
-            <a:r>
-              <a:rPr kumimoji="1" lang="ja-JP" altLang="en-US" dirty="0"/>
-              <a:t>作成の大まかなフローになっております。</a:t>
-            </a:r>
             <a:endParaRPr kumimoji="1" lang="en-US" altLang="ja-JP" dirty="0"/>
-          </a:p>
-          <a:p>
-            <a:endParaRPr kumimoji="1" lang="ja-JP" altLang="en-US" dirty="0"/>
           </a:p>
         </p:txBody>
       </p:sp>
@@ -14119,6 +11686,336 @@
   <p:cSld>
     <p:spTree>
       <p:nvGrpSpPr>
+        <p:cNvPr id="1" name=""/>
+        <p:cNvGrpSpPr/>
+        <p:nvPr/>
+      </p:nvGrpSpPr>
+      <p:grpSpPr>
+        <a:xfrm>
+          <a:off x="0" y="0"/>
+          <a:ext cx="0" cy="0"/>
+          <a:chOff x="0" y="0"/>
+          <a:chExt cx="0" cy="0"/>
+        </a:xfrm>
+      </p:grpSpPr>
+      <p:sp>
+        <p:nvSpPr>
+          <p:cNvPr id="2" name="Title 1">
+            <a:extLst>
+              <a:ext uri="{FF2B5EF4-FFF2-40B4-BE49-F238E27FC236}">
+                <a16:creationId xmlns:a16="http://schemas.microsoft.com/office/drawing/2014/main" id="{CEE65363-6B02-B8A8-9509-F559C0B0C302}"/>
+              </a:ext>
+            </a:extLst>
+          </p:cNvPr>
+          <p:cNvSpPr>
+            <a:spLocks noGrp="1"/>
+          </p:cNvSpPr>
+          <p:nvPr>
+            <p:ph type="title"/>
+          </p:nvPr>
+        </p:nvSpPr>
+        <p:spPr/>
+        <p:txBody>
+          <a:bodyPr/>
+          <a:lstStyle/>
+          <a:p>
+            <a:r>
+              <a:rPr kumimoji="1" lang="en-US" altLang="ja-JP"/>
+              <a:t>{cards} package</a:t>
+            </a:r>
+            <a:endParaRPr kumimoji="1" lang="ja-JP" altLang="en-US"/>
+          </a:p>
+        </p:txBody>
+      </p:sp>
+      <p:sp>
+        <p:nvSpPr>
+          <p:cNvPr id="3" name="Content Placeholder 2">
+            <a:extLst>
+              <a:ext uri="{FF2B5EF4-FFF2-40B4-BE49-F238E27FC236}">
+                <a16:creationId xmlns:a16="http://schemas.microsoft.com/office/drawing/2014/main" id="{2E5AB1E8-A9F1-09C1-7987-125B0E8FB7B4}"/>
+              </a:ext>
+            </a:extLst>
+          </p:cNvPr>
+          <p:cNvSpPr>
+            <a:spLocks noGrp="1"/>
+          </p:cNvSpPr>
+          <p:nvPr>
+            <p:ph idx="1"/>
+          </p:nvPr>
+        </p:nvSpPr>
+        <p:spPr/>
+        <p:txBody>
+          <a:bodyPr/>
+          <a:lstStyle/>
+          <a:p>
+            <a:r>
+              <a:rPr kumimoji="1" lang="en-US" altLang="ja-JP"/>
+              <a:t>Part of </a:t>
+            </a:r>
+            <a:r>
+              <a:rPr kumimoji="1" lang="en-US" altLang="ja-JP" err="1"/>
+              <a:t>Pharmaverse</a:t>
+            </a:r>
+            <a:endParaRPr kumimoji="1" lang="en-US" altLang="ja-JP"/>
+          </a:p>
+          <a:p>
+            <a:r>
+              <a:rPr kumimoji="1" lang="en-US" altLang="ja-JP"/>
+              <a:t>R package </a:t>
+            </a:r>
+            <a:r>
+              <a:rPr lang="en-US" altLang="ja-JP"/>
+              <a:t>to</a:t>
+            </a:r>
+            <a:r>
+              <a:rPr kumimoji="1" lang="en-US" altLang="ja-JP"/>
+              <a:t> create ARD</a:t>
+            </a:r>
+            <a:endParaRPr kumimoji="1" lang="ja-JP" altLang="en-US"/>
+          </a:p>
+        </p:txBody>
+      </p:sp>
+      <p:sp>
+        <p:nvSpPr>
+          <p:cNvPr id="4" name="Footer Placeholder 3">
+            <a:extLst>
+              <a:ext uri="{FF2B5EF4-FFF2-40B4-BE49-F238E27FC236}">
+                <a16:creationId xmlns:a16="http://schemas.microsoft.com/office/drawing/2014/main" id="{434624DA-9E71-1BCF-FE34-E2B5738BE22C}"/>
+              </a:ext>
+            </a:extLst>
+          </p:cNvPr>
+          <p:cNvSpPr>
+            <a:spLocks noGrp="1"/>
+          </p:cNvSpPr>
+          <p:nvPr>
+            <p:ph type="ftr" sz="quarter" idx="11"/>
+          </p:nvPr>
+        </p:nvSpPr>
+        <p:spPr/>
+        <p:txBody>
+          <a:bodyPr/>
+          <a:lstStyle/>
+          <a:p>
+            <a:r>
+              <a:rPr lang="en-US" noProof="0"/>
+              <a:t>Insert menu &gt; Header &amp; Footer button</a:t>
+            </a:r>
+          </a:p>
+        </p:txBody>
+      </p:sp>
+      <p:pic>
+        <p:nvPicPr>
+          <p:cNvPr id="1026" name="Picture 2">
+            <a:extLst>
+              <a:ext uri="{FF2B5EF4-FFF2-40B4-BE49-F238E27FC236}">
+                <a16:creationId xmlns:a16="http://schemas.microsoft.com/office/drawing/2014/main" id="{C802AED1-E5AD-D395-437F-DFDEE6FBD29E}"/>
+              </a:ext>
+            </a:extLst>
+          </p:cNvPr>
+          <p:cNvPicPr>
+            <a:picLocks noChangeAspect="1" noChangeArrowheads="1"/>
+          </p:cNvPicPr>
+          <p:nvPr/>
+        </p:nvPicPr>
+        <p:blipFill>
+          <a:blip r:embed="rId3">
+            <a:extLst>
+              <a:ext uri="{28A0092B-C50C-407E-A947-70E740481C1C}">
+                <a14:useLocalDpi xmlns:a14="http://schemas.microsoft.com/office/drawing/2010/main" val="0"/>
+              </a:ext>
+            </a:extLst>
+          </a:blip>
+          <a:srcRect/>
+          <a:stretch>
+            <a:fillRect/>
+          </a:stretch>
+        </p:blipFill>
+        <p:spPr bwMode="auto">
+          <a:xfrm>
+            <a:off x="8494850" y="564078"/>
+            <a:ext cx="2286000" cy="2286000"/>
+          </a:xfrm>
+          <a:prstGeom prst="rect">
+            <a:avLst/>
+          </a:prstGeom>
+          <a:noFill/>
+          <a:extLst>
+            <a:ext uri="{909E8E84-426E-40DD-AFC4-6F175D3DCCD1}">
+              <a14:hiddenFill xmlns:a14="http://schemas.microsoft.com/office/drawing/2010/main">
+                <a:solidFill>
+                  <a:srgbClr val="FFFFFF"/>
+                </a:solidFill>
+              </a14:hiddenFill>
+            </a:ext>
+          </a:extLst>
+        </p:spPr>
+      </p:pic>
+      <p:sp>
+        <p:nvSpPr>
+          <p:cNvPr id="5" name="TextBox 4">
+            <a:extLst>
+              <a:ext uri="{FF2B5EF4-FFF2-40B4-BE49-F238E27FC236}">
+                <a16:creationId xmlns:a16="http://schemas.microsoft.com/office/drawing/2014/main" id="{6C3C38AB-DCF5-83EB-F6CC-482807D9B612}"/>
+              </a:ext>
+            </a:extLst>
+          </p:cNvPr>
+          <p:cNvSpPr txBox="1"/>
+          <p:nvPr/>
+        </p:nvSpPr>
+        <p:spPr>
+          <a:xfrm>
+            <a:off x="819397" y="3113866"/>
+            <a:ext cx="5522026" cy="1033154"/>
+          </a:xfrm>
+          <a:prstGeom prst="rect">
+            <a:avLst/>
+          </a:prstGeom>
+          <a:noFill/>
+          <a:ln>
+            <a:solidFill>
+              <a:srgbClr val="0070C0"/>
+            </a:solidFill>
+          </a:ln>
+        </p:spPr>
+        <p:txBody>
+          <a:bodyPr wrap="square" lIns="0" tIns="0" rIns="0" bIns="0" rtlCol="0">
+            <a:normAutofit fontScale="92500" lnSpcReduction="10000"/>
+          </a:bodyPr>
+          <a:lstStyle/>
+          <a:p>
+            <a:pPr>
+              <a:lnSpc>
+                <a:spcPct val="95000"/>
+              </a:lnSpc>
+            </a:pPr>
+            <a:r>
+              <a:rPr kumimoji="1" lang="en-US" altLang="ja-JP" sz="1400" b="1" dirty="0" err="1"/>
+              <a:t>ard_categorical</a:t>
+            </a:r>
+            <a:r>
+              <a:rPr kumimoji="1" lang="en-US" altLang="ja-JP" sz="1400" b="1" dirty="0"/>
+              <a:t>(</a:t>
+            </a:r>
+          </a:p>
+          <a:p>
+            <a:pPr>
+              <a:lnSpc>
+                <a:spcPct val="95000"/>
+              </a:lnSpc>
+            </a:pPr>
+            <a:r>
+              <a:rPr kumimoji="1" lang="en-US" altLang="ja-JP" sz="1400" b="1" dirty="0"/>
+              <a:t>  data = </a:t>
+            </a:r>
+            <a:r>
+              <a:rPr kumimoji="1" lang="en-US" altLang="ja-JP" sz="1400" b="1" dirty="0" err="1"/>
+              <a:t>adae</a:t>
+            </a:r>
+            <a:r>
+              <a:rPr kumimoji="1" lang="en-US" altLang="ja-JP" sz="1400" b="1" dirty="0"/>
+              <a:t>,</a:t>
+            </a:r>
+          </a:p>
+          <a:p>
+            <a:pPr>
+              <a:lnSpc>
+                <a:spcPct val="95000"/>
+              </a:lnSpc>
+            </a:pPr>
+            <a:r>
+              <a:rPr kumimoji="1" lang="en-US" altLang="ja-JP" sz="1400" b="1" dirty="0"/>
+              <a:t>  by = c('AGEGR1','TRT01A’),</a:t>
+            </a:r>
+          </a:p>
+          <a:p>
+            <a:pPr>
+              <a:lnSpc>
+                <a:spcPct val="95000"/>
+              </a:lnSpc>
+            </a:pPr>
+            <a:r>
+              <a:rPr kumimoji="1" lang="en-US" altLang="ja-JP" sz="1400" b="1" dirty="0"/>
+              <a:t>  variables = AEDECOD, </a:t>
+            </a:r>
+          </a:p>
+          <a:p>
+            <a:pPr>
+              <a:lnSpc>
+                <a:spcPct val="95000"/>
+              </a:lnSpc>
+            </a:pPr>
+            <a:r>
+              <a:rPr kumimoji="1" lang="en-US" altLang="ja-JP" sz="1400" b="1" dirty="0"/>
+              <a:t> denominator = </a:t>
+            </a:r>
+            <a:r>
+              <a:rPr kumimoji="1" lang="en-US" altLang="ja-JP" sz="1400" b="1" dirty="0" err="1"/>
+              <a:t>adsl</a:t>
+            </a:r>
+            <a:endParaRPr kumimoji="1" lang="en-US" altLang="ja-JP" sz="1400" b="1" dirty="0"/>
+          </a:p>
+          <a:p>
+            <a:pPr>
+              <a:lnSpc>
+                <a:spcPct val="95000"/>
+              </a:lnSpc>
+            </a:pPr>
+            <a:r>
+              <a:rPr kumimoji="1" lang="en-US" altLang="ja-JP" sz="1400" b="1" dirty="0"/>
+              <a:t>)</a:t>
+            </a:r>
+            <a:endParaRPr kumimoji="1" lang="ja-JP" altLang="en-US" sz="1400" b="1" dirty="0"/>
+          </a:p>
+        </p:txBody>
+      </p:sp>
+      <p:pic>
+        <p:nvPicPr>
+          <p:cNvPr id="8" name="Picture 7">
+            <a:extLst>
+              <a:ext uri="{FF2B5EF4-FFF2-40B4-BE49-F238E27FC236}">
+                <a16:creationId xmlns:a16="http://schemas.microsoft.com/office/drawing/2014/main" id="{1F92BF0C-9136-61D2-A270-952469CAF26A}"/>
+              </a:ext>
+            </a:extLst>
+          </p:cNvPr>
+          <p:cNvPicPr>
+            <a:picLocks noChangeAspect="1"/>
+          </p:cNvPicPr>
+          <p:nvPr/>
+        </p:nvPicPr>
+        <p:blipFill>
+          <a:blip r:embed="rId4"/>
+          <a:stretch>
+            <a:fillRect/>
+          </a:stretch>
+        </p:blipFill>
+        <p:spPr>
+          <a:xfrm>
+            <a:off x="819397" y="4353362"/>
+            <a:ext cx="6992326" cy="2057687"/>
+          </a:xfrm>
+          <a:prstGeom prst="rect">
+            <a:avLst/>
+          </a:prstGeom>
+        </p:spPr>
+      </p:pic>
+    </p:spTree>
+    <p:extLst>
+      <p:ext uri="{BB962C8B-B14F-4D97-AF65-F5344CB8AC3E}">
+        <p14:creationId xmlns:p14="http://schemas.microsoft.com/office/powerpoint/2010/main" val="1297777625"/>
+      </p:ext>
+    </p:extLst>
+  </p:cSld>
+  <p:clrMapOvr>
+    <a:masterClrMapping/>
+  </p:clrMapOvr>
+</p:sld>
+</file>
+
+<file path=ppt/slides/slide15.xml><?xml version="1.0" encoding="utf-8"?>
+<p:sld xmlns:a="http://schemas.openxmlformats.org/drawingml/2006/main" xmlns:r="http://schemas.openxmlformats.org/officeDocument/2006/relationships" xmlns:p="http://schemas.openxmlformats.org/presentationml/2006/main">
+  <p:cSld>
+    <p:spTree>
+      <p:nvGrpSpPr>
         <p:cNvPr id="1" name="">
           <a:extLst>
             <a:ext uri="{FF2B5EF4-FFF2-40B4-BE49-F238E27FC236}">
@@ -14251,35 +12148,29 @@
           <a:p>
             <a:pPr lvl="1"/>
             <a:r>
-              <a:rPr lang="en-US" altLang="ja-JP" dirty="0"/>
+              <a:rPr lang="en-US" altLang="ja-JP" dirty="0">
+                <a:solidFill>
+                  <a:srgbClr val="FF0000"/>
+                </a:solidFill>
+              </a:rPr>
               <a:t>{</a:t>
             </a:r>
             <a:r>
-              <a:rPr lang="en-US" altLang="ja-JP" dirty="0" err="1"/>
+              <a:rPr lang="en-US" altLang="ja-JP" dirty="0" err="1">
+                <a:solidFill>
+                  <a:srgbClr val="FF0000"/>
+                </a:solidFill>
+              </a:rPr>
               <a:t>tfrmt</a:t>
             </a:r>
             <a:r>
-              <a:rPr lang="en-US" altLang="ja-JP" dirty="0"/>
+              <a:rPr lang="en-US" altLang="ja-JP" dirty="0">
+                <a:solidFill>
+                  <a:srgbClr val="FF0000"/>
+                </a:solidFill>
+              </a:rPr>
               <a:t>}</a:t>
             </a:r>
-          </a:p>
-          <a:p>
-            <a:r>
-              <a:rPr lang="en-US" altLang="ja-JP" dirty="0"/>
-              <a:t>Next Slides Will Show Examples Using {</a:t>
-            </a:r>
-            <a:r>
-              <a:rPr lang="en-US" altLang="ja-JP" dirty="0" err="1"/>
-              <a:t>tfrmt</a:t>
-            </a:r>
-            <a:r>
-              <a:rPr lang="en-US" altLang="ja-JP" dirty="0"/>
-              <a:t>}</a:t>
-            </a:r>
-          </a:p>
-          <a:p>
-            <a:pPr lvl="3"/>
-            <a:endParaRPr lang="en-US" altLang="ja-JP" dirty="0"/>
           </a:p>
           <a:p>
             <a:pPr lvl="3"/>
@@ -14406,7 +12297,7 @@
 </p:sld>
 </file>
 
-<file path=ppt/slides/slide15.xml><?xml version="1.0" encoding="utf-8"?>
+<file path=ppt/slides/slide16.xml><?xml version="1.0" encoding="utf-8"?>
 <p:sld xmlns:a="http://schemas.openxmlformats.org/drawingml/2006/main" xmlns:r="http://schemas.openxmlformats.org/officeDocument/2006/relationships" xmlns:p="http://schemas.openxmlformats.org/presentationml/2006/main">
   <p:cSld>
     <p:spTree>
@@ -14506,7 +12397,7 @@
 </p:sld>
 </file>
 
-<file path=ppt/slides/slide16.xml><?xml version="1.0" encoding="utf-8"?>
+<file path=ppt/slides/slide17.xml><?xml version="1.0" encoding="utf-8"?>
 <p:sld xmlns:a="http://schemas.openxmlformats.org/drawingml/2006/main" xmlns:r="http://schemas.openxmlformats.org/officeDocument/2006/relationships" xmlns:p="http://schemas.openxmlformats.org/presentationml/2006/main">
   <p:cSld>
     <p:spTree>
@@ -14703,7 +12594,7 @@
 </p:sld>
 </file>
 
-<file path=ppt/slides/slide17.xml><?xml version="1.0" encoding="utf-8"?>
+<file path=ppt/slides/slide18.xml><?xml version="1.0" encoding="utf-8"?>
 <p:sld xmlns:a="http://schemas.openxmlformats.org/drawingml/2006/main" xmlns:r="http://schemas.openxmlformats.org/officeDocument/2006/relationships" xmlns:p="http://schemas.openxmlformats.org/presentationml/2006/main">
   <p:cSld>
     <p:spTree>
@@ -15718,7 +13609,7 @@
 </p:sld>
 </file>
 
-<file path=ppt/slides/slide18.xml><?xml version="1.0" encoding="utf-8"?>
+<file path=ppt/slides/slide19.xml><?xml version="1.0" encoding="utf-8"?>
 <p:sld xmlns:a="http://schemas.openxmlformats.org/drawingml/2006/main" xmlns:r="http://schemas.openxmlformats.org/officeDocument/2006/relationships" xmlns:p="http://schemas.openxmlformats.org/presentationml/2006/main">
   <p:cSld>
     <p:spTree>
@@ -16122,7 +14013,258 @@
 </p:sld>
 </file>
 
-<file path=ppt/slides/slide19.xml><?xml version="1.0" encoding="utf-8"?>
+<file path=ppt/slides/slide2.xml><?xml version="1.0" encoding="utf-8"?>
+<p:sld xmlns:a="http://schemas.openxmlformats.org/drawingml/2006/main" xmlns:r="http://schemas.openxmlformats.org/officeDocument/2006/relationships" xmlns:p="http://schemas.openxmlformats.org/presentationml/2006/main">
+  <p:cSld>
+    <p:spTree>
+      <p:nvGrpSpPr>
+        <p:cNvPr id="1" name=""/>
+        <p:cNvGrpSpPr/>
+        <p:nvPr/>
+      </p:nvGrpSpPr>
+      <p:grpSpPr>
+        <a:xfrm>
+          <a:off x="0" y="0"/>
+          <a:ext cx="0" cy="0"/>
+          <a:chOff x="0" y="0"/>
+          <a:chExt cx="0" cy="0"/>
+        </a:xfrm>
+      </p:grpSpPr>
+      <p:sp>
+        <p:nvSpPr>
+          <p:cNvPr id="2" name="Title 1">
+            <a:extLst>
+              <a:ext uri="{FF2B5EF4-FFF2-40B4-BE49-F238E27FC236}">
+                <a16:creationId xmlns:a16="http://schemas.microsoft.com/office/drawing/2014/main" id="{E028CB83-353F-E94E-D13E-892D0FFEF954}"/>
+              </a:ext>
+            </a:extLst>
+          </p:cNvPr>
+          <p:cNvSpPr>
+            <a:spLocks noGrp="1"/>
+          </p:cNvSpPr>
+          <p:nvPr>
+            <p:ph type="title"/>
+          </p:nvPr>
+        </p:nvSpPr>
+        <p:spPr/>
+        <p:txBody>
+          <a:bodyPr>
+            <a:normAutofit/>
+          </a:bodyPr>
+          <a:lstStyle/>
+          <a:p>
+            <a:r>
+              <a:rPr lang="ja-JP" altLang="en-US" dirty="0"/>
+              <a:t>本日の発表のゴール</a:t>
+            </a:r>
+            <a:endParaRPr kumimoji="1" lang="ja-JP" altLang="en-US" dirty="0"/>
+          </a:p>
+        </p:txBody>
+      </p:sp>
+      <p:sp>
+        <p:nvSpPr>
+          <p:cNvPr id="4" name="Footer Placeholder 3">
+            <a:extLst>
+              <a:ext uri="{FF2B5EF4-FFF2-40B4-BE49-F238E27FC236}">
+                <a16:creationId xmlns:a16="http://schemas.microsoft.com/office/drawing/2014/main" id="{E1EDCBC0-5AEA-64E7-ED05-F1D1B1E5F6CB}"/>
+              </a:ext>
+            </a:extLst>
+          </p:cNvPr>
+          <p:cNvSpPr>
+            <a:spLocks noGrp="1"/>
+          </p:cNvSpPr>
+          <p:nvPr>
+            <p:ph type="ftr" sz="quarter" idx="11"/>
+          </p:nvPr>
+        </p:nvSpPr>
+        <p:spPr/>
+        <p:txBody>
+          <a:bodyPr/>
+          <a:lstStyle/>
+          <a:p>
+            <a:r>
+              <a:rPr lang="en-US" noProof="0"/>
+              <a:t>Insert menu &gt; Header &amp; Footer button</a:t>
+            </a:r>
+          </a:p>
+        </p:txBody>
+      </p:sp>
+      <p:sp>
+        <p:nvSpPr>
+          <p:cNvPr id="5" name="Rectangle: Rounded Corners 4">
+            <a:extLst>
+              <a:ext uri="{FF2B5EF4-FFF2-40B4-BE49-F238E27FC236}">
+                <a16:creationId xmlns:a16="http://schemas.microsoft.com/office/drawing/2014/main" id="{DA6E8144-ACB0-EBA6-795D-EAFD5F024291}"/>
+              </a:ext>
+            </a:extLst>
+          </p:cNvPr>
+          <p:cNvSpPr/>
+          <p:nvPr/>
+        </p:nvSpPr>
+        <p:spPr>
+          <a:xfrm>
+            <a:off x="780585" y="1839953"/>
+            <a:ext cx="9846527" cy="1204332"/>
+          </a:xfrm>
+          <a:prstGeom prst="roundRect">
+            <a:avLst/>
+          </a:prstGeom>
+          <a:solidFill>
+            <a:srgbClr val="00B8B0"/>
+          </a:solidFill>
+          <a:ln>
+            <a:solidFill>
+              <a:schemeClr val="bg1"/>
+            </a:solidFill>
+          </a:ln>
+        </p:spPr>
+        <p:style>
+          <a:lnRef idx="2">
+            <a:schemeClr val="accent1">
+              <a:shade val="15000"/>
+            </a:schemeClr>
+          </a:lnRef>
+          <a:fillRef idx="1">
+            <a:schemeClr val="accent1"/>
+          </a:fillRef>
+          <a:effectRef idx="0">
+            <a:schemeClr val="accent1"/>
+          </a:effectRef>
+          <a:fontRef idx="minor">
+            <a:schemeClr val="lt1"/>
+          </a:fontRef>
+        </p:style>
+        <p:txBody>
+          <a:bodyPr rtlCol="0" anchor="ctr"/>
+          <a:lstStyle/>
+          <a:p>
+            <a:pPr lvl="1" algn="ctr"/>
+            <a:r>
+              <a:rPr kumimoji="1" lang="en-US" altLang="ja-JP" b="1" dirty="0"/>
+              <a:t>PHUSE</a:t>
+            </a:r>
+            <a:r>
+              <a:rPr kumimoji="1" lang="ja-JP" altLang="en-US" b="1" dirty="0"/>
+              <a:t> </a:t>
+            </a:r>
+            <a:r>
+              <a:rPr kumimoji="1" lang="en-US" altLang="ja-JP" b="1" dirty="0"/>
+              <a:t>OST</a:t>
+            </a:r>
+            <a:r>
+              <a:rPr kumimoji="1" lang="ja-JP" altLang="en-US" b="1" dirty="0"/>
+              <a:t>の活動の一環である</a:t>
+            </a:r>
+            <a:r>
+              <a:rPr kumimoji="1" lang="en-US" altLang="ja-JP" b="1" dirty="0"/>
+              <a:t>{</a:t>
+            </a:r>
+            <a:r>
+              <a:rPr kumimoji="1" lang="en-US" altLang="ja-JP" b="1" dirty="0" err="1"/>
+              <a:t>anaume</a:t>
+            </a:r>
+            <a:r>
+              <a:rPr kumimoji="1" lang="en-US" altLang="ja-JP" b="1" dirty="0"/>
+              <a:t>} package</a:t>
+            </a:r>
+            <a:r>
+              <a:rPr kumimoji="1" lang="ja-JP" altLang="en-US" b="1" dirty="0"/>
+              <a:t>について知っていただく</a:t>
+            </a:r>
+          </a:p>
+        </p:txBody>
+      </p:sp>
+      <p:sp>
+        <p:nvSpPr>
+          <p:cNvPr id="6" name="Rectangle: Rounded Corners 5">
+            <a:extLst>
+              <a:ext uri="{FF2B5EF4-FFF2-40B4-BE49-F238E27FC236}">
+                <a16:creationId xmlns:a16="http://schemas.microsoft.com/office/drawing/2014/main" id="{FC496492-2631-60AB-E822-0EB100F7A122}"/>
+              </a:ext>
+            </a:extLst>
+          </p:cNvPr>
+          <p:cNvSpPr/>
+          <p:nvPr/>
+        </p:nvSpPr>
+        <p:spPr>
+          <a:xfrm>
+            <a:off x="780585" y="3456880"/>
+            <a:ext cx="9846527" cy="1204332"/>
+          </a:xfrm>
+          <a:prstGeom prst="roundRect">
+            <a:avLst/>
+          </a:prstGeom>
+          <a:solidFill>
+            <a:srgbClr val="00B8B0"/>
+          </a:solidFill>
+          <a:ln>
+            <a:solidFill>
+              <a:schemeClr val="bg1"/>
+            </a:solidFill>
+          </a:ln>
+        </p:spPr>
+        <p:style>
+          <a:lnRef idx="2">
+            <a:schemeClr val="accent1">
+              <a:shade val="15000"/>
+            </a:schemeClr>
+          </a:lnRef>
+          <a:fillRef idx="1">
+            <a:schemeClr val="accent1"/>
+          </a:fillRef>
+          <a:effectRef idx="0">
+            <a:schemeClr val="accent1"/>
+          </a:effectRef>
+          <a:fontRef idx="minor">
+            <a:schemeClr val="lt1"/>
+          </a:fontRef>
+        </p:style>
+        <p:txBody>
+          <a:bodyPr rtlCol="0" anchor="ctr"/>
+          <a:lstStyle/>
+          <a:p>
+            <a:pPr algn="ctr"/>
+            <a:r>
+              <a:rPr kumimoji="1" lang="en-US" altLang="ja-JP" b="1" dirty="0"/>
+              <a:t>{</a:t>
+            </a:r>
+            <a:r>
+              <a:rPr kumimoji="1" lang="en-US" altLang="ja-JP" b="1" dirty="0" err="1"/>
+              <a:t>anaume</a:t>
+            </a:r>
+            <a:r>
+              <a:rPr kumimoji="1" lang="en-US" altLang="ja-JP" b="1" dirty="0"/>
+              <a:t>}</a:t>
+            </a:r>
+            <a:r>
+              <a:rPr kumimoji="1" lang="ja-JP" altLang="en-US" b="1" dirty="0"/>
+              <a:t>を例に、一般的な</a:t>
+            </a:r>
+            <a:r>
+              <a:rPr kumimoji="1" lang="en-US" altLang="ja-JP" b="1" dirty="0"/>
+              <a:t>Package</a:t>
+            </a:r>
+            <a:r>
+              <a:rPr kumimoji="1" lang="ja-JP" altLang="en-US" b="1" dirty="0"/>
+              <a:t>の構成要素について理解を深める</a:t>
+            </a:r>
+          </a:p>
+        </p:txBody>
+      </p:sp>
+    </p:spTree>
+    <p:extLst>
+      <p:ext uri="{BB962C8B-B14F-4D97-AF65-F5344CB8AC3E}">
+        <p14:creationId xmlns:p14="http://schemas.microsoft.com/office/powerpoint/2010/main" val="2089644750"/>
+      </p:ext>
+    </p:extLst>
+  </p:cSld>
+  <p:clrMapOvr>
+    <a:masterClrMapping/>
+  </p:clrMapOvr>
+</p:sld>
+</file>
+
+<file path=ppt/slides/slide20.xml><?xml version="1.0" encoding="utf-8"?>
 <p:sld xmlns:a="http://schemas.openxmlformats.org/drawingml/2006/main" xmlns:r="http://schemas.openxmlformats.org/officeDocument/2006/relationships" xmlns:p="http://schemas.openxmlformats.org/presentationml/2006/main">
   <p:cSld>
     <p:spTree>
@@ -16277,7 +14419,7 @@
         <p:spPr>
           <a:xfrm>
             <a:off x="394578" y="1854875"/>
-            <a:ext cx="10683272" cy="4774769"/>
+            <a:ext cx="10683272" cy="4954305"/>
           </a:xfrm>
           <a:prstGeom prst="rect">
             <a:avLst/>
@@ -16995,25 +15137,21 @@
               <a:buNone/>
             </a:pPr>
             <a:r>
-              <a:rPr lang="en-US" altLang="ja-JP" b="0" dirty="0">
+              <a:rPr lang="en-US" altLang="ja-JP" dirty="0">
                 <a:solidFill>
                   <a:srgbClr val="4B69C6"/>
                 </a:solidFill>
-                <a:effectLst/>
                 <a:latin typeface="Consolas" panose="020B0609020204030204" pitchFamily="49" charset="0"/>
               </a:rPr>
               <a:t>Imports:</a:t>
             </a:r>
-            <a:r>
-              <a:rPr lang="en-US" altLang="ja-JP" b="0" dirty="0">
-                <a:solidFill>
-                  <a:srgbClr val="333333"/>
-                </a:solidFill>
-                <a:effectLst/>
-                <a:latin typeface="Consolas" panose="020B0609020204030204" pitchFamily="49" charset="0"/>
-              </a:rPr>
-              <a:t> </a:t>
-            </a:r>
+            <a:endParaRPr lang="en-US" altLang="ja-JP" b="0" dirty="0">
+              <a:solidFill>
+                <a:srgbClr val="333333"/>
+              </a:solidFill>
+              <a:effectLst/>
+              <a:latin typeface="Consolas" panose="020B0609020204030204" pitchFamily="49" charset="0"/>
+            </a:endParaRPr>
           </a:p>
           <a:p>
             <a:pPr>
@@ -17030,8 +15168,14 @@
                 <a:effectLst/>
                 <a:latin typeface="Consolas" panose="020B0609020204030204" pitchFamily="49" charset="0"/>
               </a:rPr>
-              <a:t>    cli,</a:t>
-            </a:r>
+              <a:t>    cards,</a:t>
+            </a:r>
+            <a:endParaRPr lang="en-US" altLang="ja-JP" dirty="0">
+              <a:solidFill>
+                <a:srgbClr val="333333"/>
+              </a:solidFill>
+              <a:latin typeface="Consolas" panose="020B0609020204030204" pitchFamily="49" charset="0"/>
+            </a:endParaRPr>
           </a:p>
           <a:p>
             <a:pPr>
@@ -17041,34 +15185,13 @@
               <a:buNone/>
             </a:pPr>
             <a:r>
-              <a:rPr lang="en-US" altLang="ja-JP" b="0" dirty="0">
+              <a:rPr lang="en-US" altLang="ja-JP" dirty="0">
                 <a:solidFill>
                   <a:srgbClr val="333333"/>
                 </a:solidFill>
-                <a:effectLst/>
-                <a:latin typeface="Consolas" panose="020B0609020204030204" pitchFamily="49" charset="0"/>
-              </a:rPr>
-              <a:t>    </a:t>
-            </a:r>
-            <a:r>
-              <a:rPr lang="en-US" altLang="ja-JP" b="0" dirty="0" err="1">
-                <a:solidFill>
-                  <a:srgbClr val="333333"/>
-                </a:solidFill>
-                <a:effectLst/>
-                <a:latin typeface="Consolas" panose="020B0609020204030204" pitchFamily="49" charset="0"/>
-              </a:rPr>
-              <a:t>dplyr</a:t>
-            </a:r>
-            <a:r>
-              <a:rPr lang="en-US" altLang="ja-JP" b="0" dirty="0">
-                <a:solidFill>
-                  <a:srgbClr val="333333"/>
-                </a:solidFill>
-                <a:effectLst/>
-                <a:latin typeface="Consolas" panose="020B0609020204030204" pitchFamily="49" charset="0"/>
-              </a:rPr>
-              <a:t>,</a:t>
+                <a:latin typeface="Consolas" panose="020B0609020204030204" pitchFamily="49" charset="0"/>
+              </a:rPr>
+              <a:t>    cli,</a:t>
             </a:r>
           </a:p>
           <a:p>
@@ -17079,31 +15202,28 @@
               <a:buNone/>
             </a:pPr>
             <a:r>
-              <a:rPr lang="en-US" altLang="ja-JP" b="0" dirty="0">
+              <a:rPr lang="en-US" altLang="ja-JP" dirty="0">
                 <a:solidFill>
                   <a:srgbClr val="333333"/>
                 </a:solidFill>
-                <a:effectLst/>
                 <a:latin typeface="Consolas" panose="020B0609020204030204" pitchFamily="49" charset="0"/>
               </a:rPr>
               <a:t>    </a:t>
             </a:r>
             <a:r>
-              <a:rPr lang="en-US" altLang="ja-JP" b="0" dirty="0" err="1">
+              <a:rPr lang="en-US" altLang="ja-JP" dirty="0" err="1">
                 <a:solidFill>
                   <a:srgbClr val="333333"/>
                 </a:solidFill>
-                <a:effectLst/>
-                <a:latin typeface="Consolas" panose="020B0609020204030204" pitchFamily="49" charset="0"/>
-              </a:rPr>
-              <a:t>purrr</a:t>
-            </a:r>
-            <a:r>
-              <a:rPr lang="en-US" altLang="ja-JP" b="0" dirty="0">
+                <a:latin typeface="Consolas" panose="020B0609020204030204" pitchFamily="49" charset="0"/>
+              </a:rPr>
+              <a:t>dplyr</a:t>
+            </a:r>
+            <a:r>
+              <a:rPr lang="en-US" altLang="ja-JP" dirty="0">
                 <a:solidFill>
                   <a:srgbClr val="333333"/>
                 </a:solidFill>
-                <a:effectLst/>
                 <a:latin typeface="Consolas" panose="020B0609020204030204" pitchFamily="49" charset="0"/>
               </a:rPr>
               <a:t>,</a:t>
@@ -17117,31 +15237,28 @@
               <a:buNone/>
             </a:pPr>
             <a:r>
-              <a:rPr lang="en-US" altLang="ja-JP" b="0" dirty="0">
+              <a:rPr lang="en-US" altLang="ja-JP" dirty="0">
                 <a:solidFill>
                   <a:srgbClr val="333333"/>
                 </a:solidFill>
-                <a:effectLst/>
                 <a:latin typeface="Consolas" panose="020B0609020204030204" pitchFamily="49" charset="0"/>
               </a:rPr>
               <a:t>    </a:t>
             </a:r>
             <a:r>
-              <a:rPr lang="en-US" altLang="ja-JP" b="0" dirty="0" err="1">
+              <a:rPr lang="en-US" altLang="ja-JP" dirty="0" err="1">
                 <a:solidFill>
                   <a:srgbClr val="333333"/>
                 </a:solidFill>
-                <a:effectLst/>
-                <a:latin typeface="Consolas" panose="020B0609020204030204" pitchFamily="49" charset="0"/>
-              </a:rPr>
-              <a:t>rlang</a:t>
-            </a:r>
-            <a:r>
-              <a:rPr lang="en-US" altLang="ja-JP" b="0" dirty="0">
+                <a:latin typeface="Consolas" panose="020B0609020204030204" pitchFamily="49" charset="0"/>
+              </a:rPr>
+              <a:t>purrr</a:t>
+            </a:r>
+            <a:r>
+              <a:rPr lang="en-US" altLang="ja-JP" dirty="0">
                 <a:solidFill>
                   <a:srgbClr val="333333"/>
                 </a:solidFill>
-                <a:effectLst/>
                 <a:latin typeface="Consolas" panose="020B0609020204030204" pitchFamily="49" charset="0"/>
               </a:rPr>
               <a:t>,</a:t>
@@ -17155,15 +15272,47 @@
               <a:buNone/>
             </a:pPr>
             <a:r>
-              <a:rPr lang="en-US" altLang="ja-JP" b="0" dirty="0">
+              <a:rPr lang="en-US" altLang="ja-JP" dirty="0">
                 <a:solidFill>
                   <a:srgbClr val="333333"/>
                 </a:solidFill>
-                <a:effectLst/>
-                <a:latin typeface="Consolas" panose="020B0609020204030204" pitchFamily="49" charset="0"/>
-              </a:rPr>
-              <a:t>    cards</a:t>
-            </a:r>
+                <a:latin typeface="Consolas" panose="020B0609020204030204" pitchFamily="49" charset="0"/>
+              </a:rPr>
+              <a:t>    </a:t>
+            </a:r>
+            <a:r>
+              <a:rPr lang="en-US" altLang="ja-JP" dirty="0" err="1">
+                <a:solidFill>
+                  <a:srgbClr val="333333"/>
+                </a:solidFill>
+                <a:latin typeface="Consolas" panose="020B0609020204030204" pitchFamily="49" charset="0"/>
+              </a:rPr>
+              <a:t>rlang</a:t>
+            </a:r>
+            <a:r>
+              <a:rPr lang="en-US" altLang="ja-JP" dirty="0">
+                <a:solidFill>
+                  <a:srgbClr val="333333"/>
+                </a:solidFill>
+                <a:latin typeface="Consolas" panose="020B0609020204030204" pitchFamily="49" charset="0"/>
+              </a:rPr>
+              <a:t>,</a:t>
+            </a:r>
+          </a:p>
+          <a:p>
+            <a:pPr>
+              <a:lnSpc>
+                <a:spcPts val="1425"/>
+              </a:lnSpc>
+              <a:buNone/>
+            </a:pPr>
+            <a:endParaRPr lang="en-US" altLang="ja-JP" b="0" dirty="0">
+              <a:solidFill>
+                <a:srgbClr val="333333"/>
+              </a:solidFill>
+              <a:effectLst/>
+              <a:latin typeface="Consolas" panose="020B0609020204030204" pitchFamily="49" charset="0"/>
+            </a:endParaRPr>
           </a:p>
           <a:p>
             <a:pPr>
@@ -17401,258 +15550,7 @@
 </p:sld>
 </file>
 
-<file path=ppt/slides/slide2.xml><?xml version="1.0" encoding="utf-8"?>
-<p:sld xmlns:a="http://schemas.openxmlformats.org/drawingml/2006/main" xmlns:r="http://schemas.openxmlformats.org/officeDocument/2006/relationships" xmlns:p="http://schemas.openxmlformats.org/presentationml/2006/main">
-  <p:cSld>
-    <p:spTree>
-      <p:nvGrpSpPr>
-        <p:cNvPr id="1" name=""/>
-        <p:cNvGrpSpPr/>
-        <p:nvPr/>
-      </p:nvGrpSpPr>
-      <p:grpSpPr>
-        <a:xfrm>
-          <a:off x="0" y="0"/>
-          <a:ext cx="0" cy="0"/>
-          <a:chOff x="0" y="0"/>
-          <a:chExt cx="0" cy="0"/>
-        </a:xfrm>
-      </p:grpSpPr>
-      <p:sp>
-        <p:nvSpPr>
-          <p:cNvPr id="2" name="Title 1">
-            <a:extLst>
-              <a:ext uri="{FF2B5EF4-FFF2-40B4-BE49-F238E27FC236}">
-                <a16:creationId xmlns:a16="http://schemas.microsoft.com/office/drawing/2014/main" id="{E028CB83-353F-E94E-D13E-892D0FFEF954}"/>
-              </a:ext>
-            </a:extLst>
-          </p:cNvPr>
-          <p:cNvSpPr>
-            <a:spLocks noGrp="1"/>
-          </p:cNvSpPr>
-          <p:nvPr>
-            <p:ph type="title"/>
-          </p:nvPr>
-        </p:nvSpPr>
-        <p:spPr/>
-        <p:txBody>
-          <a:bodyPr>
-            <a:normAutofit/>
-          </a:bodyPr>
-          <a:lstStyle/>
-          <a:p>
-            <a:r>
-              <a:rPr lang="ja-JP" altLang="en-US" dirty="0"/>
-              <a:t>本日の発表のゴール</a:t>
-            </a:r>
-            <a:endParaRPr kumimoji="1" lang="ja-JP" altLang="en-US" dirty="0"/>
-          </a:p>
-        </p:txBody>
-      </p:sp>
-      <p:sp>
-        <p:nvSpPr>
-          <p:cNvPr id="4" name="Footer Placeholder 3">
-            <a:extLst>
-              <a:ext uri="{FF2B5EF4-FFF2-40B4-BE49-F238E27FC236}">
-                <a16:creationId xmlns:a16="http://schemas.microsoft.com/office/drawing/2014/main" id="{E1EDCBC0-5AEA-64E7-ED05-F1D1B1E5F6CB}"/>
-              </a:ext>
-            </a:extLst>
-          </p:cNvPr>
-          <p:cNvSpPr>
-            <a:spLocks noGrp="1"/>
-          </p:cNvSpPr>
-          <p:nvPr>
-            <p:ph type="ftr" sz="quarter" idx="11"/>
-          </p:nvPr>
-        </p:nvSpPr>
-        <p:spPr/>
-        <p:txBody>
-          <a:bodyPr/>
-          <a:lstStyle/>
-          <a:p>
-            <a:r>
-              <a:rPr lang="en-US" noProof="0"/>
-              <a:t>Insert menu &gt; Header &amp; Footer button</a:t>
-            </a:r>
-          </a:p>
-        </p:txBody>
-      </p:sp>
-      <p:sp>
-        <p:nvSpPr>
-          <p:cNvPr id="5" name="Rectangle: Rounded Corners 4">
-            <a:extLst>
-              <a:ext uri="{FF2B5EF4-FFF2-40B4-BE49-F238E27FC236}">
-                <a16:creationId xmlns:a16="http://schemas.microsoft.com/office/drawing/2014/main" id="{DA6E8144-ACB0-EBA6-795D-EAFD5F024291}"/>
-              </a:ext>
-            </a:extLst>
-          </p:cNvPr>
-          <p:cNvSpPr/>
-          <p:nvPr/>
-        </p:nvSpPr>
-        <p:spPr>
-          <a:xfrm>
-            <a:off x="780585" y="1839953"/>
-            <a:ext cx="9846527" cy="1204332"/>
-          </a:xfrm>
-          <a:prstGeom prst="roundRect">
-            <a:avLst/>
-          </a:prstGeom>
-          <a:solidFill>
-            <a:srgbClr val="00B8B0"/>
-          </a:solidFill>
-          <a:ln>
-            <a:solidFill>
-              <a:schemeClr val="bg1"/>
-            </a:solidFill>
-          </a:ln>
-        </p:spPr>
-        <p:style>
-          <a:lnRef idx="2">
-            <a:schemeClr val="accent1">
-              <a:shade val="15000"/>
-            </a:schemeClr>
-          </a:lnRef>
-          <a:fillRef idx="1">
-            <a:schemeClr val="accent1"/>
-          </a:fillRef>
-          <a:effectRef idx="0">
-            <a:schemeClr val="accent1"/>
-          </a:effectRef>
-          <a:fontRef idx="minor">
-            <a:schemeClr val="lt1"/>
-          </a:fontRef>
-        </p:style>
-        <p:txBody>
-          <a:bodyPr rtlCol="0" anchor="ctr"/>
-          <a:lstStyle/>
-          <a:p>
-            <a:pPr lvl="1" algn="ctr"/>
-            <a:r>
-              <a:rPr kumimoji="1" lang="en-US" altLang="ja-JP" b="1" dirty="0"/>
-              <a:t>PHUSE</a:t>
-            </a:r>
-            <a:r>
-              <a:rPr kumimoji="1" lang="ja-JP" altLang="en-US" b="1" dirty="0"/>
-              <a:t> </a:t>
-            </a:r>
-            <a:r>
-              <a:rPr kumimoji="1" lang="en-US" altLang="ja-JP" b="1" dirty="0"/>
-              <a:t>OST</a:t>
-            </a:r>
-            <a:r>
-              <a:rPr kumimoji="1" lang="ja-JP" altLang="en-US" b="1" dirty="0"/>
-              <a:t>の活動の一環である</a:t>
-            </a:r>
-            <a:r>
-              <a:rPr kumimoji="1" lang="en-US" altLang="ja-JP" b="1" dirty="0"/>
-              <a:t>{</a:t>
-            </a:r>
-            <a:r>
-              <a:rPr kumimoji="1" lang="en-US" altLang="ja-JP" b="1" dirty="0" err="1"/>
-              <a:t>anaume</a:t>
-            </a:r>
-            <a:r>
-              <a:rPr kumimoji="1" lang="en-US" altLang="ja-JP" b="1" dirty="0"/>
-              <a:t>} package</a:t>
-            </a:r>
-            <a:r>
-              <a:rPr kumimoji="1" lang="ja-JP" altLang="en-US" b="1" dirty="0"/>
-              <a:t>について知っていただく</a:t>
-            </a:r>
-          </a:p>
-        </p:txBody>
-      </p:sp>
-      <p:sp>
-        <p:nvSpPr>
-          <p:cNvPr id="6" name="Rectangle: Rounded Corners 5">
-            <a:extLst>
-              <a:ext uri="{FF2B5EF4-FFF2-40B4-BE49-F238E27FC236}">
-                <a16:creationId xmlns:a16="http://schemas.microsoft.com/office/drawing/2014/main" id="{FC496492-2631-60AB-E822-0EB100F7A122}"/>
-              </a:ext>
-            </a:extLst>
-          </p:cNvPr>
-          <p:cNvSpPr/>
-          <p:nvPr/>
-        </p:nvSpPr>
-        <p:spPr>
-          <a:xfrm>
-            <a:off x="780585" y="3456880"/>
-            <a:ext cx="9846527" cy="1204332"/>
-          </a:xfrm>
-          <a:prstGeom prst="roundRect">
-            <a:avLst/>
-          </a:prstGeom>
-          <a:solidFill>
-            <a:srgbClr val="00B8B0"/>
-          </a:solidFill>
-          <a:ln>
-            <a:solidFill>
-              <a:schemeClr val="bg1"/>
-            </a:solidFill>
-          </a:ln>
-        </p:spPr>
-        <p:style>
-          <a:lnRef idx="2">
-            <a:schemeClr val="accent1">
-              <a:shade val="15000"/>
-            </a:schemeClr>
-          </a:lnRef>
-          <a:fillRef idx="1">
-            <a:schemeClr val="accent1"/>
-          </a:fillRef>
-          <a:effectRef idx="0">
-            <a:schemeClr val="accent1"/>
-          </a:effectRef>
-          <a:fontRef idx="minor">
-            <a:schemeClr val="lt1"/>
-          </a:fontRef>
-        </p:style>
-        <p:txBody>
-          <a:bodyPr rtlCol="0" anchor="ctr"/>
-          <a:lstStyle/>
-          <a:p>
-            <a:pPr algn="ctr"/>
-            <a:r>
-              <a:rPr kumimoji="1" lang="en-US" altLang="ja-JP" b="1" dirty="0"/>
-              <a:t>{</a:t>
-            </a:r>
-            <a:r>
-              <a:rPr kumimoji="1" lang="en-US" altLang="ja-JP" b="1" dirty="0" err="1"/>
-              <a:t>anaume</a:t>
-            </a:r>
-            <a:r>
-              <a:rPr kumimoji="1" lang="en-US" altLang="ja-JP" b="1" dirty="0"/>
-              <a:t>}</a:t>
-            </a:r>
-            <a:r>
-              <a:rPr kumimoji="1" lang="ja-JP" altLang="en-US" b="1" dirty="0"/>
-              <a:t>を例に、一般的な</a:t>
-            </a:r>
-            <a:r>
-              <a:rPr kumimoji="1" lang="en-US" altLang="ja-JP" b="1" dirty="0"/>
-              <a:t>Package</a:t>
-            </a:r>
-            <a:r>
-              <a:rPr kumimoji="1" lang="ja-JP" altLang="en-US" b="1" dirty="0"/>
-              <a:t>の構成要素について理解を深める</a:t>
-            </a:r>
-          </a:p>
-        </p:txBody>
-      </p:sp>
-    </p:spTree>
-    <p:extLst>
-      <p:ext uri="{BB962C8B-B14F-4D97-AF65-F5344CB8AC3E}">
-        <p14:creationId xmlns:p14="http://schemas.microsoft.com/office/powerpoint/2010/main" val="2089644750"/>
-      </p:ext>
-    </p:extLst>
-  </p:cSld>
-  <p:clrMapOvr>
-    <a:masterClrMapping/>
-  </p:clrMapOvr>
-</p:sld>
-</file>
-
-<file path=ppt/slides/slide20.xml><?xml version="1.0" encoding="utf-8"?>
+<file path=ppt/slides/slide21.xml><?xml version="1.0" encoding="utf-8"?>
 <p:sld xmlns:a="http://schemas.openxmlformats.org/drawingml/2006/main" xmlns:r="http://schemas.openxmlformats.org/officeDocument/2006/relationships" xmlns:p="http://schemas.openxmlformats.org/presentationml/2006/main">
   <p:cSld>
     <p:spTree>
@@ -19332,7 +17230,7 @@
 </p:sld>
 </file>
 
-<file path=ppt/slides/slide21.xml><?xml version="1.0" encoding="utf-8"?>
+<file path=ppt/slides/slide22.xml><?xml version="1.0" encoding="utf-8"?>
 <p:sld xmlns:a="http://schemas.openxmlformats.org/drawingml/2006/main" xmlns:r="http://schemas.openxmlformats.org/officeDocument/2006/relationships" xmlns:p="http://schemas.openxmlformats.org/presentationml/2006/main">
   <p:cSld>
     <p:spTree>
@@ -19744,7 +17642,7 @@
 </p:sld>
 </file>
 
-<file path=ppt/slides/slide22.xml><?xml version="1.0" encoding="utf-8"?>
+<file path=ppt/slides/slide23.xml><?xml version="1.0" encoding="utf-8"?>
 <p:sld xmlns:a="http://schemas.openxmlformats.org/drawingml/2006/main" xmlns:r="http://schemas.openxmlformats.org/officeDocument/2006/relationships" xmlns:p="http://schemas.openxmlformats.org/presentationml/2006/main">
   <p:cSld>
     <p:spTree>
@@ -19817,7 +17715,7 @@
           </p:nvPr>
         </p:nvPicPr>
         <p:blipFill>
-          <a:blip r:embed="rId2"/>
+          <a:blip r:embed="rId3"/>
           <a:stretch>
             <a:fillRect/>
           </a:stretch>
@@ -20182,7 +18080,7 @@
 </p:sld>
 </file>
 
-<file path=ppt/slides/slide23.xml><?xml version="1.0" encoding="utf-8"?>
+<file path=ppt/slides/slide24.xml><?xml version="1.0" encoding="utf-8"?>
 <p:sld xmlns:a="http://schemas.openxmlformats.org/drawingml/2006/main" xmlns:r="http://schemas.openxmlformats.org/officeDocument/2006/relationships" xmlns:p="http://schemas.openxmlformats.org/presentationml/2006/main">
   <p:cSld>
     <p:spTree>
@@ -20570,7 +18468,7 @@
 </p:sld>
 </file>
 
-<file path=ppt/slides/slide24.xml><?xml version="1.0" encoding="utf-8"?>
+<file path=ppt/slides/slide25.xml><?xml version="1.0" encoding="utf-8"?>
 <p:sld xmlns:a="http://schemas.openxmlformats.org/drawingml/2006/main" xmlns:r="http://schemas.openxmlformats.org/officeDocument/2006/relationships" xmlns:p="http://schemas.openxmlformats.org/presentationml/2006/main">
   <p:cSld>
     <p:spTree>
@@ -20616,7 +18514,7 @@
           <a:p>
             <a:r>
               <a:rPr kumimoji="1" lang="en-US" altLang="ja-JP" dirty="0"/>
-              <a:t>Readme</a:t>
+              <a:t>README</a:t>
             </a:r>
             <a:endParaRPr kumimoji="1" lang="ja-JP" altLang="en-US" dirty="0"/>
           </a:p>
@@ -20789,7 +18687,7 @@
           <p:nvPr/>
         </p:nvPicPr>
         <p:blipFill>
-          <a:blip r:embed="rId2"/>
+          <a:blip r:embed="rId3"/>
           <a:stretch>
             <a:fillRect/>
           </a:stretch>
@@ -20822,7 +18720,7 @@
 </p:sld>
 </file>
 
-<file path=ppt/slides/slide25.xml><?xml version="1.0" encoding="utf-8"?>
+<file path=ppt/slides/slide26.xml><?xml version="1.0" encoding="utf-8"?>
 <p:sld xmlns:a="http://schemas.openxmlformats.org/drawingml/2006/main" xmlns:r="http://schemas.openxmlformats.org/officeDocument/2006/relationships" xmlns:p="http://schemas.openxmlformats.org/presentationml/2006/main">
   <p:cSld>
     <p:spTree>
@@ -21025,7 +18923,7 @@
 </p:sld>
 </file>
 
-<file path=ppt/slides/slide26.xml><?xml version="1.0" encoding="utf-8"?>
+<file path=ppt/slides/slide27.xml><?xml version="1.0" encoding="utf-8"?>
 <p:sld xmlns:a="http://schemas.openxmlformats.org/drawingml/2006/main" xmlns:r="http://schemas.openxmlformats.org/officeDocument/2006/relationships" xmlns:p="http://schemas.openxmlformats.org/presentationml/2006/main">
   <p:cSld>
     <p:spTree>
@@ -21344,7 +19242,7 @@
 </p:sld>
 </file>
 
-<file path=ppt/slides/slide27.xml><?xml version="1.0" encoding="utf-8"?>
+<file path=ppt/slides/slide28.xml><?xml version="1.0" encoding="utf-8"?>
 <p:sld xmlns:a="http://schemas.openxmlformats.org/drawingml/2006/main" xmlns:r="http://schemas.openxmlformats.org/officeDocument/2006/relationships" xmlns:p="http://schemas.openxmlformats.org/presentationml/2006/main">
   <p:cSld>
     <p:spTree>
@@ -22520,7 +20418,7 @@
 </p:sld>
 </file>
 
-<file path=ppt/slides/slide28.xml><?xml version="1.0" encoding="utf-8"?>
+<file path=ppt/slides/slide29.xml><?xml version="1.0" encoding="utf-8"?>
 <p:sld xmlns:a="http://schemas.openxmlformats.org/drawingml/2006/main" xmlns:r="http://schemas.openxmlformats.org/officeDocument/2006/relationships" xmlns:p="http://schemas.openxmlformats.org/presentationml/2006/main">
   <p:cSld>
     <p:spTree>
@@ -22785,7 +20683,113 @@
 </p:sld>
 </file>
 
-<file path=ppt/slides/slide29.xml><?xml version="1.0" encoding="utf-8"?>
+<file path=ppt/slides/slide3.xml><?xml version="1.0" encoding="utf-8"?>
+<p:sld xmlns:a="http://schemas.openxmlformats.org/drawingml/2006/main" xmlns:r="http://schemas.openxmlformats.org/officeDocument/2006/relationships" xmlns:p="http://schemas.openxmlformats.org/presentationml/2006/main">
+  <p:cSld>
+    <p:spTree>
+      <p:nvGrpSpPr>
+        <p:cNvPr id="1" name=""/>
+        <p:cNvGrpSpPr/>
+        <p:nvPr/>
+      </p:nvGrpSpPr>
+      <p:grpSpPr>
+        <a:xfrm>
+          <a:off x="0" y="0"/>
+          <a:ext cx="0" cy="0"/>
+          <a:chOff x="0" y="0"/>
+          <a:chExt cx="0" cy="0"/>
+        </a:xfrm>
+      </p:grpSpPr>
+      <p:sp>
+        <p:nvSpPr>
+          <p:cNvPr id="2" name="Title 1">
+            <a:extLst>
+              <a:ext uri="{FF2B5EF4-FFF2-40B4-BE49-F238E27FC236}">
+                <a16:creationId xmlns:a16="http://schemas.microsoft.com/office/drawing/2014/main" id="{9259A228-343C-E370-F0F0-883395C4A557}"/>
+              </a:ext>
+            </a:extLst>
+          </p:cNvPr>
+          <p:cNvSpPr>
+            <a:spLocks noGrp="1"/>
+          </p:cNvSpPr>
+          <p:nvPr>
+            <p:ph type="title"/>
+          </p:nvPr>
+        </p:nvSpPr>
+        <p:spPr>
+          <a:xfrm>
+            <a:off x="604838" y="2827673"/>
+            <a:ext cx="9721417" cy="809834"/>
+          </a:xfrm>
+        </p:spPr>
+        <p:txBody>
+          <a:bodyPr/>
+          <a:lstStyle/>
+          <a:p>
+            <a:r>
+              <a:rPr lang="en-US" altLang="ja-JP" dirty="0">
+                <a:ea typeface="ＭＳ Ｐゴシック"/>
+              </a:rPr>
+              <a:t>Introduction of {</a:t>
+            </a:r>
+            <a:r>
+              <a:rPr lang="en-US" altLang="ja-JP" dirty="0" err="1">
+                <a:ea typeface="ＭＳ Ｐゴシック"/>
+              </a:rPr>
+              <a:t>anaume</a:t>
+            </a:r>
+            <a:r>
+              <a:rPr lang="en-US" altLang="ja-JP" dirty="0">
+                <a:ea typeface="ＭＳ Ｐゴシック"/>
+              </a:rPr>
+              <a:t>}</a:t>
+            </a:r>
+            <a:endParaRPr kumimoji="1" lang="ja-JP" altLang="en-US" dirty="0"/>
+          </a:p>
+        </p:txBody>
+      </p:sp>
+      <p:sp>
+        <p:nvSpPr>
+          <p:cNvPr id="4" name="Footer Placeholder 3">
+            <a:extLst>
+              <a:ext uri="{FF2B5EF4-FFF2-40B4-BE49-F238E27FC236}">
+                <a16:creationId xmlns:a16="http://schemas.microsoft.com/office/drawing/2014/main" id="{60407E95-DC63-8F69-1E6E-E176BBB41393}"/>
+              </a:ext>
+            </a:extLst>
+          </p:cNvPr>
+          <p:cNvSpPr>
+            <a:spLocks noGrp="1"/>
+          </p:cNvSpPr>
+          <p:nvPr>
+            <p:ph type="ftr" sz="quarter" idx="11"/>
+          </p:nvPr>
+        </p:nvSpPr>
+        <p:spPr/>
+        <p:txBody>
+          <a:bodyPr/>
+          <a:lstStyle/>
+          <a:p>
+            <a:r>
+              <a:rPr lang="en-US" noProof="0"/>
+              <a:t>Insert menu &gt; Header &amp; Footer button</a:t>
+            </a:r>
+          </a:p>
+        </p:txBody>
+      </p:sp>
+    </p:spTree>
+    <p:extLst>
+      <p:ext uri="{BB962C8B-B14F-4D97-AF65-F5344CB8AC3E}">
+        <p14:creationId xmlns:p14="http://schemas.microsoft.com/office/powerpoint/2010/main" val="1868981238"/>
+      </p:ext>
+    </p:extLst>
+  </p:cSld>
+  <p:clrMapOvr>
+    <a:masterClrMapping/>
+  </p:clrMapOvr>
+</p:sld>
+</file>
+
+<file path=ppt/slides/slide30.xml><?xml version="1.0" encoding="utf-8"?>
 <p:sld xmlns:a="http://schemas.openxmlformats.org/drawingml/2006/main" xmlns:r="http://schemas.openxmlformats.org/officeDocument/2006/relationships" xmlns:p="http://schemas.openxmlformats.org/presentationml/2006/main">
   <p:cSld>
     <p:spTree>
@@ -23704,113 +21708,7 @@
 </p:sld>
 </file>
 
-<file path=ppt/slides/slide3.xml><?xml version="1.0" encoding="utf-8"?>
-<p:sld xmlns:a="http://schemas.openxmlformats.org/drawingml/2006/main" xmlns:r="http://schemas.openxmlformats.org/officeDocument/2006/relationships" xmlns:p="http://schemas.openxmlformats.org/presentationml/2006/main">
-  <p:cSld>
-    <p:spTree>
-      <p:nvGrpSpPr>
-        <p:cNvPr id="1" name=""/>
-        <p:cNvGrpSpPr/>
-        <p:nvPr/>
-      </p:nvGrpSpPr>
-      <p:grpSpPr>
-        <a:xfrm>
-          <a:off x="0" y="0"/>
-          <a:ext cx="0" cy="0"/>
-          <a:chOff x="0" y="0"/>
-          <a:chExt cx="0" cy="0"/>
-        </a:xfrm>
-      </p:grpSpPr>
-      <p:sp>
-        <p:nvSpPr>
-          <p:cNvPr id="2" name="Title 1">
-            <a:extLst>
-              <a:ext uri="{FF2B5EF4-FFF2-40B4-BE49-F238E27FC236}">
-                <a16:creationId xmlns:a16="http://schemas.microsoft.com/office/drawing/2014/main" id="{9259A228-343C-E370-F0F0-883395C4A557}"/>
-              </a:ext>
-            </a:extLst>
-          </p:cNvPr>
-          <p:cNvSpPr>
-            <a:spLocks noGrp="1"/>
-          </p:cNvSpPr>
-          <p:nvPr>
-            <p:ph type="title"/>
-          </p:nvPr>
-        </p:nvSpPr>
-        <p:spPr>
-          <a:xfrm>
-            <a:off x="604838" y="2827673"/>
-            <a:ext cx="9721417" cy="809834"/>
-          </a:xfrm>
-        </p:spPr>
-        <p:txBody>
-          <a:bodyPr/>
-          <a:lstStyle/>
-          <a:p>
-            <a:r>
-              <a:rPr lang="en-US" altLang="ja-JP" dirty="0">
-                <a:ea typeface="ＭＳ Ｐゴシック"/>
-              </a:rPr>
-              <a:t>Introduction of {</a:t>
-            </a:r>
-            <a:r>
-              <a:rPr lang="en-US" altLang="ja-JP" dirty="0" err="1">
-                <a:ea typeface="ＭＳ Ｐゴシック"/>
-              </a:rPr>
-              <a:t>anaume</a:t>
-            </a:r>
-            <a:r>
-              <a:rPr lang="en-US" altLang="ja-JP" dirty="0">
-                <a:ea typeface="ＭＳ Ｐゴシック"/>
-              </a:rPr>
-              <a:t>}</a:t>
-            </a:r>
-            <a:endParaRPr kumimoji="1" lang="ja-JP" altLang="en-US" dirty="0"/>
-          </a:p>
-        </p:txBody>
-      </p:sp>
-      <p:sp>
-        <p:nvSpPr>
-          <p:cNvPr id="4" name="Footer Placeholder 3">
-            <a:extLst>
-              <a:ext uri="{FF2B5EF4-FFF2-40B4-BE49-F238E27FC236}">
-                <a16:creationId xmlns:a16="http://schemas.microsoft.com/office/drawing/2014/main" id="{60407E95-DC63-8F69-1E6E-E176BBB41393}"/>
-              </a:ext>
-            </a:extLst>
-          </p:cNvPr>
-          <p:cNvSpPr>
-            <a:spLocks noGrp="1"/>
-          </p:cNvSpPr>
-          <p:nvPr>
-            <p:ph type="ftr" sz="quarter" idx="11"/>
-          </p:nvPr>
-        </p:nvSpPr>
-        <p:spPr/>
-        <p:txBody>
-          <a:bodyPr/>
-          <a:lstStyle/>
-          <a:p>
-            <a:r>
-              <a:rPr lang="en-US" noProof="0"/>
-              <a:t>Insert menu &gt; Header &amp; Footer button</a:t>
-            </a:r>
-          </a:p>
-        </p:txBody>
-      </p:sp>
-    </p:spTree>
-    <p:extLst>
-      <p:ext uri="{BB962C8B-B14F-4D97-AF65-F5344CB8AC3E}">
-        <p14:creationId xmlns:p14="http://schemas.microsoft.com/office/powerpoint/2010/main" val="1868981238"/>
-      </p:ext>
-    </p:extLst>
-  </p:cSld>
-  <p:clrMapOvr>
-    <a:masterClrMapping/>
-  </p:clrMapOvr>
-</p:sld>
-</file>
-
-<file path=ppt/slides/slide30.xml><?xml version="1.0" encoding="utf-8"?>
+<file path=ppt/slides/slide31.xml><?xml version="1.0" encoding="utf-8"?>
 <p:sld xmlns:a="http://schemas.openxmlformats.org/drawingml/2006/main" xmlns:r="http://schemas.openxmlformats.org/officeDocument/2006/relationships" xmlns:p="http://schemas.openxmlformats.org/presentationml/2006/main">
   <p:cSld>
     <p:spTree>
@@ -24230,7 +22128,7 @@
 </p:sld>
 </file>
 
-<file path=ppt/slides/slide31.xml><?xml version="1.0" encoding="utf-8"?>
+<file path=ppt/slides/slide32.xml><?xml version="1.0" encoding="utf-8"?>
 <p:sld xmlns:a="http://schemas.openxmlformats.org/drawingml/2006/main" xmlns:r="http://schemas.openxmlformats.org/officeDocument/2006/relationships" xmlns:p="http://schemas.openxmlformats.org/presentationml/2006/main">
   <p:cSld>
     <p:spTree>
@@ -24335,6 +22233,17 @@
           </a:p>
           <a:p>
             <a:r>
+              <a:rPr lang="en-US" altLang="ja-JP" dirty="0"/>
+              <a:t>R CMD check </a:t>
+            </a:r>
+            <a:r>
+              <a:rPr lang="ja-JP" altLang="en-US" dirty="0"/>
+              <a:t>時に自動実行されるため、関数修正時に意図しない挙動の変化を防ぐ。</a:t>
+            </a:r>
+            <a:endParaRPr lang="en-US" altLang="ja-JP" dirty="0"/>
+          </a:p>
+          <a:p>
+            <a:r>
               <a:rPr lang="ja-JP" altLang="en-US" dirty="0"/>
               <a:t>個別の</a:t>
             </a:r>
@@ -24384,17 +22293,6 @@
             <a:r>
               <a:rPr lang="ja-JP" altLang="en-US" dirty="0"/>
               <a:t>で実行する構造を持つことが多い。</a:t>
-            </a:r>
-            <a:endParaRPr lang="en-US" altLang="ja-JP" dirty="0"/>
-          </a:p>
-          <a:p>
-            <a:r>
-              <a:rPr lang="en-US" altLang="ja-JP" dirty="0"/>
-              <a:t>R CMD check </a:t>
-            </a:r>
-            <a:r>
-              <a:rPr lang="ja-JP" altLang="en-US" dirty="0"/>
-              <a:t>時に自動実行されるため、関数修正時に意図しない挙動の変化を防ぐ。</a:t>
             </a:r>
             <a:endParaRPr lang="en-US" altLang="ja-JP" dirty="0"/>
           </a:p>
@@ -24973,7 +22871,7 @@
 </p:sld>
 </file>
 
-<file path=ppt/slides/slide32.xml><?xml version="1.0" encoding="utf-8"?>
+<file path=ppt/slides/slide33.xml><?xml version="1.0" encoding="utf-8"?>
 <p:sld xmlns:a="http://schemas.openxmlformats.org/drawingml/2006/main" xmlns:r="http://schemas.openxmlformats.org/officeDocument/2006/relationships" xmlns:p="http://schemas.openxmlformats.org/presentationml/2006/main">
   <p:cSld>
     <p:spTree>
@@ -27536,7 +25434,7 @@
 </p:sld>
 </file>
 
-<file path=ppt/slides/slide33.xml><?xml version="1.0" encoding="utf-8"?>
+<file path=ppt/slides/slide34.xml><?xml version="1.0" encoding="utf-8"?>
 <p:sld xmlns:a="http://schemas.openxmlformats.org/drawingml/2006/main" xmlns:r="http://schemas.openxmlformats.org/officeDocument/2006/relationships" xmlns:p="http://schemas.openxmlformats.org/presentationml/2006/main">
   <p:cSld>
     <p:spTree>
@@ -27792,7 +25690,7 @@
 </p:sld>
 </file>
 
-<file path=ppt/slides/slide34.xml><?xml version="1.0" encoding="utf-8"?>
+<file path=ppt/slides/slide35.xml><?xml version="1.0" encoding="utf-8"?>
 <p:sld xmlns:a="http://schemas.openxmlformats.org/drawingml/2006/main" xmlns:r="http://schemas.openxmlformats.org/officeDocument/2006/relationships" xmlns:p="http://schemas.openxmlformats.org/presentationml/2006/main">
   <p:cSld>
     <p:spTree>
@@ -27892,7 +25790,7 @@
 </p:sld>
 </file>
 
-<file path=ppt/slides/slide35.xml><?xml version="1.0" encoding="utf-8"?>
+<file path=ppt/slides/slide36.xml><?xml version="1.0" encoding="utf-8"?>
 <p:sld xmlns:a="http://schemas.openxmlformats.org/drawingml/2006/main" xmlns:r="http://schemas.openxmlformats.org/officeDocument/2006/relationships" xmlns:p="http://schemas.openxmlformats.org/presentationml/2006/main">
   <p:cSld>
     <p:spTree>
@@ -27983,336 +25881,6 @@
     <p:extLst>
       <p:ext uri="{BB962C8B-B14F-4D97-AF65-F5344CB8AC3E}">
         <p14:creationId xmlns:p14="http://schemas.microsoft.com/office/powerpoint/2010/main" val="881183180"/>
-      </p:ext>
-    </p:extLst>
-  </p:cSld>
-  <p:clrMapOvr>
-    <a:masterClrMapping/>
-  </p:clrMapOvr>
-</p:sld>
-</file>
-
-<file path=ppt/slides/slide36.xml><?xml version="1.0" encoding="utf-8"?>
-<p:sld xmlns:a="http://schemas.openxmlformats.org/drawingml/2006/main" xmlns:r="http://schemas.openxmlformats.org/officeDocument/2006/relationships" xmlns:p="http://schemas.openxmlformats.org/presentationml/2006/main">
-  <p:cSld>
-    <p:spTree>
-      <p:nvGrpSpPr>
-        <p:cNvPr id="1" name=""/>
-        <p:cNvGrpSpPr/>
-        <p:nvPr/>
-      </p:nvGrpSpPr>
-      <p:grpSpPr>
-        <a:xfrm>
-          <a:off x="0" y="0"/>
-          <a:ext cx="0" cy="0"/>
-          <a:chOff x="0" y="0"/>
-          <a:chExt cx="0" cy="0"/>
-        </a:xfrm>
-      </p:grpSpPr>
-      <p:sp>
-        <p:nvSpPr>
-          <p:cNvPr id="2" name="Title 1">
-            <a:extLst>
-              <a:ext uri="{FF2B5EF4-FFF2-40B4-BE49-F238E27FC236}">
-                <a16:creationId xmlns:a16="http://schemas.microsoft.com/office/drawing/2014/main" id="{CEE65363-6B02-B8A8-9509-F559C0B0C302}"/>
-              </a:ext>
-            </a:extLst>
-          </p:cNvPr>
-          <p:cNvSpPr>
-            <a:spLocks noGrp="1"/>
-          </p:cNvSpPr>
-          <p:nvPr>
-            <p:ph type="title"/>
-          </p:nvPr>
-        </p:nvSpPr>
-        <p:spPr/>
-        <p:txBody>
-          <a:bodyPr/>
-          <a:lstStyle/>
-          <a:p>
-            <a:r>
-              <a:rPr kumimoji="1" lang="en-US" altLang="ja-JP"/>
-              <a:t>{cards} package</a:t>
-            </a:r>
-            <a:endParaRPr kumimoji="1" lang="ja-JP" altLang="en-US"/>
-          </a:p>
-        </p:txBody>
-      </p:sp>
-      <p:sp>
-        <p:nvSpPr>
-          <p:cNvPr id="3" name="Content Placeholder 2">
-            <a:extLst>
-              <a:ext uri="{FF2B5EF4-FFF2-40B4-BE49-F238E27FC236}">
-                <a16:creationId xmlns:a16="http://schemas.microsoft.com/office/drawing/2014/main" id="{2E5AB1E8-A9F1-09C1-7987-125B0E8FB7B4}"/>
-              </a:ext>
-            </a:extLst>
-          </p:cNvPr>
-          <p:cNvSpPr>
-            <a:spLocks noGrp="1"/>
-          </p:cNvSpPr>
-          <p:nvPr>
-            <p:ph idx="1"/>
-          </p:nvPr>
-        </p:nvSpPr>
-        <p:spPr/>
-        <p:txBody>
-          <a:bodyPr/>
-          <a:lstStyle/>
-          <a:p>
-            <a:r>
-              <a:rPr kumimoji="1" lang="en-US" altLang="ja-JP"/>
-              <a:t>Part of </a:t>
-            </a:r>
-            <a:r>
-              <a:rPr kumimoji="1" lang="en-US" altLang="ja-JP" err="1"/>
-              <a:t>Pharmaverse</a:t>
-            </a:r>
-            <a:endParaRPr kumimoji="1" lang="en-US" altLang="ja-JP"/>
-          </a:p>
-          <a:p>
-            <a:r>
-              <a:rPr kumimoji="1" lang="en-US" altLang="ja-JP"/>
-              <a:t>R package </a:t>
-            </a:r>
-            <a:r>
-              <a:rPr lang="en-US" altLang="ja-JP"/>
-              <a:t>to</a:t>
-            </a:r>
-            <a:r>
-              <a:rPr kumimoji="1" lang="en-US" altLang="ja-JP"/>
-              <a:t> create ARD</a:t>
-            </a:r>
-            <a:endParaRPr kumimoji="1" lang="ja-JP" altLang="en-US"/>
-          </a:p>
-        </p:txBody>
-      </p:sp>
-      <p:sp>
-        <p:nvSpPr>
-          <p:cNvPr id="4" name="Footer Placeholder 3">
-            <a:extLst>
-              <a:ext uri="{FF2B5EF4-FFF2-40B4-BE49-F238E27FC236}">
-                <a16:creationId xmlns:a16="http://schemas.microsoft.com/office/drawing/2014/main" id="{434624DA-9E71-1BCF-FE34-E2B5738BE22C}"/>
-              </a:ext>
-            </a:extLst>
-          </p:cNvPr>
-          <p:cNvSpPr>
-            <a:spLocks noGrp="1"/>
-          </p:cNvSpPr>
-          <p:nvPr>
-            <p:ph type="ftr" sz="quarter" idx="11"/>
-          </p:nvPr>
-        </p:nvSpPr>
-        <p:spPr/>
-        <p:txBody>
-          <a:bodyPr/>
-          <a:lstStyle/>
-          <a:p>
-            <a:r>
-              <a:rPr lang="en-US" noProof="0"/>
-              <a:t>Insert menu &gt; Header &amp; Footer button</a:t>
-            </a:r>
-          </a:p>
-        </p:txBody>
-      </p:sp>
-      <p:pic>
-        <p:nvPicPr>
-          <p:cNvPr id="1026" name="Picture 2">
-            <a:extLst>
-              <a:ext uri="{FF2B5EF4-FFF2-40B4-BE49-F238E27FC236}">
-                <a16:creationId xmlns:a16="http://schemas.microsoft.com/office/drawing/2014/main" id="{C802AED1-E5AD-D395-437F-DFDEE6FBD29E}"/>
-              </a:ext>
-            </a:extLst>
-          </p:cNvPr>
-          <p:cNvPicPr>
-            <a:picLocks noChangeAspect="1" noChangeArrowheads="1"/>
-          </p:cNvPicPr>
-          <p:nvPr/>
-        </p:nvPicPr>
-        <p:blipFill>
-          <a:blip r:embed="rId3">
-            <a:extLst>
-              <a:ext uri="{28A0092B-C50C-407E-A947-70E740481C1C}">
-                <a14:useLocalDpi xmlns:a14="http://schemas.microsoft.com/office/drawing/2010/main" val="0"/>
-              </a:ext>
-            </a:extLst>
-          </a:blip>
-          <a:srcRect/>
-          <a:stretch>
-            <a:fillRect/>
-          </a:stretch>
-        </p:blipFill>
-        <p:spPr bwMode="auto">
-          <a:xfrm>
-            <a:off x="8494850" y="564078"/>
-            <a:ext cx="2286000" cy="2286000"/>
-          </a:xfrm>
-          <a:prstGeom prst="rect">
-            <a:avLst/>
-          </a:prstGeom>
-          <a:noFill/>
-          <a:extLst>
-            <a:ext uri="{909E8E84-426E-40DD-AFC4-6F175D3DCCD1}">
-              <a14:hiddenFill xmlns:a14="http://schemas.microsoft.com/office/drawing/2010/main">
-                <a:solidFill>
-                  <a:srgbClr val="FFFFFF"/>
-                </a:solidFill>
-              </a14:hiddenFill>
-            </a:ext>
-          </a:extLst>
-        </p:spPr>
-      </p:pic>
-      <p:sp>
-        <p:nvSpPr>
-          <p:cNvPr id="5" name="TextBox 4">
-            <a:extLst>
-              <a:ext uri="{FF2B5EF4-FFF2-40B4-BE49-F238E27FC236}">
-                <a16:creationId xmlns:a16="http://schemas.microsoft.com/office/drawing/2014/main" id="{6C3C38AB-DCF5-83EB-F6CC-482807D9B612}"/>
-              </a:ext>
-            </a:extLst>
-          </p:cNvPr>
-          <p:cNvSpPr txBox="1"/>
-          <p:nvPr/>
-        </p:nvSpPr>
-        <p:spPr>
-          <a:xfrm>
-            <a:off x="819397" y="3113866"/>
-            <a:ext cx="5522026" cy="1033154"/>
-          </a:xfrm>
-          <a:prstGeom prst="rect">
-            <a:avLst/>
-          </a:prstGeom>
-          <a:noFill/>
-          <a:ln>
-            <a:solidFill>
-              <a:srgbClr val="0070C0"/>
-            </a:solidFill>
-          </a:ln>
-        </p:spPr>
-        <p:txBody>
-          <a:bodyPr wrap="square" lIns="0" tIns="0" rIns="0" bIns="0" rtlCol="0">
-            <a:normAutofit fontScale="92500" lnSpcReduction="10000"/>
-          </a:bodyPr>
-          <a:lstStyle/>
-          <a:p>
-            <a:pPr>
-              <a:lnSpc>
-                <a:spcPct val="95000"/>
-              </a:lnSpc>
-            </a:pPr>
-            <a:r>
-              <a:rPr kumimoji="1" lang="en-US" altLang="ja-JP" sz="1400" b="1" dirty="0" err="1"/>
-              <a:t>ard_categorical</a:t>
-            </a:r>
-            <a:r>
-              <a:rPr kumimoji="1" lang="en-US" altLang="ja-JP" sz="1400" b="1" dirty="0"/>
-              <a:t>(</a:t>
-            </a:r>
-          </a:p>
-          <a:p>
-            <a:pPr>
-              <a:lnSpc>
-                <a:spcPct val="95000"/>
-              </a:lnSpc>
-            </a:pPr>
-            <a:r>
-              <a:rPr kumimoji="1" lang="en-US" altLang="ja-JP" sz="1400" b="1" dirty="0"/>
-              <a:t>  data = </a:t>
-            </a:r>
-            <a:r>
-              <a:rPr kumimoji="1" lang="en-US" altLang="ja-JP" sz="1400" b="1" dirty="0" err="1"/>
-              <a:t>adae</a:t>
-            </a:r>
-            <a:r>
-              <a:rPr kumimoji="1" lang="en-US" altLang="ja-JP" sz="1400" b="1" dirty="0"/>
-              <a:t>,</a:t>
-            </a:r>
-          </a:p>
-          <a:p>
-            <a:pPr>
-              <a:lnSpc>
-                <a:spcPct val="95000"/>
-              </a:lnSpc>
-            </a:pPr>
-            <a:r>
-              <a:rPr kumimoji="1" lang="en-US" altLang="ja-JP" sz="1400" b="1" dirty="0"/>
-              <a:t>  by = c('AGEGR1','TRT01A’),</a:t>
-            </a:r>
-          </a:p>
-          <a:p>
-            <a:pPr>
-              <a:lnSpc>
-                <a:spcPct val="95000"/>
-              </a:lnSpc>
-            </a:pPr>
-            <a:r>
-              <a:rPr kumimoji="1" lang="en-US" altLang="ja-JP" sz="1400" b="1" dirty="0"/>
-              <a:t>  variables = AEDECOD, </a:t>
-            </a:r>
-          </a:p>
-          <a:p>
-            <a:pPr>
-              <a:lnSpc>
-                <a:spcPct val="95000"/>
-              </a:lnSpc>
-            </a:pPr>
-            <a:r>
-              <a:rPr kumimoji="1" lang="en-US" altLang="ja-JP" sz="1400" b="1" dirty="0"/>
-              <a:t> denominator = </a:t>
-            </a:r>
-            <a:r>
-              <a:rPr kumimoji="1" lang="en-US" altLang="ja-JP" sz="1400" b="1" dirty="0" err="1"/>
-              <a:t>adsl</a:t>
-            </a:r>
-            <a:endParaRPr kumimoji="1" lang="en-US" altLang="ja-JP" sz="1400" b="1" dirty="0"/>
-          </a:p>
-          <a:p>
-            <a:pPr>
-              <a:lnSpc>
-                <a:spcPct val="95000"/>
-              </a:lnSpc>
-            </a:pPr>
-            <a:r>
-              <a:rPr kumimoji="1" lang="en-US" altLang="ja-JP" sz="1400" b="1" dirty="0"/>
-              <a:t>)</a:t>
-            </a:r>
-            <a:endParaRPr kumimoji="1" lang="ja-JP" altLang="en-US" sz="1400" b="1" dirty="0"/>
-          </a:p>
-        </p:txBody>
-      </p:sp>
-      <p:pic>
-        <p:nvPicPr>
-          <p:cNvPr id="8" name="Picture 7">
-            <a:extLst>
-              <a:ext uri="{FF2B5EF4-FFF2-40B4-BE49-F238E27FC236}">
-                <a16:creationId xmlns:a16="http://schemas.microsoft.com/office/drawing/2014/main" id="{1F92BF0C-9136-61D2-A270-952469CAF26A}"/>
-              </a:ext>
-            </a:extLst>
-          </p:cNvPr>
-          <p:cNvPicPr>
-            <a:picLocks noChangeAspect="1"/>
-          </p:cNvPicPr>
-          <p:nvPr/>
-        </p:nvPicPr>
-        <p:blipFill>
-          <a:blip r:embed="rId4"/>
-          <a:stretch>
-            <a:fillRect/>
-          </a:stretch>
-        </p:blipFill>
-        <p:spPr>
-          <a:xfrm>
-            <a:off x="819397" y="4353362"/>
-            <a:ext cx="6992326" cy="2057687"/>
-          </a:xfrm>
-          <a:prstGeom prst="rect">
-            <a:avLst/>
-          </a:prstGeom>
-        </p:spPr>
-      </p:pic>
-    </p:spTree>
-    <p:extLst>
-      <p:ext uri="{BB962C8B-B14F-4D97-AF65-F5344CB8AC3E}">
-        <p14:creationId xmlns:p14="http://schemas.microsoft.com/office/powerpoint/2010/main" val="3062608193"/>
       </p:ext>
     </p:extLst>
   </p:cSld>
@@ -30713,7 +28281,7 @@
             <p:ph idx="1"/>
             <p:extLst>
               <p:ext uri="{D42A27DB-BD31-4B8C-83A1-F6EECF244321}">
-                <p14:modId xmlns:p14="http://schemas.microsoft.com/office/powerpoint/2010/main" val="2665725140"/>
+                <p14:modId xmlns:p14="http://schemas.microsoft.com/office/powerpoint/2010/main" val="3297890179"/>
               </p:ext>
             </p:extLst>
           </p:nvPr>
@@ -33160,17 +30728,6 @@
 </file>
 
 <file path=customXml/item1.xml><?xml version="1.0" encoding="utf-8"?>
-<p:properties xmlns:p="http://schemas.microsoft.com/office/2006/metadata/properties" xmlns:xsi="http://www.w3.org/2001/XMLSchema-instance" xmlns:pc="http://schemas.microsoft.com/office/infopath/2007/PartnerControls">
-  <documentManagement>
-    <lcf76f155ced4ddcb4097134ff3c332f xmlns="0ba1c913-3834-46f4-a0c5-fd96f14654cd">
-      <Terms xmlns="http://schemas.microsoft.com/office/infopath/2007/PartnerControls"/>
-    </lcf76f155ced4ddcb4097134ff3c332f>
-    <TaxCatchAll xmlns="c9ac3ab4-a7cc-4b3a-aeed-dd55a233ac4b" xsi:nil="true"/>
-  </documentManagement>
-</p:properties>
-</file>
-
-<file path=customXml/item2.xml><?xml version="1.0" encoding="utf-8"?>
 <?mso-contentType ?>
 <FormTemplates xmlns="http://schemas.microsoft.com/sharepoint/v3/contenttype/forms">
   <Display>DocumentLibraryForm</Display>
@@ -33179,9 +30736,9 @@
 </FormTemplates>
 </file>
 
-<file path=customXml/item3.xml><?xml version="1.0" encoding="utf-8"?>
-<ct:contentTypeSchema xmlns:ct="http://schemas.microsoft.com/office/2006/metadata/contentType" xmlns:ma="http://schemas.microsoft.com/office/2006/metadata/properties/metaAttributes" ct:_="" ma:_="" ma:contentTypeName="ドキュメント" ma:contentTypeID="0x0101006DBF427431D4B1448BE8CF98B93B7DD2" ma:contentTypeVersion="18" ma:contentTypeDescription="新しいドキュメントを作成します。" ma:contentTypeScope="" ma:versionID="7e411dd88952b3e88ee9a1886b830c0a">
-  <xsd:schema xmlns:xsd="http://www.w3.org/2001/XMLSchema" xmlns:xs="http://www.w3.org/2001/XMLSchema" xmlns:p="http://schemas.microsoft.com/office/2006/metadata/properties" xmlns:ns2="0ba1c913-3834-46f4-a0c5-fd96f14654cd" xmlns:ns3="ea1b8532-76a1-4465-838b-77a68046580b" xmlns:ns4="c9ac3ab4-a7cc-4b3a-aeed-dd55a233ac4b" targetNamespace="http://schemas.microsoft.com/office/2006/metadata/properties" ma:root="true" ma:fieldsID="9b2ffe5075fefe4ca8a85251e908ba36" ns2:_="" ns3:_="" ns4:_="">
+<file path=customXml/item2.xml><?xml version="1.0" encoding="utf-8"?>
+<ct:contentTypeSchema xmlns:ct="http://schemas.microsoft.com/office/2006/metadata/contentType" xmlns:ma="http://schemas.microsoft.com/office/2006/metadata/properties/metaAttributes" ct:_="" ma:_="" ma:contentTypeName="Document" ma:contentTypeID="0x0101006DBF427431D4B1448BE8CF98B93B7DD2" ma:contentTypeVersion="18" ma:contentTypeDescription="Create a new document." ma:contentTypeScope="" ma:versionID="7e00f65772eaa6b4e2a1f3806e43c919">
+  <xsd:schema xmlns:xsd="http://www.w3.org/2001/XMLSchema" xmlns:xs="http://www.w3.org/2001/XMLSchema" xmlns:p="http://schemas.microsoft.com/office/2006/metadata/properties" xmlns:ns2="0ba1c913-3834-46f4-a0c5-fd96f14654cd" xmlns:ns3="ea1b8532-76a1-4465-838b-77a68046580b" xmlns:ns4="c9ac3ab4-a7cc-4b3a-aeed-dd55a233ac4b" targetNamespace="http://schemas.microsoft.com/office/2006/metadata/properties" ma:root="true" ma:fieldsID="2f09ec59953cd912df5c7bc2dd54bc36" ns2:_="" ns3:_="" ns4:_="">
     <xsd:import namespace="0ba1c913-3834-46f4-a0c5-fd96f14654cd"/>
     <xsd:import namespace="ea1b8532-76a1-4465-838b-77a68046580b"/>
     <xsd:import namespace="c9ac3ab4-a7cc-4b3a-aeed-dd55a233ac4b"/>
@@ -33277,7 +30834,7 @@
         <xsd:restriction base="dms:Text"/>
       </xsd:simpleType>
     </xsd:element>
-    <xsd:element name="lcf76f155ced4ddcb4097134ff3c332f" ma:index="22" nillable="true" ma:taxonomy="true" ma:internalName="lcf76f155ced4ddcb4097134ff3c332f" ma:taxonomyFieldName="MediaServiceImageTags" ma:displayName="画像タグ" ma:readOnly="false" ma:fieldId="{5cf76f15-5ced-4ddc-b409-7134ff3c332f}" ma:taxonomyMulti="true" ma:sspId="737bc47b-3997-4ccb-824d-08e9c3bde3a4" ma:termSetId="09814cd3-568e-fe90-9814-8d621ff8fb84" ma:anchorId="fba54fb3-c3e1-fe81-a776-ca4b69148c4d" ma:open="true" ma:isKeyword="false">
+    <xsd:element name="lcf76f155ced4ddcb4097134ff3c332f" ma:index="22" nillable="true" ma:taxonomy="true" ma:internalName="lcf76f155ced4ddcb4097134ff3c332f" ma:taxonomyFieldName="MediaServiceImageTags" ma:displayName="Image Tags" ma:readOnly="false" ma:fieldId="{5cf76f15-5ced-4ddc-b409-7134ff3c332f}" ma:taxonomyMulti="true" ma:sspId="737bc47b-3997-4ccb-824d-08e9c3bde3a4" ma:termSetId="09814cd3-568e-fe90-9814-8d621ff8fb84" ma:anchorId="fba54fb3-c3e1-fe81-a776-ca4b69148c4d" ma:open="true" ma:isKeyword="false">
       <xsd:complexType>
         <xsd:sequence>
           <xsd:element ref="pc:Terms" minOccurs="0" maxOccurs="1"/>
@@ -33298,7 +30855,7 @@
   <xsd:schema xmlns:xsd="http://www.w3.org/2001/XMLSchema" xmlns:xs="http://www.w3.org/2001/XMLSchema" xmlns:dms="http://schemas.microsoft.com/office/2006/documentManagement/types" xmlns:pc="http://schemas.microsoft.com/office/infopath/2007/PartnerControls" targetNamespace="ea1b8532-76a1-4465-838b-77a68046580b" elementFormDefault="qualified">
     <xsd:import namespace="http://schemas.microsoft.com/office/2006/documentManagement/types"/>
     <xsd:import namespace="http://schemas.microsoft.com/office/infopath/2007/PartnerControls"/>
-    <xsd:element name="SharedWithUsers" ma:index="18" nillable="true" ma:displayName="共有相手" ma:internalName="SharedWithUsers" ma:readOnly="true">
+    <xsd:element name="SharedWithUsers" ma:index="18" nillable="true" ma:displayName="Shared With" ma:internalName="SharedWithUsers" ma:readOnly="true">
       <xsd:complexType>
         <xsd:complexContent>
           <xsd:extension base="dms:UserMulti">
@@ -33317,7 +30874,7 @@
         </xsd:complexContent>
       </xsd:complexType>
     </xsd:element>
-    <xsd:element name="SharedWithDetails" ma:index="19" nillable="true" ma:displayName="共有相手の詳細情報" ma:internalName="SharedWithDetails" ma:readOnly="true">
+    <xsd:element name="SharedWithDetails" ma:index="19" nillable="true" ma:displayName="Shared With Details" ma:internalName="SharedWithDetails" ma:readOnly="true">
       <xsd:simpleType>
         <xsd:restriction base="dms:Note">
           <xsd:maxLength value="255"/>
@@ -33349,7 +30906,7 @@
         <xsd:element ref="dc:creator" minOccurs="0" maxOccurs="1"/>
         <xsd:element ref="dcterms:created" minOccurs="0" maxOccurs="1"/>
         <xsd:element ref="dc:identifier" minOccurs="0" maxOccurs="1"/>
-        <xsd:element name="contentType" minOccurs="0" maxOccurs="1" type="xsd:string" ma:index="0" ma:displayName="コンテンツ タイプ"/>
+        <xsd:element name="contentType" minOccurs="0" maxOccurs="1" type="xsd:string" ma:index="0" ma:displayName="Content Type"/>
         <xsd:element ref="dc:title" minOccurs="0" maxOccurs="1" ma:index="4" ma:displayName="Title"/>
         <xsd:element ref="dc:subject" minOccurs="0" maxOccurs="1"/>
         <xsd:element ref="dc:description" minOccurs="0" maxOccurs="1"/>
@@ -33439,7 +30996,46 @@
 </ct:contentTypeSchema>
 </file>
 
+<file path=customXml/item3.xml><?xml version="1.0" encoding="utf-8"?>
+<p:properties xmlns:p="http://schemas.microsoft.com/office/2006/metadata/properties" xmlns:xsi="http://www.w3.org/2001/XMLSchema-instance" xmlns:pc="http://schemas.microsoft.com/office/infopath/2007/PartnerControls">
+  <documentManagement>
+    <lcf76f155ced4ddcb4097134ff3c332f xmlns="0ba1c913-3834-46f4-a0c5-fd96f14654cd">
+      <Terms xmlns="http://schemas.microsoft.com/office/infopath/2007/PartnerControls"/>
+    </lcf76f155ced4ddcb4097134ff3c332f>
+    <TaxCatchAll xmlns="c9ac3ab4-a7cc-4b3a-aeed-dd55a233ac4b" xsi:nil="true"/>
+  </documentManagement>
+</p:properties>
+</file>
+
 <file path=customXml/itemProps1.xml><?xml version="1.0" encoding="utf-8"?>
+<ds:datastoreItem xmlns:ds="http://schemas.openxmlformats.org/officeDocument/2006/customXml" ds:itemID="{783934D6-F2B8-47B6-9D7B-821C97B08206}">
+  <ds:schemaRefs>
+    <ds:schemaRef ds:uri="http://schemas.microsoft.com/sharepoint/v3/contenttype/forms"/>
+  </ds:schemaRefs>
+</ds:datastoreItem>
+</file>
+
+<file path=customXml/itemProps2.xml><?xml version="1.0" encoding="utf-8"?>
+<ds:datastoreItem xmlns:ds="http://schemas.openxmlformats.org/officeDocument/2006/customXml" ds:itemID="{B1A56458-9DCF-48E9-90BC-62FC0E0BED29}">
+  <ds:schemaRefs>
+    <ds:schemaRef ds:uri="http://schemas.microsoft.com/office/2006/metadata/contentType"/>
+    <ds:schemaRef ds:uri="http://schemas.microsoft.com/office/2006/metadata/properties/metaAttributes"/>
+    <ds:schemaRef ds:uri="http://www.w3.org/2001/XMLSchema"/>
+    <ds:schemaRef ds:uri="http://schemas.microsoft.com/office/2006/metadata/properties"/>
+    <ds:schemaRef ds:uri="0ba1c913-3834-46f4-a0c5-fd96f14654cd"/>
+    <ds:schemaRef ds:uri="ea1b8532-76a1-4465-838b-77a68046580b"/>
+    <ds:schemaRef ds:uri="c9ac3ab4-a7cc-4b3a-aeed-dd55a233ac4b"/>
+    <ds:schemaRef ds:uri="http://schemas.microsoft.com/office/2006/documentManagement/types"/>
+    <ds:schemaRef ds:uri="http://schemas.microsoft.com/office/infopath/2007/PartnerControls"/>
+    <ds:schemaRef ds:uri="http://schemas.openxmlformats.org/package/2006/metadata/core-properties"/>
+    <ds:schemaRef ds:uri="http://purl.org/dc/elements/1.1/"/>
+    <ds:schemaRef ds:uri="http://purl.org/dc/terms/"/>
+    <ds:schemaRef ds:uri="http://schemas.microsoft.com/internal/obd"/>
+  </ds:schemaRefs>
+</ds:datastoreItem>
+</file>
+
+<file path=customXml/itemProps3.xml><?xml version="1.0" encoding="utf-8"?>
 <ds:datastoreItem xmlns:ds="http://schemas.openxmlformats.org/officeDocument/2006/customXml" ds:itemID="{41188CA7-0472-47C4-85A3-1E0E095052CF}">
   <ds:schemaRefs>
     <ds:schemaRef ds:uri="http://www.w3.org/XML/1998/namespace"/>
@@ -33457,18 +31053,6 @@
 </ds:datastoreItem>
 </file>
 
-<file path=customXml/itemProps2.xml><?xml version="1.0" encoding="utf-8"?>
-<ds:datastoreItem xmlns:ds="http://schemas.openxmlformats.org/officeDocument/2006/customXml" ds:itemID="{783934D6-F2B8-47B6-9D7B-821C97B08206}">
-  <ds:schemaRefs>
-    <ds:schemaRef ds:uri="http://schemas.microsoft.com/sharepoint/v3/contenttype/forms"/>
-  </ds:schemaRefs>
-</ds:datastoreItem>
-</file>
-
-<file path=customXml/itemProps3.xml><?xml version="1.0" encoding="utf-8"?>
-<ds:datastoreItem xmlns:ds="http://schemas.openxmlformats.org/officeDocument/2006/customXml" ds:itemID="{06F19139-E932-45D9-A455-C41D06B86380}"/>
-</file>
-
 <file path=docMetadata/LabelInfo.xml><?xml version="1.0" encoding="utf-8"?>
 <clbl:labelList xmlns:clbl="http://schemas.microsoft.com/office/2020/mipLabelMetadata">
   <clbl:label id="{3c9bec58-8084-492e-8360-0e1cfe36408c}" enabled="1" method="Standard" siteId="{f35a6974-607f-47d4-82d7-ff31d7dc53a5}" removed="0"/>
